--- a/exports/pptx/lessons/middle-module-14-magic-squares/day-09-sudoku-and-project.pptx
+++ b/exports/pptx/lessons/middle-module-14-magic-squares/day-09-sudoku-and-project.pptx
@@ -4529,7 +4529,7 @@
         </p:nvSpPr>
         <p:spPr>
           <a:xfrm>
-            <a:off x="406301" y="3209330"/>
+            <a:off x="406301" y="1254323"/>
             <a:ext cx="8498026" cy="213271"/>
           </a:xfrm>
           <a:prstGeom prst="rect">
@@ -4563,99 +4563,7 @@
                 <a:ea typeface="Arial" pitchFamily="34" charset="-122"/>
                 <a:cs typeface="Arial" pitchFamily="34" charset="-120"/>
               </a:rPr>
-              <a:t>"Magic squares constrain</a:t>
-            </a:r>
-            <a:pPr algn="l" indent="0" marL="0">
-              <a:lnSpc>
-                <a:spcPts val="1680"/>
-              </a:lnSpc>
-              <a:spcBef>
-                <a:spcPts val="300"/>
-              </a:spcBef>
-              <a:spcAft>
-                <a:spcPts val="300"/>
-              </a:spcAft>
-              <a:buNone/>
-            </a:pPr>
-            <a:r>
-              <a:rPr lang="en-US" sz="1200" dirty="0">
-                <a:solidFill>
-                  <a:srgbClr val="1C2833"/>
-                </a:solidFill>
-                <a:latin typeface="Arial" pitchFamily="34" charset="0"/>
-                <a:ea typeface="Arial" pitchFamily="34" charset="-122"/>
-                <a:cs typeface="Arial" pitchFamily="34" charset="-120"/>
-              </a:rPr>
-              <a:t> sums </a:t>
-            </a:r>
-            <a:pPr algn="l" indent="0" marL="0">
-              <a:lnSpc>
-                <a:spcPts val="1680"/>
-              </a:lnSpc>
-              <a:spcBef>
-                <a:spcPts val="300"/>
-              </a:spcBef>
-              <a:spcAft>
-                <a:spcPts val="300"/>
-              </a:spcAft>
-              <a:buNone/>
-            </a:pPr>
-            <a:r>
-              <a:rPr lang="en-US" sz="1200" i="1" dirty="0">
-                <a:solidFill>
-                  <a:srgbClr val="1C2833"/>
-                </a:solidFill>
-                <a:latin typeface="Arial" pitchFamily="34" charset="0"/>
-                <a:ea typeface="Arial" pitchFamily="34" charset="-122"/>
-                <a:cs typeface="Arial" pitchFamily="34" charset="-120"/>
-              </a:rPr>
-              <a:t>. Sudoku constrains</a:t>
-            </a:r>
-            <a:pPr algn="l" indent="0" marL="0">
-              <a:lnSpc>
-                <a:spcPts val="1680"/>
-              </a:lnSpc>
-              <a:spcBef>
-                <a:spcPts val="300"/>
-              </a:spcBef>
-              <a:spcAft>
-                <a:spcPts val="300"/>
-              </a:spcAft>
-              <a:buNone/>
-            </a:pPr>
-            <a:r>
-              <a:rPr lang="en-US" sz="1200" dirty="0">
-                <a:solidFill>
-                  <a:srgbClr val="1C2833"/>
-                </a:solidFill>
-                <a:latin typeface="Arial" pitchFamily="34" charset="0"/>
-                <a:ea typeface="Arial" pitchFamily="34" charset="-122"/>
-                <a:cs typeface="Arial" pitchFamily="34" charset="-120"/>
-              </a:rPr>
-              <a:t> placement </a:t>
-            </a:r>
-            <a:pPr algn="l" indent="0" marL="0">
-              <a:lnSpc>
-                <a:spcPts val="1680"/>
-              </a:lnSpc>
-              <a:spcBef>
-                <a:spcPts val="300"/>
-              </a:spcBef>
-              <a:spcAft>
-                <a:spcPts val="300"/>
-              </a:spcAft>
-              <a:buNone/>
-            </a:pPr>
-            <a:r>
-              <a:rPr lang="en-US" sz="1200" i="1" dirty="0">
-                <a:solidFill>
-                  <a:srgbClr val="1C2833"/>
-                </a:solidFill>
-                <a:latin typeface="Arial" pitchFamily="34" charset="0"/>
-                <a:ea typeface="Arial" pitchFamily="34" charset="-122"/>
-                <a:cs typeface="Arial" pitchFamily="34" charset="-120"/>
-              </a:rPr>
-              <a:t>. Different constraints — different puzzles."</a:t>
+              <a:t>Each row: Property · Magic Square (3×3, 1–9) · Sudoku (3×3 within 9×9).</a:t>
             </a:r>
             <a:endParaRPr lang="en-US" sz="1200" dirty="0"/>
           </a:p>
@@ -4669,8 +4577,8 @@
         </p:nvSpPr>
         <p:spPr>
           <a:xfrm>
-            <a:off x="634901" y="3511451"/>
-            <a:ext cx="8102798" cy="487561"/>
+            <a:off x="634901" y="1556445"/>
+            <a:ext cx="8102798" cy="1500783"/>
           </a:xfrm>
           <a:prstGeom prst="rect">
             <a:avLst/>
@@ -4701,7 +4609,7 @@
                 <a:ea typeface="Arial" pitchFamily="34" charset="-122"/>
                 <a:cs typeface="Arial" pitchFamily="34" charset="-120"/>
               </a:rPr>
-              <a:t>Both are constraint-satisfaction problems.</a:t>
+              <a:t>Uses digits 1–9?</a:t>
             </a:r>
             <a:pPr algn="l" indent="0" marL="0">
               <a:lnSpc>
@@ -4721,7 +4629,227 @@
                 <a:ea typeface="Arial" pitchFamily="34" charset="-122"/>
                 <a:cs typeface="Arial" pitchFamily="34" charset="-120"/>
               </a:rPr>
-              <a:t> Each gives you a structure (9 cells in 3×3, or 81 cells in 9×9) and a set of rules. You search for placements that satisfy all rules. Computers solve these the same way.</a:t>
+              <a:t> — yes — once each · yes — once each within each 3×3 block</a:t>
+            </a:r>
+            <a:endParaRPr lang="en-US" sz="1200" dirty="0"/>
+          </a:p>
+          <a:p>
+            <a:pPr algn="l" marL="342900" indent="-342900">
+              <a:lnSpc>
+                <a:spcPts val="1620"/>
+              </a:lnSpc>
+              <a:spcAft>
+                <a:spcPts val="300"/>
+              </a:spcAft>
+              <a:buSzPct val="100000"/>
+              <a:buChar char="•"/>
+            </a:pPr>
+            <a:r>
+              <a:rPr lang="en-US" sz="1200" b="1" dirty="0">
+                <a:solidFill>
+                  <a:srgbClr val="1C2833"/>
+                </a:solidFill>
+                <a:latin typeface="Arial" pitchFamily="34" charset="0"/>
+                <a:ea typeface="Arial" pitchFamily="34" charset="-122"/>
+                <a:cs typeface="Arial" pitchFamily="34" charset="-120"/>
+              </a:rPr>
+              <a:t>Each row uses each digit once?</a:t>
+            </a:r>
+            <a:pPr algn="l" indent="0" marL="0">
+              <a:lnSpc>
+                <a:spcPts val="1620"/>
+              </a:lnSpc>
+              <a:spcAft>
+                <a:spcPts val="300"/>
+              </a:spcAft>
+              <a:buNone/>
+            </a:pPr>
+            <a:r>
+              <a:rPr lang="en-US" sz="1200" dirty="0">
+                <a:solidFill>
+                  <a:srgbClr val="1C2833"/>
+                </a:solidFill>
+                <a:latin typeface="Arial" pitchFamily="34" charset="0"/>
+                <a:ea typeface="Arial" pitchFamily="34" charset="-122"/>
+                <a:cs typeface="Arial" pitchFamily="34" charset="-120"/>
+              </a:rPr>
+              <a:t> — no (a row has just 3 distinct values from 1–9) · yes (each row uses 1–9)</a:t>
+            </a:r>
+            <a:endParaRPr lang="en-US" sz="1200" dirty="0"/>
+          </a:p>
+          <a:p>
+            <a:pPr algn="l" marL="342900" indent="-342900">
+              <a:lnSpc>
+                <a:spcPts val="1620"/>
+              </a:lnSpc>
+              <a:spcAft>
+                <a:spcPts val="300"/>
+              </a:spcAft>
+              <a:buSzPct val="100000"/>
+              <a:buChar char="•"/>
+            </a:pPr>
+            <a:r>
+              <a:rPr lang="en-US" sz="1200" b="1" dirty="0">
+                <a:solidFill>
+                  <a:srgbClr val="1C2833"/>
+                </a:solidFill>
+                <a:latin typeface="Arial" pitchFamily="34" charset="0"/>
+                <a:ea typeface="Arial" pitchFamily="34" charset="-122"/>
+                <a:cs typeface="Arial" pitchFamily="34" charset="-120"/>
+              </a:rPr>
+              <a:t>Each column uses each digit once?</a:t>
+            </a:r>
+            <a:pPr algn="l" indent="0" marL="0">
+              <a:lnSpc>
+                <a:spcPts val="1620"/>
+              </a:lnSpc>
+              <a:spcAft>
+                <a:spcPts val="300"/>
+              </a:spcAft>
+              <a:buNone/>
+            </a:pPr>
+            <a:r>
+              <a:rPr lang="en-US" sz="1200" dirty="0">
+                <a:solidFill>
+                  <a:srgbClr val="1C2833"/>
+                </a:solidFill>
+                <a:latin typeface="Arial" pitchFamily="34" charset="0"/>
+                <a:ea typeface="Arial" pitchFamily="34" charset="-122"/>
+                <a:cs typeface="Arial" pitchFamily="34" charset="-120"/>
+              </a:rPr>
+              <a:t> — no · yes</a:t>
+            </a:r>
+            <a:endParaRPr lang="en-US" sz="1200" dirty="0"/>
+          </a:p>
+          <a:p>
+            <a:pPr algn="l" marL="342900" indent="-342900">
+              <a:lnSpc>
+                <a:spcPts val="1620"/>
+              </a:lnSpc>
+              <a:spcAft>
+                <a:spcPts val="300"/>
+              </a:spcAft>
+              <a:buSzPct val="100000"/>
+              <a:buChar char="•"/>
+            </a:pPr>
+            <a:r>
+              <a:rPr lang="en-US" sz="1200" b="1" dirty="0">
+                <a:solidFill>
+                  <a:srgbClr val="1C2833"/>
+                </a:solidFill>
+                <a:latin typeface="Arial" pitchFamily="34" charset="0"/>
+                <a:ea typeface="Arial" pitchFamily="34" charset="-122"/>
+                <a:cs typeface="Arial" pitchFamily="34" charset="-120"/>
+              </a:rPr>
+              <a:t>Diagonals sum to a constant?</a:t>
+            </a:r>
+            <a:pPr algn="l" indent="0" marL="0">
+              <a:lnSpc>
+                <a:spcPts val="1620"/>
+              </a:lnSpc>
+              <a:spcAft>
+                <a:spcPts val="300"/>
+              </a:spcAft>
+              <a:buNone/>
+            </a:pPr>
+            <a:r>
+              <a:rPr lang="en-US" sz="1200" dirty="0">
+                <a:solidFill>
+                  <a:srgbClr val="1C2833"/>
+                </a:solidFill>
+                <a:latin typeface="Arial" pitchFamily="34" charset="0"/>
+                <a:ea typeface="Arial" pitchFamily="34" charset="-122"/>
+                <a:cs typeface="Arial" pitchFamily="34" charset="-120"/>
+              </a:rPr>
+              <a:t> — yes · not required</a:t>
+            </a:r>
+            <a:endParaRPr lang="en-US" sz="1200" dirty="0"/>
+          </a:p>
+          <a:p>
+            <a:pPr algn="l" marL="342900" indent="-342900">
+              <a:lnSpc>
+                <a:spcPts val="1620"/>
+              </a:lnSpc>
+              <a:spcAft>
+                <a:spcPts val="300"/>
+              </a:spcAft>
+              <a:buSzPct val="100000"/>
+              <a:buChar char="•"/>
+            </a:pPr>
+            <a:r>
+              <a:rPr lang="en-US" sz="1200" b="1" dirty="0">
+                <a:solidFill>
+                  <a:srgbClr val="1C2833"/>
+                </a:solidFill>
+                <a:latin typeface="Arial" pitchFamily="34" charset="0"/>
+                <a:ea typeface="Arial" pitchFamily="34" charset="-122"/>
+                <a:cs typeface="Arial" pitchFamily="34" charset="-120"/>
+              </a:rPr>
+              <a:t>Rows sum to a constant?</a:t>
+            </a:r>
+            <a:pPr algn="l" indent="0" marL="0">
+              <a:lnSpc>
+                <a:spcPts val="1620"/>
+              </a:lnSpc>
+              <a:spcAft>
+                <a:spcPts val="300"/>
+              </a:spcAft>
+              <a:buNone/>
+            </a:pPr>
+            <a:r>
+              <a:rPr lang="en-US" sz="1200" dirty="0">
+                <a:solidFill>
+                  <a:srgbClr val="1C2833"/>
+                </a:solidFill>
+                <a:latin typeface="Arial" pitchFamily="34" charset="0"/>
+                <a:ea typeface="Arial" pitchFamily="34" charset="-122"/>
+                <a:cs typeface="Arial" pitchFamily="34" charset="-120"/>
+              </a:rPr>
+              <a:t> — yes (= 15) · not enforced</a:t>
+            </a:r>
+            <a:endParaRPr lang="en-US" sz="1200" dirty="0"/>
+          </a:p>
+          <a:p>
+            <a:pPr algn="l" marL="342900" indent="-342900">
+              <a:lnSpc>
+                <a:spcPts val="1620"/>
+              </a:lnSpc>
+              <a:spcAft>
+                <a:spcPts val="300"/>
+              </a:spcAft>
+              <a:buSzPct val="100000"/>
+              <a:buChar char="•"/>
+            </a:pPr>
+            <a:r>
+              <a:rPr lang="en-US" sz="1200" b="1" dirty="0">
+                <a:solidFill>
+                  <a:srgbClr val="1C2833"/>
+                </a:solidFill>
+                <a:latin typeface="Arial" pitchFamily="34" charset="0"/>
+                <a:ea typeface="Arial" pitchFamily="34" charset="-122"/>
+                <a:cs typeface="Arial" pitchFamily="34" charset="-120"/>
+              </a:rPr>
+              <a:t>Columns sum to a constant?</a:t>
+            </a:r>
+            <a:pPr algn="l" indent="0" marL="0">
+              <a:lnSpc>
+                <a:spcPts val="1620"/>
+              </a:lnSpc>
+              <a:spcAft>
+                <a:spcPts val="300"/>
+              </a:spcAft>
+              <a:buNone/>
+            </a:pPr>
+            <a:r>
+              <a:rPr lang="en-US" sz="1200" dirty="0">
+                <a:solidFill>
+                  <a:srgbClr val="1C2833"/>
+                </a:solidFill>
+                <a:latin typeface="Arial" pitchFamily="34" charset="0"/>
+                <a:ea typeface="Arial" pitchFamily="34" charset="-122"/>
+                <a:cs typeface="Arial" pitchFamily="34" charset="-120"/>
+              </a:rPr>
+              <a:t> — yes · not enforced</a:t>
             </a:r>
             <a:endParaRPr lang="en-US" sz="1200" dirty="0"/>
           </a:p>
@@ -4735,8 +4863,8 @@
         </p:nvSpPr>
         <p:spPr>
           <a:xfrm>
-            <a:off x="634901" y="4100513"/>
-            <a:ext cx="8102798" cy="693241"/>
+            <a:off x="406301" y="3146078"/>
+            <a:ext cx="8498026" cy="213271"/>
           </a:xfrm>
           <a:prstGeom prst="rect">
             <a:avLst/>
@@ -4748,31 +4876,36 @@
           <a:bodyPr wrap="square" lIns="0" tIns="0" rIns="0" bIns="0" rtlCol="0" anchor="t"/>
           <a:lstStyle/>
           <a:p>
-            <a:pPr algn="l" marL="342900" indent="-342900">
-              <a:lnSpc>
-                <a:spcPts val="1620"/>
-              </a:lnSpc>
-              <a:spcAft>
-                <a:spcPts val="300"/>
-              </a:spcAft>
-              <a:buSzPct val="100000"/>
-              <a:buChar char="•"/>
-            </a:pPr>
-            <a:r>
-              <a:rPr lang="en-US" sz="1200" b="1" dirty="0">
-                <a:solidFill>
-                  <a:srgbClr val="1C2833"/>
-                </a:solidFill>
-                <a:latin typeface="Arial" pitchFamily="34" charset="0"/>
-                <a:ea typeface="Arial" pitchFamily="34" charset="-122"/>
-                <a:cs typeface="Arial" pitchFamily="34" charset="-120"/>
-              </a:rPr>
-              <a:t>A bridge example.</a:t>
-            </a:r>
-            <a:pPr algn="l" indent="0" marL="0">
-              <a:lnSpc>
-                <a:spcPts val="1620"/>
-              </a:lnSpc>
+            <a:pPr algn="l" indent="0" marL="0">
+              <a:lnSpc>
+                <a:spcPts val="1680"/>
+              </a:lnSpc>
+              <a:spcBef>
+                <a:spcPts val="300"/>
+              </a:spcBef>
+              <a:spcAft>
+                <a:spcPts val="300"/>
+              </a:spcAft>
+              <a:buNone/>
+            </a:pPr>
+            <a:r>
+              <a:rPr lang="en-US" sz="1200" i="1" dirty="0">
+                <a:solidFill>
+                  <a:srgbClr val="1C2833"/>
+                </a:solidFill>
+                <a:latin typeface="Arial" pitchFamily="34" charset="0"/>
+                <a:ea typeface="Arial" pitchFamily="34" charset="-122"/>
+                <a:cs typeface="Arial" pitchFamily="34" charset="-120"/>
+              </a:rPr>
+              <a:t>"Magic squares constrain</a:t>
+            </a:r>
+            <a:pPr algn="l" indent="0" marL="0">
+              <a:lnSpc>
+                <a:spcPts val="1680"/>
+              </a:lnSpc>
+              <a:spcBef>
+                <a:spcPts val="300"/>
+              </a:spcBef>
               <a:spcAft>
                 <a:spcPts val="300"/>
               </a:spcAft>
@@ -4787,12 +4920,15 @@
                 <a:ea typeface="Arial" pitchFamily="34" charset="-122"/>
                 <a:cs typeface="Arial" pitchFamily="34" charset="-120"/>
               </a:rPr>
-              <a:t> It is possible to have a 9×9 grid that is </a:t>
-            </a:r>
-            <a:pPr algn="l" indent="0" marL="0">
-              <a:lnSpc>
-                <a:spcPts val="1620"/>
-              </a:lnSpc>
+              <a:t> sums </a:t>
+            </a:r>
+            <a:pPr algn="l" indent="0" marL="0">
+              <a:lnSpc>
+                <a:spcPts val="1680"/>
+              </a:lnSpc>
+              <a:spcBef>
+                <a:spcPts val="300"/>
+              </a:spcBef>
               <a:spcAft>
                 <a:spcPts val="300"/>
               </a:spcAft>
@@ -4807,12 +4943,15 @@
                 <a:ea typeface="Arial" pitchFamily="34" charset="-122"/>
                 <a:cs typeface="Arial" pitchFamily="34" charset="-120"/>
               </a:rPr>
-              <a:t>both</a:t>
-            </a:r>
-            <a:pPr algn="l" indent="0" marL="0">
-              <a:lnSpc>
-                <a:spcPts val="1620"/>
-              </a:lnSpc>
+              <a:t>. Sudoku constrains</a:t>
+            </a:r>
+            <a:pPr algn="l" indent="0" marL="0">
+              <a:lnSpc>
+                <a:spcPts val="1680"/>
+              </a:lnSpc>
+              <a:spcBef>
+                <a:spcPts val="300"/>
+              </a:spcBef>
               <a:spcAft>
                 <a:spcPts val="300"/>
               </a:spcAft>
@@ -4827,12 +4966,15 @@
                 <a:ea typeface="Arial" pitchFamily="34" charset="-122"/>
                 <a:cs typeface="Arial" pitchFamily="34" charset="-120"/>
               </a:rPr>
-              <a:t> a Sudoku AND a magic square (every row, column, </a:t>
-            </a:r>
-            <a:pPr algn="l" indent="0" marL="0">
-              <a:lnSpc>
-                <a:spcPts val="1620"/>
-              </a:lnSpc>
+              <a:t> placement </a:t>
+            </a:r>
+            <a:pPr algn="l" indent="0" marL="0">
+              <a:lnSpc>
+                <a:spcPts val="1680"/>
+              </a:lnSpc>
+              <a:spcBef>
+                <a:spcPts val="300"/>
+              </a:spcBef>
               <a:spcAft>
                 <a:spcPts val="300"/>
               </a:spcAft>
@@ -4847,47 +4989,7 @@
                 <a:ea typeface="Arial" pitchFamily="34" charset="-122"/>
                 <a:cs typeface="Arial" pitchFamily="34" charset="-120"/>
               </a:rPr>
-              <a:t>and</a:t>
-            </a:r>
-            <a:pPr algn="l" indent="0" marL="0">
-              <a:lnSpc>
-                <a:spcPts val="1620"/>
-              </a:lnSpc>
-              <a:spcAft>
-                <a:spcPts val="300"/>
-              </a:spcAft>
-              <a:buNone/>
-            </a:pPr>
-            <a:r>
-              <a:rPr lang="en-US" sz="1200" dirty="0">
-                <a:solidFill>
-                  <a:srgbClr val="1C2833"/>
-                </a:solidFill>
-                <a:latin typeface="Arial" pitchFamily="34" charset="0"/>
-                <a:ea typeface="Arial" pitchFamily="34" charset="-122"/>
-                <a:cs typeface="Arial" pitchFamily="34" charset="-120"/>
-              </a:rPr>
-              <a:t> 3×3 block sums to 45 — which works because rows/columns automatically sum to 1+2+...+9 = 45). Such squares exist; they are rare. Show one if you have time. </a:t>
-            </a:r>
-            <a:pPr algn="l" indent="0" marL="0">
-              <a:lnSpc>
-                <a:spcPts val="1620"/>
-              </a:lnSpc>
-              <a:spcAft>
-                <a:spcPts val="300"/>
-              </a:spcAft>
-              <a:buNone/>
-            </a:pPr>
-            <a:r>
-              <a:rPr lang="en-US" sz="1200" i="1" dirty="0">
-                <a:solidFill>
-                  <a:srgbClr val="1C2833"/>
-                </a:solidFill>
-                <a:latin typeface="Arial" pitchFamily="34" charset="0"/>
-                <a:ea typeface="Arial" pitchFamily="34" charset="-122"/>
-                <a:cs typeface="Arial" pitchFamily="34" charset="-120"/>
-              </a:rPr>
-              <a:t>(Not required at Middle band.)</a:t>
+              <a:t>. Different constraints — different puzzles."</a:t>
             </a:r>
             <a:endParaRPr lang="en-US" sz="1200" dirty="0"/>
           </a:p>
@@ -4901,7 +5003,239 @@
         </p:nvSpPr>
         <p:spPr>
           <a:xfrm>
-            <a:off x="406301" y="4958804"/>
+            <a:off x="634901" y="3448199"/>
+            <a:ext cx="8102798" cy="487561"/>
+          </a:xfrm>
+          <a:prstGeom prst="rect">
+            <a:avLst/>
+          </a:prstGeom>
+          <a:noFill/>
+          <a:ln/>
+        </p:spPr>
+        <p:txBody>
+          <a:bodyPr wrap="square" lIns="0" tIns="0" rIns="0" bIns="0" rtlCol="0" anchor="t"/>
+          <a:lstStyle/>
+          <a:p>
+            <a:pPr algn="l" marL="342900" indent="-342900">
+              <a:lnSpc>
+                <a:spcPts val="1620"/>
+              </a:lnSpc>
+              <a:spcAft>
+                <a:spcPts val="300"/>
+              </a:spcAft>
+              <a:buSzPct val="100000"/>
+              <a:buChar char="•"/>
+            </a:pPr>
+            <a:r>
+              <a:rPr lang="en-US" sz="1200" b="1" dirty="0">
+                <a:solidFill>
+                  <a:srgbClr val="1C2833"/>
+                </a:solidFill>
+                <a:latin typeface="Arial" pitchFamily="34" charset="0"/>
+                <a:ea typeface="Arial" pitchFamily="34" charset="-122"/>
+                <a:cs typeface="Arial" pitchFamily="34" charset="-120"/>
+              </a:rPr>
+              <a:t>Both are constraint-satisfaction problems.</a:t>
+            </a:r>
+            <a:pPr algn="l" indent="0" marL="0">
+              <a:lnSpc>
+                <a:spcPts val="1620"/>
+              </a:lnSpc>
+              <a:spcAft>
+                <a:spcPts val="300"/>
+              </a:spcAft>
+              <a:buNone/>
+            </a:pPr>
+            <a:r>
+              <a:rPr lang="en-US" sz="1200" dirty="0">
+                <a:solidFill>
+                  <a:srgbClr val="1C2833"/>
+                </a:solidFill>
+                <a:latin typeface="Arial" pitchFamily="34" charset="0"/>
+                <a:ea typeface="Arial" pitchFamily="34" charset="-122"/>
+                <a:cs typeface="Arial" pitchFamily="34" charset="-120"/>
+              </a:rPr>
+              <a:t> Each gives you a structure (9 cells in 3×3, or 81 cells in 9×9) and a set of rules. You search for placements that satisfy all rules. Computers solve these the same way.</a:t>
+            </a:r>
+            <a:endParaRPr lang="en-US" sz="1200" dirty="0"/>
+          </a:p>
+        </p:txBody>
+      </p:sp>
+      <p:sp>
+        <p:nvSpPr>
+          <p:cNvPr id="9" name="Text 7"/>
+          <p:cNvSpPr/>
+          <p:nvPr/>
+        </p:nvSpPr>
+        <p:spPr>
+          <a:xfrm>
+            <a:off x="634901" y="4037261"/>
+            <a:ext cx="8102798" cy="693241"/>
+          </a:xfrm>
+          <a:prstGeom prst="rect">
+            <a:avLst/>
+          </a:prstGeom>
+          <a:noFill/>
+          <a:ln/>
+        </p:spPr>
+        <p:txBody>
+          <a:bodyPr wrap="square" lIns="0" tIns="0" rIns="0" bIns="0" rtlCol="0" anchor="t"/>
+          <a:lstStyle/>
+          <a:p>
+            <a:pPr algn="l" marL="342900" indent="-342900">
+              <a:lnSpc>
+                <a:spcPts val="1620"/>
+              </a:lnSpc>
+              <a:spcAft>
+                <a:spcPts val="300"/>
+              </a:spcAft>
+              <a:buSzPct val="100000"/>
+              <a:buChar char="•"/>
+            </a:pPr>
+            <a:r>
+              <a:rPr lang="en-US" sz="1200" b="1" dirty="0">
+                <a:solidFill>
+                  <a:srgbClr val="1C2833"/>
+                </a:solidFill>
+                <a:latin typeface="Arial" pitchFamily="34" charset="0"/>
+                <a:ea typeface="Arial" pitchFamily="34" charset="-122"/>
+                <a:cs typeface="Arial" pitchFamily="34" charset="-120"/>
+              </a:rPr>
+              <a:t>A bridge example.</a:t>
+            </a:r>
+            <a:pPr algn="l" indent="0" marL="0">
+              <a:lnSpc>
+                <a:spcPts val="1620"/>
+              </a:lnSpc>
+              <a:spcAft>
+                <a:spcPts val="300"/>
+              </a:spcAft>
+              <a:buNone/>
+            </a:pPr>
+            <a:r>
+              <a:rPr lang="en-US" sz="1200" dirty="0">
+                <a:solidFill>
+                  <a:srgbClr val="1C2833"/>
+                </a:solidFill>
+                <a:latin typeface="Arial" pitchFamily="34" charset="0"/>
+                <a:ea typeface="Arial" pitchFamily="34" charset="-122"/>
+                <a:cs typeface="Arial" pitchFamily="34" charset="-120"/>
+              </a:rPr>
+              <a:t> It is possible to have a 9×9 grid that is </a:t>
+            </a:r>
+            <a:pPr algn="l" indent="0" marL="0">
+              <a:lnSpc>
+                <a:spcPts val="1620"/>
+              </a:lnSpc>
+              <a:spcAft>
+                <a:spcPts val="300"/>
+              </a:spcAft>
+              <a:buNone/>
+            </a:pPr>
+            <a:r>
+              <a:rPr lang="en-US" sz="1200" i="1" dirty="0">
+                <a:solidFill>
+                  <a:srgbClr val="1C2833"/>
+                </a:solidFill>
+                <a:latin typeface="Arial" pitchFamily="34" charset="0"/>
+                <a:ea typeface="Arial" pitchFamily="34" charset="-122"/>
+                <a:cs typeface="Arial" pitchFamily="34" charset="-120"/>
+              </a:rPr>
+              <a:t>both</a:t>
+            </a:r>
+            <a:pPr algn="l" indent="0" marL="0">
+              <a:lnSpc>
+                <a:spcPts val="1620"/>
+              </a:lnSpc>
+              <a:spcAft>
+                <a:spcPts val="300"/>
+              </a:spcAft>
+              <a:buNone/>
+            </a:pPr>
+            <a:r>
+              <a:rPr lang="en-US" sz="1200" dirty="0">
+                <a:solidFill>
+                  <a:srgbClr val="1C2833"/>
+                </a:solidFill>
+                <a:latin typeface="Arial" pitchFamily="34" charset="0"/>
+                <a:ea typeface="Arial" pitchFamily="34" charset="-122"/>
+                <a:cs typeface="Arial" pitchFamily="34" charset="-120"/>
+              </a:rPr>
+              <a:t> a Sudoku AND a magic square (every row, column, </a:t>
+            </a:r>
+            <a:pPr algn="l" indent="0" marL="0">
+              <a:lnSpc>
+                <a:spcPts val="1620"/>
+              </a:lnSpc>
+              <a:spcAft>
+                <a:spcPts val="300"/>
+              </a:spcAft>
+              <a:buNone/>
+            </a:pPr>
+            <a:r>
+              <a:rPr lang="en-US" sz="1200" i="1" dirty="0">
+                <a:solidFill>
+                  <a:srgbClr val="1C2833"/>
+                </a:solidFill>
+                <a:latin typeface="Arial" pitchFamily="34" charset="0"/>
+                <a:ea typeface="Arial" pitchFamily="34" charset="-122"/>
+                <a:cs typeface="Arial" pitchFamily="34" charset="-120"/>
+              </a:rPr>
+              <a:t>and</a:t>
+            </a:r>
+            <a:pPr algn="l" indent="0" marL="0">
+              <a:lnSpc>
+                <a:spcPts val="1620"/>
+              </a:lnSpc>
+              <a:spcAft>
+                <a:spcPts val="300"/>
+              </a:spcAft>
+              <a:buNone/>
+            </a:pPr>
+            <a:r>
+              <a:rPr lang="en-US" sz="1200" dirty="0">
+                <a:solidFill>
+                  <a:srgbClr val="1C2833"/>
+                </a:solidFill>
+                <a:latin typeface="Arial" pitchFamily="34" charset="0"/>
+                <a:ea typeface="Arial" pitchFamily="34" charset="-122"/>
+                <a:cs typeface="Arial" pitchFamily="34" charset="-120"/>
+              </a:rPr>
+              <a:t> 3×3 block sums to 45 — which works because rows/columns automatically sum to 1+2+...+9 = 45). Such squares exist; they are rare. Show one if you have time. </a:t>
+            </a:r>
+            <a:pPr algn="l" indent="0" marL="0">
+              <a:lnSpc>
+                <a:spcPts val="1620"/>
+              </a:lnSpc>
+              <a:spcAft>
+                <a:spcPts val="300"/>
+              </a:spcAft>
+              <a:buNone/>
+            </a:pPr>
+            <a:r>
+              <a:rPr lang="en-US" sz="1200" i="1" dirty="0">
+                <a:solidFill>
+                  <a:srgbClr val="1C2833"/>
+                </a:solidFill>
+                <a:latin typeface="Arial" pitchFamily="34" charset="0"/>
+                <a:ea typeface="Arial" pitchFamily="34" charset="-122"/>
+                <a:cs typeface="Arial" pitchFamily="34" charset="-120"/>
+              </a:rPr>
+              <a:t>(Not required at Middle band.)</a:t>
+            </a:r>
+            <a:endParaRPr lang="en-US" sz="1200" dirty="0"/>
+          </a:p>
+        </p:txBody>
+      </p:sp>
+      <p:sp>
+        <p:nvSpPr>
+          <p:cNvPr id="10" name="Text 8"/>
+          <p:cNvSpPr/>
+          <p:nvPr/>
+        </p:nvSpPr>
+        <p:spPr>
+          <a:xfrm>
+            <a:off x="406301" y="4895552"/>
             <a:ext cx="8498026" cy="213271"/>
           </a:xfrm>
           <a:prstGeom prst="rect">

--- a/exports/pptx/lessons/middle-module-14-magic-squares/day-09-sudoku-and-project.pptx
+++ b/exports/pptx/lessons/middle-module-14-magic-squares/day-09-sudoku-and-project.pptx
@@ -18,9 +18,14 @@
     <p:sldId id="266" r:id="rId12"/>
     <p:sldId id="267" r:id="rId13"/>
     <p:sldId id="268" r:id="rId14"/>
+    <p:sldId id="269" r:id="rId15"/>
+    <p:sldId id="270" r:id="rId16"/>
+    <p:sldId id="271" r:id="rId17"/>
+    <p:sldId id="272" r:id="rId18"/>
+    <p:sldId id="273" r:id="rId19"/>
   </p:sldIdLst>
   <p:notesMasterIdLst>
-    <p:notesMasterId r:id="rId15"/>
+    <p:notesMasterId r:id="rId20"/>
   </p:notesMasterIdLst>
   <p:sldSz cx="9144000" cy="5143500"/>
   <p:notesSz cx="5143500" cy="9144000"/>
@@ -890,6 +895,446 @@
             <a:fld id="{F7021451-1387-4CA6-816F-3879F97B5CBC}" type="slidenum">
               <a:rPr lang="en-US"/>
               <a:t>13</a:t>
+            </a:fld>
+            <a:endParaRPr lang="en-US"/>
+          </a:p>
+        </p:txBody>
+      </p:sp>
+    </p:spTree>
+    <p:extLst>
+      <p:ext uri="{BB962C8B-B14F-4D97-AF65-F5344CB8AC3E}">
+        <p14:creationId xmlns:p14="http://schemas.microsoft.com/office/powerpoint/2010/main" val="1024086991"/>
+      </p:ext>
+    </p:extLst>
+  </p:cSld>
+  <p:clrMapOvr>
+    <a:masterClrMapping/>
+  </p:clrMapOvr>
+</p:notes>
+</file>
+
+<file path=ppt/notesSlides/notesSlide14.xml><?xml version="1.0" encoding="utf-8"?>
+<p:notes xmlns:a="http://schemas.openxmlformats.org/drawingml/2006/main" xmlns:r="http://schemas.openxmlformats.org/officeDocument/2006/relationships" xmlns:p="http://schemas.openxmlformats.org/presentationml/2006/main">
+  <p:cSld>
+    <p:spTree>
+      <p:nvGrpSpPr>
+        <p:cNvPr id="1" name=""/>
+        <p:cNvGrpSpPr/>
+        <p:nvPr/>
+      </p:nvGrpSpPr>
+      <p:grpSpPr>
+        <a:xfrm>
+          <a:off x="0" y="0"/>
+          <a:ext cx="0" cy="0"/>
+          <a:chOff x="0" y="0"/>
+          <a:chExt cx="0" cy="0"/>
+        </a:xfrm>
+      </p:grpSpPr>
+      <p:sp>
+        <p:nvSpPr>
+          <p:cNvPr id="2" name="Slide Image Placeholder 1"/>
+          <p:cNvSpPr>
+            <a:spLocks noGrp="1" noRot="1" noChangeAspect="1"/>
+          </p:cNvSpPr>
+          <p:nvPr>
+            <p:ph type="sldImg"/>
+          </p:nvPr>
+        </p:nvSpPr>
+        <p:spPr/>
+      </p:sp>
+      <p:sp>
+        <p:nvSpPr>
+          <p:cNvPr id="3" name="Notes Placeholder 2"/>
+          <p:cNvSpPr>
+            <a:spLocks noGrp="1"/>
+          </p:cNvSpPr>
+          <p:nvPr>
+            <p:ph type="body" idx="1"/>
+          </p:nvPr>
+        </p:nvSpPr>
+        <p:spPr/>
+        <p:txBody>
+          <a:bodyPr/>
+          <a:lstStyle/>
+          <a:p>
+            <a:r>
+              <a:rPr lang="en-US" dirty="0"/>
+              <a:t/>
+            </a:r>
+            <a:endParaRPr lang="en-US" dirty="0"/>
+          </a:p>
+        </p:txBody>
+      </p:sp>
+      <p:sp>
+        <p:nvSpPr>
+          <p:cNvPr id="4" name="Slide Number Placeholder 3"/>
+          <p:cNvSpPr>
+            <a:spLocks noGrp="1"/>
+          </p:cNvSpPr>
+          <p:nvPr>
+            <p:ph type="sldNum" sz="quarter" idx="10"/>
+          </p:nvPr>
+        </p:nvSpPr>
+        <p:spPr/>
+        <p:txBody>
+          <a:bodyPr/>
+          <a:lstStyle/>
+          <a:p>
+            <a:fld id="{F7021451-1387-4CA6-816F-3879F97B5CBC}" type="slidenum">
+              <a:rPr lang="en-US"/>
+              <a:t>14</a:t>
+            </a:fld>
+            <a:endParaRPr lang="en-US"/>
+          </a:p>
+        </p:txBody>
+      </p:sp>
+    </p:spTree>
+    <p:extLst>
+      <p:ext uri="{BB962C8B-B14F-4D97-AF65-F5344CB8AC3E}">
+        <p14:creationId xmlns:p14="http://schemas.microsoft.com/office/powerpoint/2010/main" val="1024086991"/>
+      </p:ext>
+    </p:extLst>
+  </p:cSld>
+  <p:clrMapOvr>
+    <a:masterClrMapping/>
+  </p:clrMapOvr>
+</p:notes>
+</file>
+
+<file path=ppt/notesSlides/notesSlide15.xml><?xml version="1.0" encoding="utf-8"?>
+<p:notes xmlns:a="http://schemas.openxmlformats.org/drawingml/2006/main" xmlns:r="http://schemas.openxmlformats.org/officeDocument/2006/relationships" xmlns:p="http://schemas.openxmlformats.org/presentationml/2006/main">
+  <p:cSld>
+    <p:spTree>
+      <p:nvGrpSpPr>
+        <p:cNvPr id="1" name=""/>
+        <p:cNvGrpSpPr/>
+        <p:nvPr/>
+      </p:nvGrpSpPr>
+      <p:grpSpPr>
+        <a:xfrm>
+          <a:off x="0" y="0"/>
+          <a:ext cx="0" cy="0"/>
+          <a:chOff x="0" y="0"/>
+          <a:chExt cx="0" cy="0"/>
+        </a:xfrm>
+      </p:grpSpPr>
+      <p:sp>
+        <p:nvSpPr>
+          <p:cNvPr id="2" name="Slide Image Placeholder 1"/>
+          <p:cNvSpPr>
+            <a:spLocks noGrp="1" noRot="1" noChangeAspect="1"/>
+          </p:cNvSpPr>
+          <p:nvPr>
+            <p:ph type="sldImg"/>
+          </p:nvPr>
+        </p:nvSpPr>
+        <p:spPr/>
+      </p:sp>
+      <p:sp>
+        <p:nvSpPr>
+          <p:cNvPr id="3" name="Notes Placeholder 2"/>
+          <p:cNvSpPr>
+            <a:spLocks noGrp="1"/>
+          </p:cNvSpPr>
+          <p:nvPr>
+            <p:ph type="body" idx="1"/>
+          </p:nvPr>
+        </p:nvSpPr>
+        <p:spPr/>
+        <p:txBody>
+          <a:bodyPr/>
+          <a:lstStyle/>
+          <a:p>
+            <a:r>
+              <a:rPr lang="en-US" dirty="0"/>
+              <a:t/>
+            </a:r>
+            <a:endParaRPr lang="en-US" dirty="0"/>
+          </a:p>
+        </p:txBody>
+      </p:sp>
+      <p:sp>
+        <p:nvSpPr>
+          <p:cNvPr id="4" name="Slide Number Placeholder 3"/>
+          <p:cNvSpPr>
+            <a:spLocks noGrp="1"/>
+          </p:cNvSpPr>
+          <p:nvPr>
+            <p:ph type="sldNum" sz="quarter" idx="10"/>
+          </p:nvPr>
+        </p:nvSpPr>
+        <p:spPr/>
+        <p:txBody>
+          <a:bodyPr/>
+          <a:lstStyle/>
+          <a:p>
+            <a:fld id="{F7021451-1387-4CA6-816F-3879F97B5CBC}" type="slidenum">
+              <a:rPr lang="en-US"/>
+              <a:t>15</a:t>
+            </a:fld>
+            <a:endParaRPr lang="en-US"/>
+          </a:p>
+        </p:txBody>
+      </p:sp>
+    </p:spTree>
+    <p:extLst>
+      <p:ext uri="{BB962C8B-B14F-4D97-AF65-F5344CB8AC3E}">
+        <p14:creationId xmlns:p14="http://schemas.microsoft.com/office/powerpoint/2010/main" val="1024086991"/>
+      </p:ext>
+    </p:extLst>
+  </p:cSld>
+  <p:clrMapOvr>
+    <a:masterClrMapping/>
+  </p:clrMapOvr>
+</p:notes>
+</file>
+
+<file path=ppt/notesSlides/notesSlide16.xml><?xml version="1.0" encoding="utf-8"?>
+<p:notes xmlns:a="http://schemas.openxmlformats.org/drawingml/2006/main" xmlns:r="http://schemas.openxmlformats.org/officeDocument/2006/relationships" xmlns:p="http://schemas.openxmlformats.org/presentationml/2006/main">
+  <p:cSld>
+    <p:spTree>
+      <p:nvGrpSpPr>
+        <p:cNvPr id="1" name=""/>
+        <p:cNvGrpSpPr/>
+        <p:nvPr/>
+      </p:nvGrpSpPr>
+      <p:grpSpPr>
+        <a:xfrm>
+          <a:off x="0" y="0"/>
+          <a:ext cx="0" cy="0"/>
+          <a:chOff x="0" y="0"/>
+          <a:chExt cx="0" cy="0"/>
+        </a:xfrm>
+      </p:grpSpPr>
+      <p:sp>
+        <p:nvSpPr>
+          <p:cNvPr id="2" name="Slide Image Placeholder 1"/>
+          <p:cNvSpPr>
+            <a:spLocks noGrp="1" noRot="1" noChangeAspect="1"/>
+          </p:cNvSpPr>
+          <p:nvPr>
+            <p:ph type="sldImg"/>
+          </p:nvPr>
+        </p:nvSpPr>
+        <p:spPr/>
+      </p:sp>
+      <p:sp>
+        <p:nvSpPr>
+          <p:cNvPr id="3" name="Notes Placeholder 2"/>
+          <p:cNvSpPr>
+            <a:spLocks noGrp="1"/>
+          </p:cNvSpPr>
+          <p:nvPr>
+            <p:ph type="body" idx="1"/>
+          </p:nvPr>
+        </p:nvSpPr>
+        <p:spPr/>
+        <p:txBody>
+          <a:bodyPr/>
+          <a:lstStyle/>
+          <a:p>
+            <a:r>
+              <a:rPr lang="en-US" dirty="0"/>
+              <a:t/>
+            </a:r>
+            <a:endParaRPr lang="en-US" dirty="0"/>
+          </a:p>
+        </p:txBody>
+      </p:sp>
+      <p:sp>
+        <p:nvSpPr>
+          <p:cNvPr id="4" name="Slide Number Placeholder 3"/>
+          <p:cNvSpPr>
+            <a:spLocks noGrp="1"/>
+          </p:cNvSpPr>
+          <p:nvPr>
+            <p:ph type="sldNum" sz="quarter" idx="10"/>
+          </p:nvPr>
+        </p:nvSpPr>
+        <p:spPr/>
+        <p:txBody>
+          <a:bodyPr/>
+          <a:lstStyle/>
+          <a:p>
+            <a:fld id="{F7021451-1387-4CA6-816F-3879F97B5CBC}" type="slidenum">
+              <a:rPr lang="en-US"/>
+              <a:t>16</a:t>
+            </a:fld>
+            <a:endParaRPr lang="en-US"/>
+          </a:p>
+        </p:txBody>
+      </p:sp>
+    </p:spTree>
+    <p:extLst>
+      <p:ext uri="{BB962C8B-B14F-4D97-AF65-F5344CB8AC3E}">
+        <p14:creationId xmlns:p14="http://schemas.microsoft.com/office/powerpoint/2010/main" val="1024086991"/>
+      </p:ext>
+    </p:extLst>
+  </p:cSld>
+  <p:clrMapOvr>
+    <a:masterClrMapping/>
+  </p:clrMapOvr>
+</p:notes>
+</file>
+
+<file path=ppt/notesSlides/notesSlide17.xml><?xml version="1.0" encoding="utf-8"?>
+<p:notes xmlns:a="http://schemas.openxmlformats.org/drawingml/2006/main" xmlns:r="http://schemas.openxmlformats.org/officeDocument/2006/relationships" xmlns:p="http://schemas.openxmlformats.org/presentationml/2006/main">
+  <p:cSld>
+    <p:spTree>
+      <p:nvGrpSpPr>
+        <p:cNvPr id="1" name=""/>
+        <p:cNvGrpSpPr/>
+        <p:nvPr/>
+      </p:nvGrpSpPr>
+      <p:grpSpPr>
+        <a:xfrm>
+          <a:off x="0" y="0"/>
+          <a:ext cx="0" cy="0"/>
+          <a:chOff x="0" y="0"/>
+          <a:chExt cx="0" cy="0"/>
+        </a:xfrm>
+      </p:grpSpPr>
+      <p:sp>
+        <p:nvSpPr>
+          <p:cNvPr id="2" name="Slide Image Placeholder 1"/>
+          <p:cNvSpPr>
+            <a:spLocks noGrp="1" noRot="1" noChangeAspect="1"/>
+          </p:cNvSpPr>
+          <p:nvPr>
+            <p:ph type="sldImg"/>
+          </p:nvPr>
+        </p:nvSpPr>
+        <p:spPr/>
+      </p:sp>
+      <p:sp>
+        <p:nvSpPr>
+          <p:cNvPr id="3" name="Notes Placeholder 2"/>
+          <p:cNvSpPr>
+            <a:spLocks noGrp="1"/>
+          </p:cNvSpPr>
+          <p:nvPr>
+            <p:ph type="body" idx="1"/>
+          </p:nvPr>
+        </p:nvSpPr>
+        <p:spPr/>
+        <p:txBody>
+          <a:bodyPr/>
+          <a:lstStyle/>
+          <a:p>
+            <a:r>
+              <a:rPr lang="en-US" dirty="0"/>
+              <a:t/>
+            </a:r>
+            <a:endParaRPr lang="en-US" dirty="0"/>
+          </a:p>
+        </p:txBody>
+      </p:sp>
+      <p:sp>
+        <p:nvSpPr>
+          <p:cNvPr id="4" name="Slide Number Placeholder 3"/>
+          <p:cNvSpPr>
+            <a:spLocks noGrp="1"/>
+          </p:cNvSpPr>
+          <p:nvPr>
+            <p:ph type="sldNum" sz="quarter" idx="10"/>
+          </p:nvPr>
+        </p:nvSpPr>
+        <p:spPr/>
+        <p:txBody>
+          <a:bodyPr/>
+          <a:lstStyle/>
+          <a:p>
+            <a:fld id="{F7021451-1387-4CA6-816F-3879F97B5CBC}" type="slidenum">
+              <a:rPr lang="en-US"/>
+              <a:t>17</a:t>
+            </a:fld>
+            <a:endParaRPr lang="en-US"/>
+          </a:p>
+        </p:txBody>
+      </p:sp>
+    </p:spTree>
+    <p:extLst>
+      <p:ext uri="{BB962C8B-B14F-4D97-AF65-F5344CB8AC3E}">
+        <p14:creationId xmlns:p14="http://schemas.microsoft.com/office/powerpoint/2010/main" val="1024086991"/>
+      </p:ext>
+    </p:extLst>
+  </p:cSld>
+  <p:clrMapOvr>
+    <a:masterClrMapping/>
+  </p:clrMapOvr>
+</p:notes>
+</file>
+
+<file path=ppt/notesSlides/notesSlide18.xml><?xml version="1.0" encoding="utf-8"?>
+<p:notes xmlns:a="http://schemas.openxmlformats.org/drawingml/2006/main" xmlns:r="http://schemas.openxmlformats.org/officeDocument/2006/relationships" xmlns:p="http://schemas.openxmlformats.org/presentationml/2006/main">
+  <p:cSld>
+    <p:spTree>
+      <p:nvGrpSpPr>
+        <p:cNvPr id="1" name=""/>
+        <p:cNvGrpSpPr/>
+        <p:nvPr/>
+      </p:nvGrpSpPr>
+      <p:grpSpPr>
+        <a:xfrm>
+          <a:off x="0" y="0"/>
+          <a:ext cx="0" cy="0"/>
+          <a:chOff x="0" y="0"/>
+          <a:chExt cx="0" cy="0"/>
+        </a:xfrm>
+      </p:grpSpPr>
+      <p:sp>
+        <p:nvSpPr>
+          <p:cNvPr id="2" name="Slide Image Placeholder 1"/>
+          <p:cNvSpPr>
+            <a:spLocks noGrp="1" noRot="1" noChangeAspect="1"/>
+          </p:cNvSpPr>
+          <p:nvPr>
+            <p:ph type="sldImg"/>
+          </p:nvPr>
+        </p:nvSpPr>
+        <p:spPr/>
+      </p:sp>
+      <p:sp>
+        <p:nvSpPr>
+          <p:cNvPr id="3" name="Notes Placeholder 2"/>
+          <p:cNvSpPr>
+            <a:spLocks noGrp="1"/>
+          </p:cNvSpPr>
+          <p:nvPr>
+            <p:ph type="body" idx="1"/>
+          </p:nvPr>
+        </p:nvSpPr>
+        <p:spPr/>
+        <p:txBody>
+          <a:bodyPr/>
+          <a:lstStyle/>
+          <a:p>
+            <a:r>
+              <a:rPr lang="en-US" dirty="0"/>
+              <a:t/>
+            </a:r>
+            <a:endParaRPr lang="en-US" dirty="0"/>
+          </a:p>
+        </p:txBody>
+      </p:sp>
+      <p:sp>
+        <p:nvSpPr>
+          <p:cNvPr id="4" name="Slide Number Placeholder 3"/>
+          <p:cNvSpPr>
+            <a:spLocks noGrp="1"/>
+          </p:cNvSpPr>
+          <p:nvPr>
+            <p:ph type="sldNum" sz="quarter" idx="10"/>
+          </p:nvPr>
+        </p:nvSpPr>
+        <p:spPr/>
+        <p:txBody>
+          <a:bodyPr/>
+          <a:lstStyle/>
+          <a:p>
+            <a:fld id="{F7021451-1387-4CA6-816F-3879F97B5CBC}" type="slidenum">
+              <a:rPr lang="en-US"/>
+              <a:t>18</a:t>
             </a:fld>
             <a:endParaRPr lang="en-US"/>
           </a:p>
@@ -2235,194 +2680,6 @@
         </p:nvSpPr>
         <p:spPr>
           <a:xfrm>
-            <a:off x="406301" y="1223963"/>
-            <a:ext cx="8498026" cy="274290"/>
-          </a:xfrm>
-          <a:prstGeom prst="rect">
-            <a:avLst/>
-          </a:prstGeom>
-          <a:noFill/>
-          <a:ln/>
-        </p:spPr>
-        <p:txBody>
-          <a:bodyPr wrap="square" lIns="0" tIns="0" rIns="0" bIns="0" rtlCol="0" anchor="t"/>
-          <a:lstStyle/>
-          <a:p>
-            <a:pPr algn="l" indent="0" marL="0">
-              <a:lnSpc>
-                <a:spcPts val="2160"/>
-              </a:lnSpc>
-              <a:spcBef>
-                <a:spcPts val="600"/>
-              </a:spcBef>
-              <a:spcAft>
-                <a:spcPts val="800"/>
-              </a:spcAft>
-              <a:buNone/>
-            </a:pPr>
-            <a:r>
-              <a:rPr lang="en-US" sz="1800" b="1" dirty="0">
-                <a:solidFill>
-                  <a:srgbClr val="FE4447"/>
-                </a:solidFill>
-                <a:latin typeface="Georgia" pitchFamily="34" charset="0"/>
-                <a:ea typeface="Georgia" pitchFamily="34" charset="-122"/>
-                <a:cs typeface="Georgia" pitchFamily="34" charset="-120"/>
-              </a:rPr>
-              <a:t>Learning objective</a:t>
-            </a:r>
-            <a:endParaRPr lang="en-US" sz="1800" dirty="0"/>
-          </a:p>
-        </p:txBody>
-      </p:sp>
-      <p:sp>
-        <p:nvSpPr>
-          <p:cNvPr id="6" name="Text 4"/>
-          <p:cNvSpPr/>
-          <p:nvPr/>
-        </p:nvSpPr>
-        <p:spPr>
-          <a:xfrm>
-            <a:off x="406301" y="1637854"/>
-            <a:ext cx="8498026" cy="426541"/>
-          </a:xfrm>
-          <a:prstGeom prst="rect">
-            <a:avLst/>
-          </a:prstGeom>
-          <a:noFill/>
-          <a:ln/>
-        </p:spPr>
-        <p:txBody>
-          <a:bodyPr wrap="square" lIns="0" tIns="0" rIns="0" bIns="0" rtlCol="0" anchor="t"/>
-          <a:lstStyle/>
-          <a:p>
-            <a:pPr algn="l" indent="0" marL="0">
-              <a:lnSpc>
-                <a:spcPts val="1680"/>
-              </a:lnSpc>
-              <a:spcBef>
-                <a:spcPts val="300"/>
-              </a:spcBef>
-              <a:spcAft>
-                <a:spcPts val="300"/>
-              </a:spcAft>
-              <a:buNone/>
-            </a:pPr>
-            <a:r>
-              <a:rPr lang="en-US" sz="1200" dirty="0">
-                <a:solidFill>
-                  <a:srgbClr val="1C2833"/>
-                </a:solidFill>
-                <a:latin typeface="Arial" pitchFamily="34" charset="0"/>
-                <a:ea typeface="Arial" pitchFamily="34" charset="-122"/>
-                <a:cs typeface="Arial" pitchFamily="34" charset="-120"/>
-              </a:rPr>
-              <a:t>By the end of this lesson, students will (a) distinguish a Sudoku puzzle from a magic square (Sudoku constrains </a:t>
-            </a:r>
-            <a:pPr algn="l" indent="0" marL="0">
-              <a:lnSpc>
-                <a:spcPts val="1680"/>
-              </a:lnSpc>
-              <a:spcBef>
-                <a:spcPts val="300"/>
-              </a:spcBef>
-              <a:spcAft>
-                <a:spcPts val="300"/>
-              </a:spcAft>
-              <a:buNone/>
-            </a:pPr>
-            <a:r>
-              <a:rPr lang="en-US" sz="1200" i="1" dirty="0">
-                <a:solidFill>
-                  <a:srgbClr val="1C2833"/>
-                </a:solidFill>
-                <a:latin typeface="Arial" pitchFamily="34" charset="0"/>
-                <a:ea typeface="Arial" pitchFamily="34" charset="-122"/>
-                <a:cs typeface="Arial" pitchFamily="34" charset="-120"/>
-              </a:rPr>
-              <a:t>placement</a:t>
-            </a:r>
-            <a:pPr algn="l" indent="0" marL="0">
-              <a:lnSpc>
-                <a:spcPts val="1680"/>
-              </a:lnSpc>
-              <a:spcBef>
-                <a:spcPts val="300"/>
-              </a:spcBef>
-              <a:spcAft>
-                <a:spcPts val="300"/>
-              </a:spcAft>
-              <a:buNone/>
-            </a:pPr>
-            <a:r>
-              <a:rPr lang="en-US" sz="1200" dirty="0">
-                <a:solidFill>
-                  <a:srgbClr val="1C2833"/>
-                </a:solidFill>
-                <a:latin typeface="Arial" pitchFamily="34" charset="0"/>
-                <a:ea typeface="Arial" pitchFamily="34" charset="-122"/>
-                <a:cs typeface="Arial" pitchFamily="34" charset="-120"/>
-              </a:rPr>
-              <a:t> but not </a:t>
-            </a:r>
-            <a:pPr algn="l" indent="0" marL="0">
-              <a:lnSpc>
-                <a:spcPts val="1680"/>
-              </a:lnSpc>
-              <a:spcBef>
-                <a:spcPts val="300"/>
-              </a:spcBef>
-              <a:spcAft>
-                <a:spcPts val="300"/>
-              </a:spcAft>
-              <a:buNone/>
-            </a:pPr>
-            <a:r>
-              <a:rPr lang="en-US" sz="1200" i="1" dirty="0">
-                <a:solidFill>
-                  <a:srgbClr val="1C2833"/>
-                </a:solidFill>
-                <a:latin typeface="Arial" pitchFamily="34" charset="0"/>
-                <a:ea typeface="Arial" pitchFamily="34" charset="-122"/>
-                <a:cs typeface="Arial" pitchFamily="34" charset="-120"/>
-              </a:rPr>
-              <a:t>sums</a:t>
-            </a:r>
-            <a:pPr algn="l" indent="0" marL="0">
-              <a:lnSpc>
-                <a:spcPts val="1680"/>
-              </a:lnSpc>
-              <a:spcBef>
-                <a:spcPts val="300"/>
-              </a:spcBef>
-              <a:spcAft>
-                <a:spcPts val="300"/>
-              </a:spcAft>
-              <a:buNone/>
-            </a:pPr>
-            <a:r>
-              <a:rPr lang="en-US" sz="1200" dirty="0">
-                <a:solidFill>
-                  <a:srgbClr val="1C2833"/>
-                </a:solidFill>
-                <a:latin typeface="Arial" pitchFamily="34" charset="0"/>
-                <a:ea typeface="Arial" pitchFamily="34" charset="-122"/>
-                <a:cs typeface="Arial" pitchFamily="34" charset="-120"/>
-              </a:rPr>
-              <a:t>), and (b) make substantial progress on their module project.</a:t>
-            </a:r>
-            <a:endParaRPr lang="en-US" sz="1200" dirty="0"/>
-          </a:p>
-        </p:txBody>
-      </p:sp>
-      <p:sp>
-        <p:nvSpPr>
-          <p:cNvPr id="7" name="Text 5"/>
-          <p:cNvSpPr/>
-          <p:nvPr/>
-        </p:nvSpPr>
-        <p:spPr>
-          <a:xfrm>
             <a:off x="406301" y="4434929"/>
             <a:ext cx="8498026" cy="213271"/>
           </a:xfrm>
@@ -2567,7 +2824,7 @@
                 <a:ea typeface="Georgia" pitchFamily="34" charset="-122"/>
                 <a:cs typeface="Georgia" pitchFamily="34" charset="-120"/>
               </a:rPr>
-              <a:t>Homework</a:t>
+              <a:t>Core (15 min) (cont.)</a:t>
             </a:r>
             <a:endParaRPr lang="en-US" sz="1800" dirty="0"/>
           </a:p>
@@ -2581,8 +2838,8 @@
         </p:nvSpPr>
         <p:spPr>
           <a:xfrm>
-            <a:off x="406301" y="870942"/>
-            <a:ext cx="8498026" cy="426541"/>
+            <a:off x="634901" y="883593"/>
+            <a:ext cx="8102798" cy="693241"/>
           </a:xfrm>
           <a:prstGeom prst="rect">
             <a:avLst/>
@@ -2594,13 +2851,31 @@
           <a:bodyPr wrap="square" lIns="0" tIns="0" rIns="0" bIns="0" rtlCol="0" anchor="t"/>
           <a:lstStyle/>
           <a:p>
-            <a:pPr algn="l" indent="0" marL="0">
-              <a:lnSpc>
-                <a:spcPts val="1680"/>
-              </a:lnSpc>
-              <a:spcBef>
-                <a:spcPts val="300"/>
-              </a:spcBef>
+            <a:pPr algn="l" marL="342900" indent="-342900">
+              <a:lnSpc>
+                <a:spcPts val="1620"/>
+              </a:lnSpc>
+              <a:spcAft>
+                <a:spcPts val="300"/>
+              </a:spcAft>
+              <a:buSzPct val="100000"/>
+              <a:buChar char="•"/>
+            </a:pPr>
+            <a:r>
+              <a:rPr lang="en-US" sz="1200" b="1" dirty="0">
+                <a:solidFill>
+                  <a:srgbClr val="1C2833"/>
+                </a:solidFill>
+                <a:latin typeface="Arial" pitchFamily="34" charset="0"/>
+                <a:ea typeface="Arial" pitchFamily="34" charset="-122"/>
+                <a:cs typeface="Arial" pitchFamily="34" charset="-120"/>
+              </a:rPr>
+              <a:t>A bridge example.</a:t>
+            </a:r>
+            <a:pPr algn="l" indent="0" marL="0">
+              <a:lnSpc>
+                <a:spcPts val="1620"/>
+              </a:lnSpc>
               <a:spcAft>
                 <a:spcPts val="300"/>
               </a:spcAft>
@@ -2615,7 +2890,107 @@
                 <a:ea typeface="Arial" pitchFamily="34" charset="-122"/>
                 <a:cs typeface="Arial" pitchFamily="34" charset="-120"/>
               </a:rPr>
-              <a:t>– Finish anything not finished in class. Tomorrow is the share, not the start. – Time yourself: how fast can you construct a 5×5 magic square now, versus on Day 5?</a:t>
+              <a:t> It is possible to have a 9×9 grid that is </a:t>
+            </a:r>
+            <a:pPr algn="l" indent="0" marL="0">
+              <a:lnSpc>
+                <a:spcPts val="1620"/>
+              </a:lnSpc>
+              <a:spcAft>
+                <a:spcPts val="300"/>
+              </a:spcAft>
+              <a:buNone/>
+            </a:pPr>
+            <a:r>
+              <a:rPr lang="en-US" sz="1200" i="1" dirty="0">
+                <a:solidFill>
+                  <a:srgbClr val="1C2833"/>
+                </a:solidFill>
+                <a:latin typeface="Arial" pitchFamily="34" charset="0"/>
+                <a:ea typeface="Arial" pitchFamily="34" charset="-122"/>
+                <a:cs typeface="Arial" pitchFamily="34" charset="-120"/>
+              </a:rPr>
+              <a:t>both</a:t>
+            </a:r>
+            <a:pPr algn="l" indent="0" marL="0">
+              <a:lnSpc>
+                <a:spcPts val="1620"/>
+              </a:lnSpc>
+              <a:spcAft>
+                <a:spcPts val="300"/>
+              </a:spcAft>
+              <a:buNone/>
+            </a:pPr>
+            <a:r>
+              <a:rPr lang="en-US" sz="1200" dirty="0">
+                <a:solidFill>
+                  <a:srgbClr val="1C2833"/>
+                </a:solidFill>
+                <a:latin typeface="Arial" pitchFamily="34" charset="0"/>
+                <a:ea typeface="Arial" pitchFamily="34" charset="-122"/>
+                <a:cs typeface="Arial" pitchFamily="34" charset="-120"/>
+              </a:rPr>
+              <a:t> a Sudoku AND a magic square (every row, column, </a:t>
+            </a:r>
+            <a:pPr algn="l" indent="0" marL="0">
+              <a:lnSpc>
+                <a:spcPts val="1620"/>
+              </a:lnSpc>
+              <a:spcAft>
+                <a:spcPts val="300"/>
+              </a:spcAft>
+              <a:buNone/>
+            </a:pPr>
+            <a:r>
+              <a:rPr lang="en-US" sz="1200" i="1" dirty="0">
+                <a:solidFill>
+                  <a:srgbClr val="1C2833"/>
+                </a:solidFill>
+                <a:latin typeface="Arial" pitchFamily="34" charset="0"/>
+                <a:ea typeface="Arial" pitchFamily="34" charset="-122"/>
+                <a:cs typeface="Arial" pitchFamily="34" charset="-120"/>
+              </a:rPr>
+              <a:t>and</a:t>
+            </a:r>
+            <a:pPr algn="l" indent="0" marL="0">
+              <a:lnSpc>
+                <a:spcPts val="1620"/>
+              </a:lnSpc>
+              <a:spcAft>
+                <a:spcPts val="300"/>
+              </a:spcAft>
+              <a:buNone/>
+            </a:pPr>
+            <a:r>
+              <a:rPr lang="en-US" sz="1200" dirty="0">
+                <a:solidFill>
+                  <a:srgbClr val="1C2833"/>
+                </a:solidFill>
+                <a:latin typeface="Arial" pitchFamily="34" charset="0"/>
+                <a:ea typeface="Arial" pitchFamily="34" charset="-122"/>
+                <a:cs typeface="Arial" pitchFamily="34" charset="-120"/>
+              </a:rPr>
+              <a:t> 3×3 block sums to 45 — which works because rows/columns automatically sum to 1+2+...+9 = 45). Such squares exist; they are rare. Show one if you have time. </a:t>
+            </a:r>
+            <a:pPr algn="l" indent="0" marL="0">
+              <a:lnSpc>
+                <a:spcPts val="1620"/>
+              </a:lnSpc>
+              <a:spcAft>
+                <a:spcPts val="300"/>
+              </a:spcAft>
+              <a:buNone/>
+            </a:pPr>
+            <a:r>
+              <a:rPr lang="en-US" sz="1200" i="1" dirty="0">
+                <a:solidFill>
+                  <a:srgbClr val="1C2833"/>
+                </a:solidFill>
+                <a:latin typeface="Arial" pitchFamily="34" charset="0"/>
+                <a:ea typeface="Arial" pitchFamily="34" charset="-122"/>
+                <a:cs typeface="Arial" pitchFamily="34" charset="-120"/>
+              </a:rPr>
+              <a:t>(Not required at Middle band.)</a:t>
             </a:r>
             <a:endParaRPr lang="en-US" sz="1200" dirty="0"/>
           </a:p>
@@ -2773,7 +3148,7 @@
                 <a:ea typeface="Georgia" pitchFamily="34" charset="-122"/>
                 <a:cs typeface="Georgia" pitchFamily="34" charset="-120"/>
               </a:rPr>
-              <a:t>Differentiation</a:t>
+              <a:t>Activity (20 min) — Project work</a:t>
             </a:r>
             <a:endParaRPr lang="en-US" sz="1800" dirty="0"/>
           </a:p>
@@ -2788,7 +3163,7 @@
         <p:spPr>
           <a:xfrm>
             <a:off x="634901" y="883593"/>
-            <a:ext cx="8102798" cy="937022"/>
+            <a:ext cx="8102798" cy="1500783"/>
           </a:xfrm>
           <a:prstGeom prst="rect">
             <a:avLst/>
@@ -2811,26 +3186,6 @@
               <a:buChar char="•"/>
             </a:pPr>
             <a:r>
-              <a:rPr lang="en-US" sz="1200" b="1" dirty="0">
-                <a:solidFill>
-                  <a:srgbClr val="1C2833"/>
-                </a:solidFill>
-                <a:latin typeface="Arial" pitchFamily="34" charset="0"/>
-                <a:ea typeface="Arial" pitchFamily="34" charset="-122"/>
-                <a:cs typeface="Arial" pitchFamily="34" charset="-120"/>
-              </a:rPr>
-              <a:t>One tier up:</a:t>
-            </a:r>
-            <a:pPr algn="l" indent="0" marL="0">
-              <a:lnSpc>
-                <a:spcPts val="1620"/>
-              </a:lnSpc>
-              <a:spcAft>
-                <a:spcPts val="300"/>
-              </a:spcAft>
-              <a:buNone/>
-            </a:pPr>
-            <a:r>
               <a:rPr lang="en-US" sz="1200" dirty="0">
                 <a:solidFill>
                   <a:srgbClr val="1C2833"/>
@@ -2839,7 +3194,7 @@
                 <a:ea typeface="Arial" pitchFamily="34" charset="-122"/>
                 <a:cs typeface="Arial" pitchFamily="34" charset="-120"/>
               </a:rPr>
-              <a:t> Find or construct a 9×9 grid that is both a Sudoku AND a magic square (every row/column/3×3 block sums to 45). Hint: rows and columns of a Sudoku already sum to 45. You only need to also make every 3×3 block sum to 45.</a:t>
+              <a:t>Pairs work on their project. Teacher circulates.</a:t>
             </a:r>
             <a:endParaRPr lang="en-US" sz="1200" dirty="0"/>
           </a:p>
@@ -2855,24 +3210,28 @@
               <a:buChar char="•"/>
             </a:pPr>
             <a:r>
-              <a:rPr lang="en-US" sz="1200" b="1" dirty="0">
-                <a:solidFill>
-                  <a:srgbClr val="1C2833"/>
-                </a:solidFill>
-                <a:latin typeface="Arial" pitchFamily="34" charset="0"/>
-                <a:ea typeface="Arial" pitchFamily="34" charset="-122"/>
-                <a:cs typeface="Arial" pitchFamily="34" charset="-120"/>
-              </a:rPr>
-              <a:t>One tier down:</a:t>
-            </a:r>
-            <a:pPr algn="l" indent="0" marL="0">
+              <a:rPr lang="en-US" sz="1200" dirty="0">
+                <a:solidFill>
+                  <a:srgbClr val="1C2833"/>
+                </a:solidFill>
+                <a:latin typeface="Arial" pitchFamily="34" charset="0"/>
+                <a:ea typeface="Arial" pitchFamily="34" charset="-122"/>
+                <a:cs typeface="Arial" pitchFamily="34" charset="-120"/>
+              </a:rPr>
+              <a:t>Required checkpoints by end of class:</a:t>
+            </a:r>
+            <a:endParaRPr lang="en-US" sz="1200" dirty="0"/>
+          </a:p>
+          <a:p>
+            <a:pPr algn="l" marL="342900" indent="-342900">
               <a:lnSpc>
                 <a:spcPts val="1620"/>
               </a:lnSpc>
               <a:spcAft>
                 <a:spcPts val="300"/>
               </a:spcAft>
-              <a:buNone/>
+              <a:buSzPct val="100000"/>
+              <a:buChar char="•"/>
             </a:pPr>
             <a:r>
               <a:rPr lang="en-US" sz="1200" dirty="0">
@@ -2883,7 +3242,119 @@
                 <a:ea typeface="Arial" pitchFamily="34" charset="-122"/>
                 <a:cs typeface="Arial" pitchFamily="34" charset="-120"/>
               </a:rPr>
-              <a:t> Use the class time to construct one more 5×5 magic square as practice for the summative. Speed is not the goal; correctness is.</a:t>
+              <a:t>The magic square is fully constructed (5×5 or larger).</a:t>
+            </a:r>
+            <a:endParaRPr lang="en-US" sz="1200" dirty="0"/>
+          </a:p>
+          <a:p>
+            <a:pPr algn="l" marL="342900" indent="-342900">
+              <a:lnSpc>
+                <a:spcPts val="1620"/>
+              </a:lnSpc>
+              <a:spcAft>
+                <a:spcPts val="300"/>
+              </a:spcAft>
+              <a:buSzPct val="100000"/>
+              <a:buChar char="•"/>
+            </a:pPr>
+            <a:r>
+              <a:rPr lang="en-US" sz="1200" dirty="0">
+                <a:solidFill>
+                  <a:srgbClr val="1C2833"/>
+                </a:solidFill>
+                <a:latin typeface="Arial" pitchFamily="34" charset="0"/>
+                <a:ea typeface="Arial" pitchFamily="34" charset="-122"/>
+                <a:cs typeface="Arial" pitchFamily="34" charset="-120"/>
+              </a:rPr>
+              <a:t>Magic constant verified for at least 3 rows, 3 columns, both diagonals.</a:t>
+            </a:r>
+            <a:endParaRPr lang="en-US" sz="1200" dirty="0"/>
+          </a:p>
+          <a:p>
+            <a:pPr algn="l" marL="342900" indent="-342900">
+              <a:lnSpc>
+                <a:spcPts val="1620"/>
+              </a:lnSpc>
+              <a:spcAft>
+                <a:spcPts val="300"/>
+              </a:spcAft>
+              <a:buSzPct val="100000"/>
+              <a:buChar char="•"/>
+            </a:pPr>
+            <a:r>
+              <a:rPr lang="en-US" sz="1200" dirty="0">
+                <a:solidFill>
+                  <a:srgbClr val="1C2833"/>
+                </a:solidFill>
+                <a:latin typeface="Arial" pitchFamily="34" charset="0"/>
+                <a:ea typeface="Arial" pitchFamily="34" charset="-122"/>
+                <a:cs typeface="Arial" pitchFamily="34" charset="-120"/>
+              </a:rPr>
+              <a:t>Citation is in place (Nārāyaṇa Paṇḍita, </a:t>
+            </a:r>
+            <a:pPr algn="l" indent="0" marL="0">
+              <a:lnSpc>
+                <a:spcPts val="1620"/>
+              </a:lnSpc>
+              <a:spcAft>
+                <a:spcPts val="300"/>
+              </a:spcAft>
+              <a:buNone/>
+            </a:pPr>
+            <a:r>
+              <a:rPr lang="en-US" sz="1200" i="1" dirty="0">
+                <a:solidFill>
+                  <a:srgbClr val="1C2833"/>
+                </a:solidFill>
+                <a:latin typeface="Arial" pitchFamily="34" charset="0"/>
+                <a:ea typeface="Arial" pitchFamily="34" charset="-122"/>
+                <a:cs typeface="Arial" pitchFamily="34" charset="-120"/>
+              </a:rPr>
+              <a:t>Gaṇita-kaumudī</a:t>
+            </a:r>
+            <a:pPr algn="l" indent="0" marL="0">
+              <a:lnSpc>
+                <a:spcPts val="1620"/>
+              </a:lnSpc>
+              <a:spcAft>
+                <a:spcPts val="300"/>
+              </a:spcAft>
+              <a:buNone/>
+            </a:pPr>
+            <a:r>
+              <a:rPr lang="en-US" sz="1200" dirty="0">
+                <a:solidFill>
+                  <a:srgbClr val="1C2833"/>
+                </a:solidFill>
+                <a:latin typeface="Arial" pitchFamily="34" charset="0"/>
+                <a:ea typeface="Arial" pitchFamily="34" charset="-122"/>
+                <a:cs typeface="Arial" pitchFamily="34" charset="-120"/>
+              </a:rPr>
+              <a:t>, Book 14, 1356 CE).</a:t>
+            </a:r>
+            <a:endParaRPr lang="en-US" sz="1200" dirty="0"/>
+          </a:p>
+          <a:p>
+            <a:pPr algn="l" marL="342900" indent="-342900">
+              <a:lnSpc>
+                <a:spcPts val="1620"/>
+              </a:lnSpc>
+              <a:spcAft>
+                <a:spcPts val="300"/>
+              </a:spcAft>
+              <a:buSzPct val="100000"/>
+              <a:buChar char="•"/>
+            </a:pPr>
+            <a:r>
+              <a:rPr lang="en-US" sz="1200" dirty="0">
+                <a:solidFill>
+                  <a:srgbClr val="1C2833"/>
+                </a:solidFill>
+                <a:latin typeface="Arial" pitchFamily="34" charset="0"/>
+                <a:ea typeface="Arial" pitchFamily="34" charset="-122"/>
+                <a:cs typeface="Arial" pitchFamily="34" charset="-120"/>
+              </a:rPr>
+              <a:t>At least one paragraph (or one slide of a video) of explanation drafted.</a:t>
             </a:r>
             <a:endParaRPr lang="en-US" sz="1200" dirty="0"/>
           </a:p>
@@ -3041,7 +3512,7 @@
                 <a:ea typeface="Georgia" pitchFamily="34" charset="-122"/>
                 <a:cs typeface="Georgia" pitchFamily="34" charset="-120"/>
               </a:rPr>
-              <a:t>Teacher notes</a:t>
+              <a:t>Activity (20 min) — Project work (cont.)</a:t>
             </a:r>
             <a:endParaRPr lang="en-US" sz="1800" dirty="0"/>
           </a:p>
@@ -3055,8 +3526,8 @@
         </p:nvSpPr>
         <p:spPr>
           <a:xfrm>
-            <a:off x="406301" y="870942"/>
-            <a:ext cx="8498026" cy="853083"/>
+            <a:off x="634901" y="883593"/>
+            <a:ext cx="8102798" cy="281880"/>
           </a:xfrm>
           <a:prstGeom prst="rect">
             <a:avLst/>
@@ -3068,17 +3539,15 @@
           <a:bodyPr wrap="square" lIns="0" tIns="0" rIns="0" bIns="0" rtlCol="0" anchor="t"/>
           <a:lstStyle/>
           <a:p>
-            <a:pPr algn="l" indent="0" marL="0">
-              <a:lnSpc>
-                <a:spcPts val="1680"/>
-              </a:lnSpc>
-              <a:spcBef>
-                <a:spcPts val="300"/>
-              </a:spcBef>
-              <a:spcAft>
-                <a:spcPts val="300"/>
-              </a:spcAft>
-              <a:buNone/>
+            <a:pPr algn="l" marL="342900" indent="-342900">
+              <a:lnSpc>
+                <a:spcPts val="1620"/>
+              </a:lnSpc>
+              <a:spcAft>
+                <a:spcPts val="300"/>
+              </a:spcAft>
+              <a:buSzPct val="100000"/>
+              <a:buChar char="•"/>
             </a:pPr>
             <a:r>
               <a:rPr lang="en-US" sz="1200" dirty="0">
@@ -3089,7 +3558,7 @@
                 <a:ea typeface="Arial" pitchFamily="34" charset="-122"/>
                 <a:cs typeface="Arial" pitchFamily="34" charset="-120"/>
               </a:rPr>
-              <a:t>– The Sudoku discussion is short on purpose. The point is to draw a clean distinction, not to teach Sudoku. – Spend the project-work time circulating. Most errors are caught at this stage. – Some students will worry about the "design-your-own" requirement. Remind them: choosing the size, the starting number, and the presentation format are all design choices. They are not expected to invent a new algorithm.</a:t>
+              <a:t>The teacher does a 1-minute review with each pair to flag any errors before Day 10.</a:t>
             </a:r>
             <a:endParaRPr lang="en-US" sz="1200" dirty="0"/>
           </a:p>
@@ -3247,7 +3716,7 @@
                 <a:ea typeface="Georgia" pitchFamily="34" charset="-122"/>
                 <a:cs typeface="Georgia" pitchFamily="34" charset="-120"/>
               </a:rPr>
-              <a:t>Citation(s) used in this lesson</a:t>
+              <a:t>Wrap-up (5 min)</a:t>
             </a:r>
             <a:endParaRPr lang="en-US" sz="1800" dirty="0"/>
           </a:p>
@@ -3261,8 +3730,8 @@
         </p:nvSpPr>
         <p:spPr>
           <a:xfrm>
-            <a:off x="406301" y="870942"/>
-            <a:ext cx="8498026" cy="213271"/>
+            <a:off x="634901" y="883593"/>
+            <a:ext cx="8102798" cy="525661"/>
           </a:xfrm>
           <a:prstGeom prst="rect">
             <a:avLst/>
@@ -3274,6 +3743,76 @@
           <a:bodyPr wrap="square" lIns="0" tIns="0" rIns="0" bIns="0" rtlCol="0" anchor="t"/>
           <a:lstStyle/>
           <a:p>
+            <a:pPr algn="l" marL="342900" indent="-342900">
+              <a:lnSpc>
+                <a:spcPts val="1620"/>
+              </a:lnSpc>
+              <a:spcAft>
+                <a:spcPts val="300"/>
+              </a:spcAft>
+              <a:buSzPct val="100000"/>
+              <a:buChar char="•"/>
+            </a:pPr>
+            <a:r>
+              <a:rPr lang="en-US" sz="1200" dirty="0">
+                <a:solidFill>
+                  <a:srgbClr val="1C2833"/>
+                </a:solidFill>
+                <a:latin typeface="Arial" pitchFamily="34" charset="0"/>
+                <a:ea typeface="Arial" pitchFamily="34" charset="-122"/>
+                <a:cs typeface="Arial" pitchFamily="34" charset="-120"/>
+              </a:rPr>
+              <a:t>Quick poll: "On a scale of 1–5, how ready do you feel for Day 10's share?" Show of fingers.</a:t>
+            </a:r>
+            <a:endParaRPr lang="en-US" sz="1200" dirty="0"/>
+          </a:p>
+          <a:p>
+            <a:pPr algn="l" marL="342900" indent="-342900">
+              <a:lnSpc>
+                <a:spcPts val="1620"/>
+              </a:lnSpc>
+              <a:spcAft>
+                <a:spcPts val="300"/>
+              </a:spcAft>
+              <a:buSzPct val="100000"/>
+              <a:buChar char="•"/>
+            </a:pPr>
+            <a:r>
+              <a:rPr lang="en-US" sz="1200" dirty="0">
+                <a:solidFill>
+                  <a:srgbClr val="1C2833"/>
+                </a:solidFill>
+                <a:latin typeface="Arial" pitchFamily="34" charset="0"/>
+                <a:ea typeface="Arial" pitchFamily="34" charset="-122"/>
+                <a:cs typeface="Arial" pitchFamily="34" charset="-120"/>
+              </a:rPr>
+              <a:t>For 1–2 ratings: teacher schedules a 5-min meeting with that pair before Day 10.</a:t>
+            </a:r>
+            <a:endParaRPr lang="en-US" sz="1200" dirty="0"/>
+          </a:p>
+        </p:txBody>
+      </p:sp>
+      <p:sp>
+        <p:nvSpPr>
+          <p:cNvPr id="5" name="Text 3"/>
+          <p:cNvSpPr/>
+          <p:nvPr/>
+        </p:nvSpPr>
+        <p:spPr>
+          <a:xfrm>
+            <a:off x="406301" y="4434929"/>
+            <a:ext cx="8498026" cy="213271"/>
+          </a:xfrm>
+          <a:prstGeom prst="rect">
+            <a:avLst/>
+          </a:prstGeom>
+          <a:noFill/>
+          <a:ln/>
+        </p:spPr>
+        <p:txBody>
+          <a:bodyPr wrap="square" lIns="0" tIns="0" rIns="0" bIns="0" rtlCol="0" anchor="t"/>
+          <a:lstStyle/>
+          <a:p>
             <a:pPr algn="l" indent="0" marL="0">
               <a:lnSpc>
                 <a:spcPts val="1680"/>
@@ -3295,8 +3834,524 @@
                 <a:ea typeface="Arial" pitchFamily="34" charset="-122"/>
                 <a:cs typeface="Arial" pitchFamily="34" charset="-120"/>
               </a:rPr>
-              <a:t>– Nārāyaṇa Paṇḍita, </a:t>
-            </a:r>
+              <a:t>Middle ·  · IKS Curriculum</a:t>
+            </a:r>
+            <a:endParaRPr lang="en-US" sz="1200" dirty="0"/>
+          </a:p>
+        </p:txBody>
+      </p:sp>
+    </p:spTree>
+  </p:cSld>
+  <p:clrMapOvr>
+    <a:masterClrMapping/>
+  </p:clrMapOvr>
+</p:sld>
+</file>
+
+<file path=ppt/slides/slide14.xml><?xml version="1.0" encoding="utf-8"?>
+<p:sld xmlns:a="http://schemas.openxmlformats.org/drawingml/2006/main" xmlns:r="http://schemas.openxmlformats.org/officeDocument/2006/relationships" xmlns:p="http://schemas.openxmlformats.org/presentationml/2006/main">
+  <p:cSld name="Slide 14">
+    <p:bg>
+      <p:bgPr>
+        <a:solidFill>
+          <a:srgbClr val="FFFFFF"/>
+        </a:solidFill>
+      </p:bgPr>
+    </p:bg>
+    <p:spTree>
+      <p:nvGrpSpPr>
+        <p:cNvPr id="1" name=""/>
+        <p:cNvGrpSpPr/>
+        <p:nvPr/>
+      </p:nvGrpSpPr>
+      <p:grpSpPr>
+        <a:xfrm>
+          <a:off x="0" y="0"/>
+          <a:ext cx="0" cy="0"/>
+          <a:chOff x="0" y="0"/>
+          <a:chExt cx="0" cy="0"/>
+        </a:xfrm>
+      </p:grpSpPr>
+      <p:sp>
+        <p:nvSpPr>
+          <p:cNvPr id="2" name="Text 0"/>
+          <p:cNvSpPr/>
+          <p:nvPr/>
+        </p:nvSpPr>
+        <p:spPr>
+          <a:xfrm>
+            <a:off x="0" y="0"/>
+            <a:ext cx="9144000" cy="101501"/>
+          </a:xfrm>
+          <a:prstGeom prst="rect">
+            <a:avLst/>
+          </a:prstGeom>
+          <a:solidFill>
+            <a:srgbClr val="277884"/>
+          </a:solidFill>
+          <a:ln/>
+        </p:spPr>
+        <p:txBody>
+          <a:bodyPr wrap="square" rtlCol="0" anchor="ctr"/>
+          <a:lstStyle/>
+          <a:p>
+            <a:pPr indent="0" marL="0">
+              <a:buNone/>
+            </a:pPr>
+            <a:endParaRPr lang="en-US" dirty="0"/>
+          </a:p>
+        </p:txBody>
+      </p:sp>
+      <p:sp>
+        <p:nvSpPr>
+          <p:cNvPr id="3" name="Text 1"/>
+          <p:cNvSpPr/>
+          <p:nvPr/>
+        </p:nvSpPr>
+        <p:spPr>
+          <a:xfrm>
+            <a:off x="406301" y="457051"/>
+            <a:ext cx="8498026" cy="274290"/>
+          </a:xfrm>
+          <a:prstGeom prst="rect">
+            <a:avLst/>
+          </a:prstGeom>
+          <a:noFill/>
+          <a:ln/>
+        </p:spPr>
+        <p:txBody>
+          <a:bodyPr wrap="square" lIns="0" tIns="0" rIns="0" bIns="0" rtlCol="0" anchor="t"/>
+          <a:lstStyle/>
+          <a:p>
+            <a:pPr algn="l" indent="0" marL="0">
+              <a:lnSpc>
+                <a:spcPts val="2160"/>
+              </a:lnSpc>
+              <a:spcBef>
+                <a:spcPts val="600"/>
+              </a:spcBef>
+              <a:spcAft>
+                <a:spcPts val="800"/>
+              </a:spcAft>
+              <a:buNone/>
+            </a:pPr>
+            <a:r>
+              <a:rPr lang="en-US" sz="1800" b="1" dirty="0">
+                <a:solidFill>
+                  <a:srgbClr val="FE4447"/>
+                </a:solidFill>
+                <a:latin typeface="Georgia" pitchFamily="34" charset="0"/>
+                <a:ea typeface="Georgia" pitchFamily="34" charset="-122"/>
+                <a:cs typeface="Georgia" pitchFamily="34" charset="-120"/>
+              </a:rPr>
+              <a:t>Student-facing content</a:t>
+            </a:r>
+            <a:endParaRPr lang="en-US" sz="1800" dirty="0"/>
+          </a:p>
+        </p:txBody>
+      </p:sp>
+      <p:sp>
+        <p:nvSpPr>
+          <p:cNvPr id="4" name="Text 2"/>
+          <p:cNvSpPr/>
+          <p:nvPr/>
+        </p:nvSpPr>
+        <p:spPr>
+          <a:xfrm>
+            <a:off x="406301" y="883593"/>
+            <a:ext cx="8331398" cy="2074069"/>
+          </a:xfrm>
+          <a:prstGeom prst="rect">
+            <a:avLst/>
+          </a:prstGeom>
+          <a:solidFill>
+            <a:srgbClr val="F4F8F9"/>
+          </a:solidFill>
+          <a:ln/>
+        </p:spPr>
+        <p:txBody>
+          <a:bodyPr wrap="square" rtlCol="0" anchor="ctr"/>
+          <a:lstStyle/>
+          <a:p>
+            <a:pPr indent="0" marL="0">
+              <a:buNone/>
+            </a:pPr>
+            <a:endParaRPr lang="en-US" dirty="0"/>
+          </a:p>
+        </p:txBody>
+      </p:sp>
+      <p:sp>
+        <p:nvSpPr>
+          <p:cNvPr id="5" name="Shape 3"/>
+          <p:cNvSpPr/>
+          <p:nvPr/>
+        </p:nvSpPr>
+        <p:spPr>
+          <a:xfrm>
+            <a:off x="434876" y="883593"/>
+            <a:ext cx="0" cy="2074069"/>
+          </a:xfrm>
+          <a:prstGeom prst="line">
+            <a:avLst/>
+          </a:prstGeom>
+          <a:noFill/>
+          <a:ln w="57150">
+            <a:solidFill>
+              <a:srgbClr val="FE4447"/>
+            </a:solidFill>
+            <a:prstDash val="solid"/>
+          </a:ln>
+        </p:spPr>
+      </p:sp>
+      <p:sp>
+        <p:nvSpPr>
+          <p:cNvPr id="6" name="Text 4"/>
+          <p:cNvSpPr/>
+          <p:nvPr/>
+        </p:nvSpPr>
+        <p:spPr>
+          <a:xfrm>
+            <a:off x="692051" y="1074093"/>
+            <a:ext cx="7973389" cy="230981"/>
+          </a:xfrm>
+          <a:prstGeom prst="rect">
+            <a:avLst/>
+          </a:prstGeom>
+          <a:noFill/>
+          <a:ln/>
+        </p:spPr>
+        <p:txBody>
+          <a:bodyPr wrap="square" lIns="0" tIns="0" rIns="0" bIns="0" rtlCol="0" anchor="t"/>
+          <a:lstStyle/>
+          <a:p>
+            <a:pPr algn="l" indent="0" marL="0">
+              <a:lnSpc>
+                <a:spcPts val="1820"/>
+              </a:lnSpc>
+              <a:spcBef>
+                <a:spcPts val="300"/>
+              </a:spcBef>
+              <a:spcAft>
+                <a:spcPts val="300"/>
+              </a:spcAft>
+              <a:buNone/>
+            </a:pPr>
+            <a:r>
+              <a:rPr lang="en-US" sz="1300" b="1" i="1" dirty="0">
+                <a:solidFill>
+                  <a:srgbClr val="1C2833"/>
+                </a:solidFill>
+                <a:latin typeface="Georgia" pitchFamily="34" charset="0"/>
+                <a:ea typeface="Georgia" pitchFamily="34" charset="-122"/>
+                <a:cs typeface="Georgia" pitchFamily="34" charset="-120"/>
+              </a:rPr>
+              <a:t>Sudoku ≠ magic square.</a:t>
+            </a:r>
+            <a:endParaRPr lang="en-US" sz="1300" dirty="0"/>
+          </a:p>
+        </p:txBody>
+      </p:sp>
+      <p:sp>
+        <p:nvSpPr>
+          <p:cNvPr id="7" name="Text 5"/>
+          <p:cNvSpPr/>
+          <p:nvPr/>
+        </p:nvSpPr>
+        <p:spPr>
+          <a:xfrm>
+            <a:off x="692051" y="1343174"/>
+            <a:ext cx="7973389" cy="692944"/>
+          </a:xfrm>
+          <a:prstGeom prst="rect">
+            <a:avLst/>
+          </a:prstGeom>
+          <a:noFill/>
+          <a:ln/>
+        </p:spPr>
+        <p:txBody>
+          <a:bodyPr wrap="square" lIns="0" tIns="0" rIns="0" bIns="0" rtlCol="0" anchor="t"/>
+          <a:lstStyle/>
+          <a:p>
+            <a:pPr algn="l" indent="0" marL="0">
+              <a:lnSpc>
+                <a:spcPts val="1820"/>
+              </a:lnSpc>
+              <a:spcBef>
+                <a:spcPts val="300"/>
+              </a:spcBef>
+              <a:spcAft>
+                <a:spcPts val="300"/>
+              </a:spcAft>
+              <a:buNone/>
+            </a:pPr>
+            <a:r>
+              <a:rPr lang="en-US" sz="1300" dirty="0">
+                <a:solidFill>
+                  <a:srgbClr val="1C2833"/>
+                </a:solidFill>
+                <a:latin typeface="Georgia" pitchFamily="34" charset="0"/>
+                <a:ea typeface="Georgia" pitchFamily="34" charset="-122"/>
+                <a:cs typeface="Georgia" pitchFamily="34" charset="-120"/>
+              </a:rPr>
+              <a:t>| | Magic square (3×3, 1–9) | Sudoku 3×3 block | |---|---|---| | Cells | 9 distinct values from 1–9 | 9 distinct values from 1–9 | | Rows sum to a constant? | </a:t>
+            </a:r>
+            <a:pPr algn="l" indent="0" marL="0">
+              <a:lnSpc>
+                <a:spcPts val="1820"/>
+              </a:lnSpc>
+              <a:spcBef>
+                <a:spcPts val="300"/>
+              </a:spcBef>
+              <a:spcAft>
+                <a:spcPts val="300"/>
+              </a:spcAft>
+              <a:buNone/>
+            </a:pPr>
+            <a:r>
+              <a:rPr lang="en-US" sz="1300" b="1" i="1" dirty="0">
+                <a:solidFill>
+                  <a:srgbClr val="1C2833"/>
+                </a:solidFill>
+                <a:latin typeface="Georgia" pitchFamily="34" charset="0"/>
+                <a:ea typeface="Georgia" pitchFamily="34" charset="-122"/>
+                <a:cs typeface="Georgia" pitchFamily="34" charset="-120"/>
+              </a:rPr>
+              <a:t>Yes (15)</a:t>
+            </a:r>
+            <a:pPr algn="l" indent="0" marL="0">
+              <a:lnSpc>
+                <a:spcPts val="1820"/>
+              </a:lnSpc>
+              <a:spcBef>
+                <a:spcPts val="300"/>
+              </a:spcBef>
+              <a:spcAft>
+                <a:spcPts val="300"/>
+              </a:spcAft>
+              <a:buNone/>
+            </a:pPr>
+            <a:r>
+              <a:rPr lang="en-US" sz="1300" dirty="0">
+                <a:solidFill>
+                  <a:srgbClr val="1C2833"/>
+                </a:solidFill>
+                <a:latin typeface="Georgia" pitchFamily="34" charset="0"/>
+                <a:ea typeface="Georgia" pitchFamily="34" charset="-122"/>
+                <a:cs typeface="Georgia" pitchFamily="34" charset="-120"/>
+              </a:rPr>
+              <a:t> | No requirement | | Each row has all 9 digits? | No (only 3 cells) | </a:t>
+            </a:r>
+            <a:pPr algn="l" indent="0" marL="0">
+              <a:lnSpc>
+                <a:spcPts val="1820"/>
+              </a:lnSpc>
+              <a:spcBef>
+                <a:spcPts val="300"/>
+              </a:spcBef>
+              <a:spcAft>
+                <a:spcPts val="300"/>
+              </a:spcAft>
+              <a:buNone/>
+            </a:pPr>
+            <a:r>
+              <a:rPr lang="en-US" sz="1300" b="1" i="1" dirty="0">
+                <a:solidFill>
+                  <a:srgbClr val="1C2833"/>
+                </a:solidFill>
+                <a:latin typeface="Georgia" pitchFamily="34" charset="0"/>
+                <a:ea typeface="Georgia" pitchFamily="34" charset="-122"/>
+                <a:cs typeface="Georgia" pitchFamily="34" charset="-120"/>
+              </a:rPr>
+              <a:t>Yes</a:t>
+            </a:r>
+            <a:pPr algn="l" indent="0" marL="0">
+              <a:lnSpc>
+                <a:spcPts val="1820"/>
+              </a:lnSpc>
+              <a:spcBef>
+                <a:spcPts val="300"/>
+              </a:spcBef>
+              <a:spcAft>
+                <a:spcPts val="300"/>
+              </a:spcAft>
+              <a:buNone/>
+            </a:pPr>
+            <a:r>
+              <a:rPr lang="en-US" sz="1300" dirty="0">
+                <a:solidFill>
+                  <a:srgbClr val="1C2833"/>
+                </a:solidFill>
+                <a:latin typeface="Georgia" pitchFamily="34" charset="0"/>
+                <a:ea typeface="Georgia" pitchFamily="34" charset="-122"/>
+                <a:cs typeface="Georgia" pitchFamily="34" charset="-120"/>
+              </a:rPr>
+              <a:t> (in 9×9 Sudoku) | | Diagonals constrained? | </a:t>
+            </a:r>
+            <a:pPr algn="l" indent="0" marL="0">
+              <a:lnSpc>
+                <a:spcPts val="1820"/>
+              </a:lnSpc>
+              <a:spcBef>
+                <a:spcPts val="300"/>
+              </a:spcBef>
+              <a:spcAft>
+                <a:spcPts val="300"/>
+              </a:spcAft>
+              <a:buNone/>
+            </a:pPr>
+            <a:r>
+              <a:rPr lang="en-US" sz="1300" b="1" i="1" dirty="0">
+                <a:solidFill>
+                  <a:srgbClr val="1C2833"/>
+                </a:solidFill>
+                <a:latin typeface="Georgia" pitchFamily="34" charset="0"/>
+                <a:ea typeface="Georgia" pitchFamily="34" charset="-122"/>
+                <a:cs typeface="Georgia" pitchFamily="34" charset="-120"/>
+              </a:rPr>
+              <a:t>Sums</a:t>
+            </a:r>
+            <a:pPr algn="l" indent="0" marL="0">
+              <a:lnSpc>
+                <a:spcPts val="1820"/>
+              </a:lnSpc>
+              <a:spcBef>
+                <a:spcPts val="300"/>
+              </a:spcBef>
+              <a:spcAft>
+                <a:spcPts val="300"/>
+              </a:spcAft>
+              <a:buNone/>
+            </a:pPr>
+            <a:r>
+              <a:rPr lang="en-US" sz="1300" dirty="0">
+                <a:solidFill>
+                  <a:srgbClr val="1C2833"/>
+                </a:solidFill>
+                <a:latin typeface="Georgia" pitchFamily="34" charset="0"/>
+                <a:ea typeface="Georgia" pitchFamily="34" charset="-122"/>
+                <a:cs typeface="Georgia" pitchFamily="34" charset="-120"/>
+              </a:rPr>
+              <a:t> | Not required |</a:t>
+            </a:r>
+            <a:endParaRPr lang="en-US" sz="1300" dirty="0"/>
+          </a:p>
+        </p:txBody>
+      </p:sp>
+      <p:sp>
+        <p:nvSpPr>
+          <p:cNvPr id="8" name="Text 6"/>
+          <p:cNvSpPr/>
+          <p:nvPr/>
+        </p:nvSpPr>
+        <p:spPr>
+          <a:xfrm>
+            <a:off x="692051" y="2074218"/>
+            <a:ext cx="7973389" cy="692944"/>
+          </a:xfrm>
+          <a:prstGeom prst="rect">
+            <a:avLst/>
+          </a:prstGeom>
+          <a:noFill/>
+          <a:ln/>
+        </p:spPr>
+        <p:txBody>
+          <a:bodyPr wrap="square" lIns="0" tIns="0" rIns="0" bIns="0" rtlCol="0" anchor="t"/>
+          <a:lstStyle/>
+          <a:p>
+            <a:pPr algn="l" indent="0" marL="0">
+              <a:lnSpc>
+                <a:spcPts val="1820"/>
+              </a:lnSpc>
+              <a:spcBef>
+                <a:spcPts val="300"/>
+              </a:spcBef>
+              <a:spcAft>
+                <a:spcPts val="300"/>
+              </a:spcAft>
+              <a:buNone/>
+            </a:pPr>
+            <a:r>
+              <a:rPr lang="en-US" sz="1300" dirty="0">
+                <a:solidFill>
+                  <a:srgbClr val="1C2833"/>
+                </a:solidFill>
+                <a:latin typeface="Georgia" pitchFamily="34" charset="0"/>
+                <a:ea typeface="Georgia" pitchFamily="34" charset="-122"/>
+                <a:cs typeface="Georgia" pitchFamily="34" charset="-120"/>
+              </a:rPr>
+              <a:t>Both are </a:t>
+            </a:r>
+            <a:pPr algn="l" indent="0" marL="0">
+              <a:lnSpc>
+                <a:spcPts val="1820"/>
+              </a:lnSpc>
+              <a:spcBef>
+                <a:spcPts val="300"/>
+              </a:spcBef>
+              <a:spcAft>
+                <a:spcPts val="300"/>
+              </a:spcAft>
+              <a:buNone/>
+            </a:pPr>
+            <a:r>
+              <a:rPr lang="en-US" sz="1300" i="1" dirty="0">
+                <a:solidFill>
+                  <a:srgbClr val="1C2833"/>
+                </a:solidFill>
+                <a:latin typeface="Georgia" pitchFamily="34" charset="0"/>
+                <a:ea typeface="Georgia" pitchFamily="34" charset="-122"/>
+                <a:cs typeface="Georgia" pitchFamily="34" charset="-120"/>
+              </a:rPr>
+              <a:t>constraint-satisfaction</a:t>
+            </a:r>
+            <a:pPr algn="l" indent="0" marL="0">
+              <a:lnSpc>
+                <a:spcPts val="1820"/>
+              </a:lnSpc>
+              <a:spcBef>
+                <a:spcPts val="300"/>
+              </a:spcBef>
+              <a:spcAft>
+                <a:spcPts val="300"/>
+              </a:spcAft>
+              <a:buNone/>
+            </a:pPr>
+            <a:r>
+              <a:rPr lang="en-US" sz="1300" dirty="0">
+                <a:solidFill>
+                  <a:srgbClr val="1C2833"/>
+                </a:solidFill>
+                <a:latin typeface="Georgia" pitchFamily="34" charset="0"/>
+                <a:ea typeface="Georgia" pitchFamily="34" charset="-122"/>
+                <a:cs typeface="Georgia" pitchFamily="34" charset="-120"/>
+              </a:rPr>
+              <a:t> problems. Different constraints — different puzzles. Sudoku appeared in modern form in the 1970s–80s (popularised in Japan from 1986). Magic squares are at least 2500 years old (Lo Shu).</a:t>
+            </a:r>
+            <a:endParaRPr lang="en-US" sz="1300" dirty="0"/>
+          </a:p>
+        </p:txBody>
+      </p:sp>
+      <p:sp>
+        <p:nvSpPr>
+          <p:cNvPr id="9" name="Text 7"/>
+          <p:cNvSpPr/>
+          <p:nvPr/>
+        </p:nvSpPr>
+        <p:spPr>
+          <a:xfrm>
+            <a:off x="406301" y="4434929"/>
+            <a:ext cx="8498026" cy="213271"/>
+          </a:xfrm>
+          <a:prstGeom prst="rect">
+            <a:avLst/>
+          </a:prstGeom>
+          <a:noFill/>
+          <a:ln/>
+        </p:spPr>
+        <p:txBody>
+          <a:bodyPr wrap="square" lIns="0" tIns="0" rIns="0" bIns="0" rtlCol="0" anchor="t"/>
+          <a:lstStyle/>
+          <a:p>
             <a:pPr algn="l" indent="0" marL="0">
               <a:lnSpc>
                 <a:spcPts val="1680"/>
@@ -3310,6 +4365,930 @@
               <a:buNone/>
             </a:pPr>
             <a:r>
+              <a:rPr lang="en-US" sz="1200" dirty="0">
+                <a:solidFill>
+                  <a:srgbClr val="1C2833"/>
+                </a:solidFill>
+                <a:latin typeface="Arial" pitchFamily="34" charset="0"/>
+                <a:ea typeface="Arial" pitchFamily="34" charset="-122"/>
+                <a:cs typeface="Arial" pitchFamily="34" charset="-120"/>
+              </a:rPr>
+              <a:t>Middle ·  · IKS Curriculum</a:t>
+            </a:r>
+            <a:endParaRPr lang="en-US" sz="1200" dirty="0"/>
+          </a:p>
+        </p:txBody>
+      </p:sp>
+    </p:spTree>
+  </p:cSld>
+  <p:clrMapOvr>
+    <a:masterClrMapping/>
+  </p:clrMapOvr>
+</p:sld>
+</file>
+
+<file path=ppt/slides/slide15.xml><?xml version="1.0" encoding="utf-8"?>
+<p:sld xmlns:a="http://schemas.openxmlformats.org/drawingml/2006/main" xmlns:r="http://schemas.openxmlformats.org/officeDocument/2006/relationships" xmlns:p="http://schemas.openxmlformats.org/presentationml/2006/main">
+  <p:cSld name="Slide 15">
+    <p:bg>
+      <p:bgPr>
+        <a:solidFill>
+          <a:srgbClr val="FFFFFF"/>
+        </a:solidFill>
+      </p:bgPr>
+    </p:bg>
+    <p:spTree>
+      <p:nvGrpSpPr>
+        <p:cNvPr id="1" name=""/>
+        <p:cNvGrpSpPr/>
+        <p:nvPr/>
+      </p:nvGrpSpPr>
+      <p:grpSpPr>
+        <a:xfrm>
+          <a:off x="0" y="0"/>
+          <a:ext cx="0" cy="0"/>
+          <a:chOff x="0" y="0"/>
+          <a:chExt cx="0" cy="0"/>
+        </a:xfrm>
+      </p:grpSpPr>
+      <p:sp>
+        <p:nvSpPr>
+          <p:cNvPr id="2" name="Text 0"/>
+          <p:cNvSpPr/>
+          <p:nvPr/>
+        </p:nvSpPr>
+        <p:spPr>
+          <a:xfrm>
+            <a:off x="0" y="0"/>
+            <a:ext cx="9144000" cy="101501"/>
+          </a:xfrm>
+          <a:prstGeom prst="rect">
+            <a:avLst/>
+          </a:prstGeom>
+          <a:solidFill>
+            <a:srgbClr val="277884"/>
+          </a:solidFill>
+          <a:ln/>
+        </p:spPr>
+        <p:txBody>
+          <a:bodyPr wrap="square" rtlCol="0" anchor="ctr"/>
+          <a:lstStyle/>
+          <a:p>
+            <a:pPr indent="0" marL="0">
+              <a:buNone/>
+            </a:pPr>
+            <a:endParaRPr lang="en-US" dirty="0"/>
+          </a:p>
+        </p:txBody>
+      </p:sp>
+      <p:sp>
+        <p:nvSpPr>
+          <p:cNvPr id="3" name="Text 1"/>
+          <p:cNvSpPr/>
+          <p:nvPr/>
+        </p:nvSpPr>
+        <p:spPr>
+          <a:xfrm>
+            <a:off x="406301" y="457051"/>
+            <a:ext cx="8498026" cy="274290"/>
+          </a:xfrm>
+          <a:prstGeom prst="rect">
+            <a:avLst/>
+          </a:prstGeom>
+          <a:noFill/>
+          <a:ln/>
+        </p:spPr>
+        <p:txBody>
+          <a:bodyPr wrap="square" lIns="0" tIns="0" rIns="0" bIns="0" rtlCol="0" anchor="t"/>
+          <a:lstStyle/>
+          <a:p>
+            <a:pPr algn="l" indent="0" marL="0">
+              <a:lnSpc>
+                <a:spcPts val="2160"/>
+              </a:lnSpc>
+              <a:spcBef>
+                <a:spcPts val="600"/>
+              </a:spcBef>
+              <a:spcAft>
+                <a:spcPts val="800"/>
+              </a:spcAft>
+              <a:buNone/>
+            </a:pPr>
+            <a:r>
+              <a:rPr lang="en-US" sz="1800" b="1" dirty="0">
+                <a:solidFill>
+                  <a:srgbClr val="FE4447"/>
+                </a:solidFill>
+                <a:latin typeface="Georgia" pitchFamily="34" charset="0"/>
+                <a:ea typeface="Georgia" pitchFamily="34" charset="-122"/>
+                <a:cs typeface="Georgia" pitchFamily="34" charset="-120"/>
+              </a:rPr>
+              <a:t>Homework</a:t>
+            </a:r>
+            <a:endParaRPr lang="en-US" sz="1800" dirty="0"/>
+          </a:p>
+        </p:txBody>
+      </p:sp>
+      <p:sp>
+        <p:nvSpPr>
+          <p:cNvPr id="4" name="Text 2"/>
+          <p:cNvSpPr/>
+          <p:nvPr/>
+        </p:nvSpPr>
+        <p:spPr>
+          <a:xfrm>
+            <a:off x="634901" y="883593"/>
+            <a:ext cx="8102798" cy="525661"/>
+          </a:xfrm>
+          <a:prstGeom prst="rect">
+            <a:avLst/>
+          </a:prstGeom>
+          <a:noFill/>
+          <a:ln/>
+        </p:spPr>
+        <p:txBody>
+          <a:bodyPr wrap="square" lIns="0" tIns="0" rIns="0" bIns="0" rtlCol="0" anchor="t"/>
+          <a:lstStyle/>
+          <a:p>
+            <a:pPr algn="l" marL="342900" indent="-342900">
+              <a:lnSpc>
+                <a:spcPts val="1620"/>
+              </a:lnSpc>
+              <a:spcAft>
+                <a:spcPts val="300"/>
+              </a:spcAft>
+              <a:buSzPct val="100000"/>
+              <a:buChar char="•"/>
+            </a:pPr>
+            <a:r>
+              <a:rPr lang="en-US" sz="1200" dirty="0">
+                <a:solidFill>
+                  <a:srgbClr val="1C2833"/>
+                </a:solidFill>
+                <a:latin typeface="Arial" pitchFamily="34" charset="0"/>
+                <a:ea typeface="Arial" pitchFamily="34" charset="-122"/>
+                <a:cs typeface="Arial" pitchFamily="34" charset="-120"/>
+              </a:rPr>
+              <a:t>Finish anything not finished in class. Tomorrow is the share, not the start.</a:t>
+            </a:r>
+            <a:endParaRPr lang="en-US" sz="1200" dirty="0"/>
+          </a:p>
+          <a:p>
+            <a:pPr algn="l" marL="342900" indent="-342900">
+              <a:lnSpc>
+                <a:spcPts val="1620"/>
+              </a:lnSpc>
+              <a:spcAft>
+                <a:spcPts val="300"/>
+              </a:spcAft>
+              <a:buSzPct val="100000"/>
+              <a:buChar char="•"/>
+            </a:pPr>
+            <a:r>
+              <a:rPr lang="en-US" sz="1200" dirty="0">
+                <a:solidFill>
+                  <a:srgbClr val="1C2833"/>
+                </a:solidFill>
+                <a:latin typeface="Arial" pitchFamily="34" charset="0"/>
+                <a:ea typeface="Arial" pitchFamily="34" charset="-122"/>
+                <a:cs typeface="Arial" pitchFamily="34" charset="-120"/>
+              </a:rPr>
+              <a:t>Time yourself: how fast can you construct a 5×5 magic square now, versus on Day 5?</a:t>
+            </a:r>
+            <a:endParaRPr lang="en-US" sz="1200" dirty="0"/>
+          </a:p>
+        </p:txBody>
+      </p:sp>
+      <p:sp>
+        <p:nvSpPr>
+          <p:cNvPr id="5" name="Text 3"/>
+          <p:cNvSpPr/>
+          <p:nvPr/>
+        </p:nvSpPr>
+        <p:spPr>
+          <a:xfrm>
+            <a:off x="406301" y="4434929"/>
+            <a:ext cx="8498026" cy="213271"/>
+          </a:xfrm>
+          <a:prstGeom prst="rect">
+            <a:avLst/>
+          </a:prstGeom>
+          <a:noFill/>
+          <a:ln/>
+        </p:spPr>
+        <p:txBody>
+          <a:bodyPr wrap="square" lIns="0" tIns="0" rIns="0" bIns="0" rtlCol="0" anchor="t"/>
+          <a:lstStyle/>
+          <a:p>
+            <a:pPr algn="l" indent="0" marL="0">
+              <a:lnSpc>
+                <a:spcPts val="1680"/>
+              </a:lnSpc>
+              <a:spcBef>
+                <a:spcPts val="300"/>
+              </a:spcBef>
+              <a:spcAft>
+                <a:spcPts val="300"/>
+              </a:spcAft>
+              <a:buNone/>
+            </a:pPr>
+            <a:r>
+              <a:rPr lang="en-US" sz="1200" dirty="0">
+                <a:solidFill>
+                  <a:srgbClr val="1C2833"/>
+                </a:solidFill>
+                <a:latin typeface="Arial" pitchFamily="34" charset="0"/>
+                <a:ea typeface="Arial" pitchFamily="34" charset="-122"/>
+                <a:cs typeface="Arial" pitchFamily="34" charset="-120"/>
+              </a:rPr>
+              <a:t>Middle ·  · IKS Curriculum</a:t>
+            </a:r>
+            <a:endParaRPr lang="en-US" sz="1200" dirty="0"/>
+          </a:p>
+        </p:txBody>
+      </p:sp>
+    </p:spTree>
+  </p:cSld>
+  <p:clrMapOvr>
+    <a:masterClrMapping/>
+  </p:clrMapOvr>
+</p:sld>
+</file>
+
+<file path=ppt/slides/slide16.xml><?xml version="1.0" encoding="utf-8"?>
+<p:sld xmlns:a="http://schemas.openxmlformats.org/drawingml/2006/main" xmlns:r="http://schemas.openxmlformats.org/officeDocument/2006/relationships" xmlns:p="http://schemas.openxmlformats.org/presentationml/2006/main">
+  <p:cSld name="Slide 16">
+    <p:bg>
+      <p:bgPr>
+        <a:solidFill>
+          <a:srgbClr val="FFFFFF"/>
+        </a:solidFill>
+      </p:bgPr>
+    </p:bg>
+    <p:spTree>
+      <p:nvGrpSpPr>
+        <p:cNvPr id="1" name=""/>
+        <p:cNvGrpSpPr/>
+        <p:nvPr/>
+      </p:nvGrpSpPr>
+      <p:grpSpPr>
+        <a:xfrm>
+          <a:off x="0" y="0"/>
+          <a:ext cx="0" cy="0"/>
+          <a:chOff x="0" y="0"/>
+          <a:chExt cx="0" cy="0"/>
+        </a:xfrm>
+      </p:grpSpPr>
+      <p:sp>
+        <p:nvSpPr>
+          <p:cNvPr id="2" name="Text 0"/>
+          <p:cNvSpPr/>
+          <p:nvPr/>
+        </p:nvSpPr>
+        <p:spPr>
+          <a:xfrm>
+            <a:off x="0" y="0"/>
+            <a:ext cx="9144000" cy="101501"/>
+          </a:xfrm>
+          <a:prstGeom prst="rect">
+            <a:avLst/>
+          </a:prstGeom>
+          <a:solidFill>
+            <a:srgbClr val="277884"/>
+          </a:solidFill>
+          <a:ln/>
+        </p:spPr>
+        <p:txBody>
+          <a:bodyPr wrap="square" rtlCol="0" anchor="ctr"/>
+          <a:lstStyle/>
+          <a:p>
+            <a:pPr indent="0" marL="0">
+              <a:buNone/>
+            </a:pPr>
+            <a:endParaRPr lang="en-US" dirty="0"/>
+          </a:p>
+        </p:txBody>
+      </p:sp>
+      <p:sp>
+        <p:nvSpPr>
+          <p:cNvPr id="3" name="Text 1"/>
+          <p:cNvSpPr/>
+          <p:nvPr/>
+        </p:nvSpPr>
+        <p:spPr>
+          <a:xfrm>
+            <a:off x="406301" y="457051"/>
+            <a:ext cx="8498026" cy="274290"/>
+          </a:xfrm>
+          <a:prstGeom prst="rect">
+            <a:avLst/>
+          </a:prstGeom>
+          <a:noFill/>
+          <a:ln/>
+        </p:spPr>
+        <p:txBody>
+          <a:bodyPr wrap="square" lIns="0" tIns="0" rIns="0" bIns="0" rtlCol="0" anchor="t"/>
+          <a:lstStyle/>
+          <a:p>
+            <a:pPr algn="l" indent="0" marL="0">
+              <a:lnSpc>
+                <a:spcPts val="2160"/>
+              </a:lnSpc>
+              <a:spcBef>
+                <a:spcPts val="600"/>
+              </a:spcBef>
+              <a:spcAft>
+                <a:spcPts val="800"/>
+              </a:spcAft>
+              <a:buNone/>
+            </a:pPr>
+            <a:r>
+              <a:rPr lang="en-US" sz="1800" b="1" dirty="0">
+                <a:solidFill>
+                  <a:srgbClr val="FE4447"/>
+                </a:solidFill>
+                <a:latin typeface="Georgia" pitchFamily="34" charset="0"/>
+                <a:ea typeface="Georgia" pitchFamily="34" charset="-122"/>
+                <a:cs typeface="Georgia" pitchFamily="34" charset="-120"/>
+              </a:rPr>
+              <a:t>Differentiation</a:t>
+            </a:r>
+            <a:endParaRPr lang="en-US" sz="1800" dirty="0"/>
+          </a:p>
+        </p:txBody>
+      </p:sp>
+      <p:sp>
+        <p:nvSpPr>
+          <p:cNvPr id="4" name="Text 2"/>
+          <p:cNvSpPr/>
+          <p:nvPr/>
+        </p:nvSpPr>
+        <p:spPr>
+          <a:xfrm>
+            <a:off x="634901" y="883593"/>
+            <a:ext cx="8102798" cy="937022"/>
+          </a:xfrm>
+          <a:prstGeom prst="rect">
+            <a:avLst/>
+          </a:prstGeom>
+          <a:noFill/>
+          <a:ln/>
+        </p:spPr>
+        <p:txBody>
+          <a:bodyPr wrap="square" lIns="0" tIns="0" rIns="0" bIns="0" rtlCol="0" anchor="t"/>
+          <a:lstStyle/>
+          <a:p>
+            <a:pPr algn="l" marL="342900" indent="-342900">
+              <a:lnSpc>
+                <a:spcPts val="1620"/>
+              </a:lnSpc>
+              <a:spcAft>
+                <a:spcPts val="300"/>
+              </a:spcAft>
+              <a:buSzPct val="100000"/>
+              <a:buChar char="•"/>
+            </a:pPr>
+            <a:r>
+              <a:rPr lang="en-US" sz="1200" b="1" dirty="0">
+                <a:solidFill>
+                  <a:srgbClr val="1C2833"/>
+                </a:solidFill>
+                <a:latin typeface="Arial" pitchFamily="34" charset="0"/>
+                <a:ea typeface="Arial" pitchFamily="34" charset="-122"/>
+                <a:cs typeface="Arial" pitchFamily="34" charset="-120"/>
+              </a:rPr>
+              <a:t>One tier up:</a:t>
+            </a:r>
+            <a:pPr algn="l" indent="0" marL="0">
+              <a:lnSpc>
+                <a:spcPts val="1620"/>
+              </a:lnSpc>
+              <a:spcAft>
+                <a:spcPts val="300"/>
+              </a:spcAft>
+              <a:buNone/>
+            </a:pPr>
+            <a:r>
+              <a:rPr lang="en-US" sz="1200" dirty="0">
+                <a:solidFill>
+                  <a:srgbClr val="1C2833"/>
+                </a:solidFill>
+                <a:latin typeface="Arial" pitchFamily="34" charset="0"/>
+                <a:ea typeface="Arial" pitchFamily="34" charset="-122"/>
+                <a:cs typeface="Arial" pitchFamily="34" charset="-120"/>
+              </a:rPr>
+              <a:t> Find or construct a 9×9 grid that is both a Sudoku AND a magic square (every row/column/3×3 block sums to 45). Hint: rows and columns of a Sudoku already sum to 45. You only need to also make every 3×3 block sum to 45.</a:t>
+            </a:r>
+            <a:endParaRPr lang="en-US" sz="1200" dirty="0"/>
+          </a:p>
+          <a:p>
+            <a:pPr algn="l" marL="342900" indent="-342900">
+              <a:lnSpc>
+                <a:spcPts val="1620"/>
+              </a:lnSpc>
+              <a:spcAft>
+                <a:spcPts val="300"/>
+              </a:spcAft>
+              <a:buSzPct val="100000"/>
+              <a:buChar char="•"/>
+            </a:pPr>
+            <a:r>
+              <a:rPr lang="en-US" sz="1200" b="1" dirty="0">
+                <a:solidFill>
+                  <a:srgbClr val="1C2833"/>
+                </a:solidFill>
+                <a:latin typeface="Arial" pitchFamily="34" charset="0"/>
+                <a:ea typeface="Arial" pitchFamily="34" charset="-122"/>
+                <a:cs typeface="Arial" pitchFamily="34" charset="-120"/>
+              </a:rPr>
+              <a:t>One tier down:</a:t>
+            </a:r>
+            <a:pPr algn="l" indent="0" marL="0">
+              <a:lnSpc>
+                <a:spcPts val="1620"/>
+              </a:lnSpc>
+              <a:spcAft>
+                <a:spcPts val="300"/>
+              </a:spcAft>
+              <a:buNone/>
+            </a:pPr>
+            <a:r>
+              <a:rPr lang="en-US" sz="1200" dirty="0">
+                <a:solidFill>
+                  <a:srgbClr val="1C2833"/>
+                </a:solidFill>
+                <a:latin typeface="Arial" pitchFamily="34" charset="0"/>
+                <a:ea typeface="Arial" pitchFamily="34" charset="-122"/>
+                <a:cs typeface="Arial" pitchFamily="34" charset="-120"/>
+              </a:rPr>
+              <a:t> Use the class time to construct one more 5×5 magic square as practice for the summative. Speed is not the goal; correctness is.</a:t>
+            </a:r>
+            <a:endParaRPr lang="en-US" sz="1200" dirty="0"/>
+          </a:p>
+        </p:txBody>
+      </p:sp>
+      <p:sp>
+        <p:nvSpPr>
+          <p:cNvPr id="5" name="Text 3"/>
+          <p:cNvSpPr/>
+          <p:nvPr/>
+        </p:nvSpPr>
+        <p:spPr>
+          <a:xfrm>
+            <a:off x="406301" y="4434929"/>
+            <a:ext cx="8498026" cy="213271"/>
+          </a:xfrm>
+          <a:prstGeom prst="rect">
+            <a:avLst/>
+          </a:prstGeom>
+          <a:noFill/>
+          <a:ln/>
+        </p:spPr>
+        <p:txBody>
+          <a:bodyPr wrap="square" lIns="0" tIns="0" rIns="0" bIns="0" rtlCol="0" anchor="t"/>
+          <a:lstStyle/>
+          <a:p>
+            <a:pPr algn="l" indent="0" marL="0">
+              <a:lnSpc>
+                <a:spcPts val="1680"/>
+              </a:lnSpc>
+              <a:spcBef>
+                <a:spcPts val="300"/>
+              </a:spcBef>
+              <a:spcAft>
+                <a:spcPts val="300"/>
+              </a:spcAft>
+              <a:buNone/>
+            </a:pPr>
+            <a:r>
+              <a:rPr lang="en-US" sz="1200" dirty="0">
+                <a:solidFill>
+                  <a:srgbClr val="1C2833"/>
+                </a:solidFill>
+                <a:latin typeface="Arial" pitchFamily="34" charset="0"/>
+                <a:ea typeface="Arial" pitchFamily="34" charset="-122"/>
+                <a:cs typeface="Arial" pitchFamily="34" charset="-120"/>
+              </a:rPr>
+              <a:t>Middle ·  · IKS Curriculum</a:t>
+            </a:r>
+            <a:endParaRPr lang="en-US" sz="1200" dirty="0"/>
+          </a:p>
+        </p:txBody>
+      </p:sp>
+    </p:spTree>
+  </p:cSld>
+  <p:clrMapOvr>
+    <a:masterClrMapping/>
+  </p:clrMapOvr>
+</p:sld>
+</file>
+
+<file path=ppt/slides/slide17.xml><?xml version="1.0" encoding="utf-8"?>
+<p:sld xmlns:a="http://schemas.openxmlformats.org/drawingml/2006/main" xmlns:r="http://schemas.openxmlformats.org/officeDocument/2006/relationships" xmlns:p="http://schemas.openxmlformats.org/presentationml/2006/main">
+  <p:cSld name="Slide 17">
+    <p:bg>
+      <p:bgPr>
+        <a:solidFill>
+          <a:srgbClr val="FFFFFF"/>
+        </a:solidFill>
+      </p:bgPr>
+    </p:bg>
+    <p:spTree>
+      <p:nvGrpSpPr>
+        <p:cNvPr id="1" name=""/>
+        <p:cNvGrpSpPr/>
+        <p:nvPr/>
+      </p:nvGrpSpPr>
+      <p:grpSpPr>
+        <a:xfrm>
+          <a:off x="0" y="0"/>
+          <a:ext cx="0" cy="0"/>
+          <a:chOff x="0" y="0"/>
+          <a:chExt cx="0" cy="0"/>
+        </a:xfrm>
+      </p:grpSpPr>
+      <p:sp>
+        <p:nvSpPr>
+          <p:cNvPr id="2" name="Text 0"/>
+          <p:cNvSpPr/>
+          <p:nvPr/>
+        </p:nvSpPr>
+        <p:spPr>
+          <a:xfrm>
+            <a:off x="0" y="0"/>
+            <a:ext cx="9144000" cy="101501"/>
+          </a:xfrm>
+          <a:prstGeom prst="rect">
+            <a:avLst/>
+          </a:prstGeom>
+          <a:solidFill>
+            <a:srgbClr val="277884"/>
+          </a:solidFill>
+          <a:ln/>
+        </p:spPr>
+        <p:txBody>
+          <a:bodyPr wrap="square" rtlCol="0" anchor="ctr"/>
+          <a:lstStyle/>
+          <a:p>
+            <a:pPr indent="0" marL="0">
+              <a:buNone/>
+            </a:pPr>
+            <a:endParaRPr lang="en-US" dirty="0"/>
+          </a:p>
+        </p:txBody>
+      </p:sp>
+      <p:sp>
+        <p:nvSpPr>
+          <p:cNvPr id="3" name="Text 1"/>
+          <p:cNvSpPr/>
+          <p:nvPr/>
+        </p:nvSpPr>
+        <p:spPr>
+          <a:xfrm>
+            <a:off x="406301" y="457051"/>
+            <a:ext cx="8498026" cy="274290"/>
+          </a:xfrm>
+          <a:prstGeom prst="rect">
+            <a:avLst/>
+          </a:prstGeom>
+          <a:noFill/>
+          <a:ln/>
+        </p:spPr>
+        <p:txBody>
+          <a:bodyPr wrap="square" lIns="0" tIns="0" rIns="0" bIns="0" rtlCol="0" anchor="t"/>
+          <a:lstStyle/>
+          <a:p>
+            <a:pPr algn="l" indent="0" marL="0">
+              <a:lnSpc>
+                <a:spcPts val="2160"/>
+              </a:lnSpc>
+              <a:spcBef>
+                <a:spcPts val="600"/>
+              </a:spcBef>
+              <a:spcAft>
+                <a:spcPts val="800"/>
+              </a:spcAft>
+              <a:buNone/>
+            </a:pPr>
+            <a:r>
+              <a:rPr lang="en-US" sz="1800" b="1" dirty="0">
+                <a:solidFill>
+                  <a:srgbClr val="FE4447"/>
+                </a:solidFill>
+                <a:latin typeface="Georgia" pitchFamily="34" charset="0"/>
+                <a:ea typeface="Georgia" pitchFamily="34" charset="-122"/>
+                <a:cs typeface="Georgia" pitchFamily="34" charset="-120"/>
+              </a:rPr>
+              <a:t>Teacher notes</a:t>
+            </a:r>
+            <a:endParaRPr lang="en-US" sz="1800" dirty="0"/>
+          </a:p>
+        </p:txBody>
+      </p:sp>
+      <p:sp>
+        <p:nvSpPr>
+          <p:cNvPr id="4" name="Text 2"/>
+          <p:cNvSpPr/>
+          <p:nvPr/>
+        </p:nvSpPr>
+        <p:spPr>
+          <a:xfrm>
+            <a:off x="634901" y="883593"/>
+            <a:ext cx="8102798" cy="975122"/>
+          </a:xfrm>
+          <a:prstGeom prst="rect">
+            <a:avLst/>
+          </a:prstGeom>
+          <a:noFill/>
+          <a:ln/>
+        </p:spPr>
+        <p:txBody>
+          <a:bodyPr wrap="square" lIns="0" tIns="0" rIns="0" bIns="0" rtlCol="0" anchor="t"/>
+          <a:lstStyle/>
+          <a:p>
+            <a:pPr algn="l" marL="342900" indent="-342900">
+              <a:lnSpc>
+                <a:spcPts val="1620"/>
+              </a:lnSpc>
+              <a:spcAft>
+                <a:spcPts val="300"/>
+              </a:spcAft>
+              <a:buSzPct val="100000"/>
+              <a:buChar char="•"/>
+            </a:pPr>
+            <a:r>
+              <a:rPr lang="en-US" sz="1200" dirty="0">
+                <a:solidFill>
+                  <a:srgbClr val="1C2833"/>
+                </a:solidFill>
+                <a:latin typeface="Arial" pitchFamily="34" charset="0"/>
+                <a:ea typeface="Arial" pitchFamily="34" charset="-122"/>
+                <a:cs typeface="Arial" pitchFamily="34" charset="-120"/>
+              </a:rPr>
+              <a:t>The Sudoku discussion is short on purpose. The point is to draw a clean distinction, not to teach Sudoku.</a:t>
+            </a:r>
+            <a:endParaRPr lang="en-US" sz="1200" dirty="0"/>
+          </a:p>
+          <a:p>
+            <a:pPr algn="l" marL="342900" indent="-342900">
+              <a:lnSpc>
+                <a:spcPts val="1620"/>
+              </a:lnSpc>
+              <a:spcAft>
+                <a:spcPts val="300"/>
+              </a:spcAft>
+              <a:buSzPct val="100000"/>
+              <a:buChar char="•"/>
+            </a:pPr>
+            <a:r>
+              <a:rPr lang="en-US" sz="1200" dirty="0">
+                <a:solidFill>
+                  <a:srgbClr val="1C2833"/>
+                </a:solidFill>
+                <a:latin typeface="Arial" pitchFamily="34" charset="0"/>
+                <a:ea typeface="Arial" pitchFamily="34" charset="-122"/>
+                <a:cs typeface="Arial" pitchFamily="34" charset="-120"/>
+              </a:rPr>
+              <a:t>Spend the project-work time circulating. Most errors are caught at this stage.</a:t>
+            </a:r>
+            <a:endParaRPr lang="en-US" sz="1200" dirty="0"/>
+          </a:p>
+          <a:p>
+            <a:pPr algn="l" marL="342900" indent="-342900">
+              <a:lnSpc>
+                <a:spcPts val="1620"/>
+              </a:lnSpc>
+              <a:spcAft>
+                <a:spcPts val="300"/>
+              </a:spcAft>
+              <a:buSzPct val="100000"/>
+              <a:buChar char="•"/>
+            </a:pPr>
+            <a:r>
+              <a:rPr lang="en-US" sz="1200" dirty="0">
+                <a:solidFill>
+                  <a:srgbClr val="1C2833"/>
+                </a:solidFill>
+                <a:latin typeface="Arial" pitchFamily="34" charset="0"/>
+                <a:ea typeface="Arial" pitchFamily="34" charset="-122"/>
+                <a:cs typeface="Arial" pitchFamily="34" charset="-120"/>
+              </a:rPr>
+              <a:t>Some students will worry about the "design-your-own" requirement. Remind them: choosing the size, the starting number, and the presentation format are all design choices. They are not expected to invent a new algorithm.</a:t>
+            </a:r>
+            <a:endParaRPr lang="en-US" sz="1200" dirty="0"/>
+          </a:p>
+        </p:txBody>
+      </p:sp>
+      <p:sp>
+        <p:nvSpPr>
+          <p:cNvPr id="5" name="Text 3"/>
+          <p:cNvSpPr/>
+          <p:nvPr/>
+        </p:nvSpPr>
+        <p:spPr>
+          <a:xfrm>
+            <a:off x="406301" y="4434929"/>
+            <a:ext cx="8498026" cy="213271"/>
+          </a:xfrm>
+          <a:prstGeom prst="rect">
+            <a:avLst/>
+          </a:prstGeom>
+          <a:noFill/>
+          <a:ln/>
+        </p:spPr>
+        <p:txBody>
+          <a:bodyPr wrap="square" lIns="0" tIns="0" rIns="0" bIns="0" rtlCol="0" anchor="t"/>
+          <a:lstStyle/>
+          <a:p>
+            <a:pPr algn="l" indent="0" marL="0">
+              <a:lnSpc>
+                <a:spcPts val="1680"/>
+              </a:lnSpc>
+              <a:spcBef>
+                <a:spcPts val="300"/>
+              </a:spcBef>
+              <a:spcAft>
+                <a:spcPts val="300"/>
+              </a:spcAft>
+              <a:buNone/>
+            </a:pPr>
+            <a:r>
+              <a:rPr lang="en-US" sz="1200" dirty="0">
+                <a:solidFill>
+                  <a:srgbClr val="1C2833"/>
+                </a:solidFill>
+                <a:latin typeface="Arial" pitchFamily="34" charset="0"/>
+                <a:ea typeface="Arial" pitchFamily="34" charset="-122"/>
+                <a:cs typeface="Arial" pitchFamily="34" charset="-120"/>
+              </a:rPr>
+              <a:t>Middle ·  · IKS Curriculum</a:t>
+            </a:r>
+            <a:endParaRPr lang="en-US" sz="1200" dirty="0"/>
+          </a:p>
+        </p:txBody>
+      </p:sp>
+    </p:spTree>
+  </p:cSld>
+  <p:clrMapOvr>
+    <a:masterClrMapping/>
+  </p:clrMapOvr>
+</p:sld>
+</file>
+
+<file path=ppt/slides/slide18.xml><?xml version="1.0" encoding="utf-8"?>
+<p:sld xmlns:a="http://schemas.openxmlformats.org/drawingml/2006/main" xmlns:r="http://schemas.openxmlformats.org/officeDocument/2006/relationships" xmlns:p="http://schemas.openxmlformats.org/presentationml/2006/main">
+  <p:cSld name="Slide 18">
+    <p:bg>
+      <p:bgPr>
+        <a:solidFill>
+          <a:srgbClr val="FFFFFF"/>
+        </a:solidFill>
+      </p:bgPr>
+    </p:bg>
+    <p:spTree>
+      <p:nvGrpSpPr>
+        <p:cNvPr id="1" name=""/>
+        <p:cNvGrpSpPr/>
+        <p:nvPr/>
+      </p:nvGrpSpPr>
+      <p:grpSpPr>
+        <a:xfrm>
+          <a:off x="0" y="0"/>
+          <a:ext cx="0" cy="0"/>
+          <a:chOff x="0" y="0"/>
+          <a:chExt cx="0" cy="0"/>
+        </a:xfrm>
+      </p:grpSpPr>
+      <p:sp>
+        <p:nvSpPr>
+          <p:cNvPr id="2" name="Text 0"/>
+          <p:cNvSpPr/>
+          <p:nvPr/>
+        </p:nvSpPr>
+        <p:spPr>
+          <a:xfrm>
+            <a:off x="0" y="0"/>
+            <a:ext cx="9144000" cy="101501"/>
+          </a:xfrm>
+          <a:prstGeom prst="rect">
+            <a:avLst/>
+          </a:prstGeom>
+          <a:solidFill>
+            <a:srgbClr val="277884"/>
+          </a:solidFill>
+          <a:ln/>
+        </p:spPr>
+        <p:txBody>
+          <a:bodyPr wrap="square" rtlCol="0" anchor="ctr"/>
+          <a:lstStyle/>
+          <a:p>
+            <a:pPr indent="0" marL="0">
+              <a:buNone/>
+            </a:pPr>
+            <a:endParaRPr lang="en-US" dirty="0"/>
+          </a:p>
+        </p:txBody>
+      </p:sp>
+      <p:sp>
+        <p:nvSpPr>
+          <p:cNvPr id="3" name="Text 1"/>
+          <p:cNvSpPr/>
+          <p:nvPr/>
+        </p:nvSpPr>
+        <p:spPr>
+          <a:xfrm>
+            <a:off x="406301" y="457051"/>
+            <a:ext cx="8498026" cy="274290"/>
+          </a:xfrm>
+          <a:prstGeom prst="rect">
+            <a:avLst/>
+          </a:prstGeom>
+          <a:noFill/>
+          <a:ln/>
+        </p:spPr>
+        <p:txBody>
+          <a:bodyPr wrap="square" lIns="0" tIns="0" rIns="0" bIns="0" rtlCol="0" anchor="t"/>
+          <a:lstStyle/>
+          <a:p>
+            <a:pPr algn="l" indent="0" marL="0">
+              <a:lnSpc>
+                <a:spcPts val="2160"/>
+              </a:lnSpc>
+              <a:spcBef>
+                <a:spcPts val="600"/>
+              </a:spcBef>
+              <a:spcAft>
+                <a:spcPts val="800"/>
+              </a:spcAft>
+              <a:buNone/>
+            </a:pPr>
+            <a:r>
+              <a:rPr lang="en-US" sz="1800" b="1" dirty="0">
+                <a:solidFill>
+                  <a:srgbClr val="FE4447"/>
+                </a:solidFill>
+                <a:latin typeface="Georgia" pitchFamily="34" charset="0"/>
+                <a:ea typeface="Georgia" pitchFamily="34" charset="-122"/>
+                <a:cs typeface="Georgia" pitchFamily="34" charset="-120"/>
+              </a:rPr>
+              <a:t>Citation(s) used in this lesson</a:t>
+            </a:r>
+            <a:endParaRPr lang="en-US" sz="1800" dirty="0"/>
+          </a:p>
+        </p:txBody>
+      </p:sp>
+      <p:sp>
+        <p:nvSpPr>
+          <p:cNvPr id="4" name="Text 2"/>
+          <p:cNvSpPr/>
+          <p:nvPr/>
+        </p:nvSpPr>
+        <p:spPr>
+          <a:xfrm>
+            <a:off x="634901" y="883593"/>
+            <a:ext cx="8102798" cy="281880"/>
+          </a:xfrm>
+          <a:prstGeom prst="rect">
+            <a:avLst/>
+          </a:prstGeom>
+          <a:noFill/>
+          <a:ln/>
+        </p:spPr>
+        <p:txBody>
+          <a:bodyPr wrap="square" lIns="0" tIns="0" rIns="0" bIns="0" rtlCol="0" anchor="t"/>
+          <a:lstStyle/>
+          <a:p>
+            <a:pPr algn="l" marL="342900" indent="-342900">
+              <a:lnSpc>
+                <a:spcPts val="1620"/>
+              </a:lnSpc>
+              <a:spcAft>
+                <a:spcPts val="300"/>
+              </a:spcAft>
+              <a:buSzPct val="100000"/>
+              <a:buChar char="•"/>
+            </a:pPr>
+            <a:r>
+              <a:rPr lang="en-US" sz="1200" dirty="0">
+                <a:solidFill>
+                  <a:srgbClr val="1C2833"/>
+                </a:solidFill>
+                <a:latin typeface="Arial" pitchFamily="34" charset="0"/>
+                <a:ea typeface="Arial" pitchFamily="34" charset="-122"/>
+                <a:cs typeface="Arial" pitchFamily="34" charset="-120"/>
+              </a:rPr>
+              <a:t>Nārāyaṇa Paṇḍita, </a:t>
+            </a:r>
+            <a:pPr algn="l" indent="0" marL="0">
+              <a:lnSpc>
+                <a:spcPts val="1620"/>
+              </a:lnSpc>
+              <a:spcAft>
+                <a:spcPts val="300"/>
+              </a:spcAft>
+              <a:buNone/>
+            </a:pPr>
+            <a:r>
               <a:rPr lang="en-US" sz="1200" i="1" dirty="0">
                 <a:solidFill>
                   <a:srgbClr val="1C2833"/>
@@ -3322,11 +5301,8 @@
             </a:r>
             <a:pPr algn="l" indent="0" marL="0">
               <a:lnSpc>
-                <a:spcPts val="1680"/>
-              </a:lnSpc>
-              <a:spcBef>
-                <a:spcPts val="300"/>
-              </a:spcBef>
+                <a:spcPts val="1620"/>
+              </a:lnSpc>
               <a:spcAft>
                 <a:spcPts val="300"/>
               </a:spcAft>
@@ -3345,11 +5321,8 @@
             </a:r>
             <a:pPr algn="l" indent="0" marL="0">
               <a:lnSpc>
-                <a:spcPts val="1680"/>
-              </a:lnSpc>
-              <a:spcBef>
-                <a:spcPts val="300"/>
-              </a:spcBef>
+                <a:spcPts val="1620"/>
+              </a:lnSpc>
               <a:spcAft>
                 <a:spcPts val="300"/>
               </a:spcAft>
@@ -3368,11 +5341,8 @@
             </a:r>
             <a:pPr algn="l" indent="0" marL="0">
               <a:lnSpc>
-                <a:spcPts val="1680"/>
-              </a:lnSpc>
-              <a:spcBef>
-                <a:spcPts val="300"/>
-              </a:spcBef>
+                <a:spcPts val="1620"/>
+              </a:lnSpc>
               <a:spcAft>
                 <a:spcPts val="300"/>
               </a:spcAft>
@@ -3545,7 +5515,7 @@
                 <a:ea typeface="Georgia" pitchFamily="34" charset="-122"/>
                 <a:cs typeface="Georgia" pitchFamily="34" charset="-120"/>
               </a:rPr>
-              <a:t>Materials</a:t>
+              <a:t>Learning objective</a:t>
             </a:r>
             <a:endParaRPr lang="en-US" sz="1800" dirty="0"/>
           </a:p>
@@ -3560,7 +5530,7 @@
         <p:spPr>
           <a:xfrm>
             <a:off x="406301" y="870942"/>
-            <a:ext cx="8498026" cy="213271"/>
+            <a:ext cx="8498026" cy="426541"/>
           </a:xfrm>
           <a:prstGeom prst="rect">
             <a:avLst/>
@@ -3593,7 +5563,99 @@
                 <a:ea typeface="Arial" pitchFamily="34" charset="-122"/>
                 <a:cs typeface="Arial" pitchFamily="34" charset="-120"/>
               </a:rPr>
-              <a:t>– Sample 9×9 Sudoku puzzle (one per pair, easy difficulty) – Project materials (graph paper, markers, etc.)</a:t>
+              <a:t>By the end of this lesson, students will (a) distinguish a Sudoku puzzle from a magic square (Sudoku constrains </a:t>
+            </a:r>
+            <a:pPr algn="l" indent="0" marL="0">
+              <a:lnSpc>
+                <a:spcPts val="1680"/>
+              </a:lnSpc>
+              <a:spcBef>
+                <a:spcPts val="300"/>
+              </a:spcBef>
+              <a:spcAft>
+                <a:spcPts val="300"/>
+              </a:spcAft>
+              <a:buNone/>
+            </a:pPr>
+            <a:r>
+              <a:rPr lang="en-US" sz="1200" i="1" dirty="0">
+                <a:solidFill>
+                  <a:srgbClr val="1C2833"/>
+                </a:solidFill>
+                <a:latin typeface="Arial" pitchFamily="34" charset="0"/>
+                <a:ea typeface="Arial" pitchFamily="34" charset="-122"/>
+                <a:cs typeface="Arial" pitchFamily="34" charset="-120"/>
+              </a:rPr>
+              <a:t>placement</a:t>
+            </a:r>
+            <a:pPr algn="l" indent="0" marL="0">
+              <a:lnSpc>
+                <a:spcPts val="1680"/>
+              </a:lnSpc>
+              <a:spcBef>
+                <a:spcPts val="300"/>
+              </a:spcBef>
+              <a:spcAft>
+                <a:spcPts val="300"/>
+              </a:spcAft>
+              <a:buNone/>
+            </a:pPr>
+            <a:r>
+              <a:rPr lang="en-US" sz="1200" dirty="0">
+                <a:solidFill>
+                  <a:srgbClr val="1C2833"/>
+                </a:solidFill>
+                <a:latin typeface="Arial" pitchFamily="34" charset="0"/>
+                <a:ea typeface="Arial" pitchFamily="34" charset="-122"/>
+                <a:cs typeface="Arial" pitchFamily="34" charset="-120"/>
+              </a:rPr>
+              <a:t> but not </a:t>
+            </a:r>
+            <a:pPr algn="l" indent="0" marL="0">
+              <a:lnSpc>
+                <a:spcPts val="1680"/>
+              </a:lnSpc>
+              <a:spcBef>
+                <a:spcPts val="300"/>
+              </a:spcBef>
+              <a:spcAft>
+                <a:spcPts val="300"/>
+              </a:spcAft>
+              <a:buNone/>
+            </a:pPr>
+            <a:r>
+              <a:rPr lang="en-US" sz="1200" i="1" dirty="0">
+                <a:solidFill>
+                  <a:srgbClr val="1C2833"/>
+                </a:solidFill>
+                <a:latin typeface="Arial" pitchFamily="34" charset="0"/>
+                <a:ea typeface="Arial" pitchFamily="34" charset="-122"/>
+                <a:cs typeface="Arial" pitchFamily="34" charset="-120"/>
+              </a:rPr>
+              <a:t>sums</a:t>
+            </a:r>
+            <a:pPr algn="l" indent="0" marL="0">
+              <a:lnSpc>
+                <a:spcPts val="1680"/>
+              </a:lnSpc>
+              <a:spcBef>
+                <a:spcPts val="300"/>
+              </a:spcBef>
+              <a:spcAft>
+                <a:spcPts val="300"/>
+              </a:spcAft>
+              <a:buNone/>
+            </a:pPr>
+            <a:r>
+              <a:rPr lang="en-US" sz="1200" dirty="0">
+                <a:solidFill>
+                  <a:srgbClr val="1C2833"/>
+                </a:solidFill>
+                <a:latin typeface="Arial" pitchFamily="34" charset="0"/>
+                <a:ea typeface="Arial" pitchFamily="34" charset="-122"/>
+                <a:cs typeface="Arial" pitchFamily="34" charset="-120"/>
+              </a:rPr>
+              <a:t>), and (b) make substantial progress on their module project.</a:t>
             </a:r>
             <a:endParaRPr lang="en-US" sz="1200" dirty="0"/>
           </a:p>
@@ -3751,7 +5813,7 @@
                 <a:ea typeface="Georgia" pitchFamily="34" charset="-122"/>
                 <a:cs typeface="Georgia" pitchFamily="34" charset="-120"/>
               </a:rPr>
-              <a:t>Vocabulary introduced today</a:t>
+              <a:t>Materials</a:t>
             </a:r>
             <a:endParaRPr lang="en-US" sz="1800" dirty="0"/>
           </a:p>
@@ -3766,7 +5828,7 @@
         <p:spPr>
           <a:xfrm>
             <a:off x="634901" y="883593"/>
-            <a:ext cx="8102798" cy="937022"/>
+            <a:ext cx="8102798" cy="525661"/>
           </a:xfrm>
           <a:prstGeom prst="rect">
             <a:avLst/>
@@ -3789,26 +5851,6 @@
               <a:buChar char="•"/>
             </a:pPr>
             <a:r>
-              <a:rPr lang="en-US" sz="1200" i="1" dirty="0">
-                <a:solidFill>
-                  <a:srgbClr val="1C2833"/>
-                </a:solidFill>
-                <a:latin typeface="Arial" pitchFamily="34" charset="0"/>
-                <a:ea typeface="Arial" pitchFamily="34" charset="-122"/>
-                <a:cs typeface="Arial" pitchFamily="34" charset="-120"/>
-              </a:rPr>
-              <a:t>Sudoku</a:t>
-            </a:r>
-            <a:pPr algn="l" indent="0" marL="0">
-              <a:lnSpc>
-                <a:spcPts val="1620"/>
-              </a:lnSpc>
-              <a:spcAft>
-                <a:spcPts val="300"/>
-              </a:spcAft>
-              <a:buNone/>
-            </a:pPr>
-            <a:r>
               <a:rPr lang="en-US" sz="1200" dirty="0">
                 <a:solidFill>
                   <a:srgbClr val="1C2833"/>
@@ -3817,7 +5859,7 @@
                 <a:ea typeface="Arial" pitchFamily="34" charset="-122"/>
                 <a:cs typeface="Arial" pitchFamily="34" charset="-120"/>
               </a:rPr>
-              <a:t> — a 9×9 number-placement puzzle (Japanese name, from Japanese 数独). Standard rules: each row, each column, and each 3×3 block contains the digits 1–9 exactly once.</a:t>
+              <a:t>Sample 9×9 Sudoku puzzle (one per pair, easy difficulty)</a:t>
             </a:r>
             <a:endParaRPr lang="en-US" sz="1200" dirty="0"/>
           </a:p>
@@ -3833,26 +5875,6 @@
               <a:buChar char="•"/>
             </a:pPr>
             <a:r>
-              <a:rPr lang="en-US" sz="1200" i="1" dirty="0">
-                <a:solidFill>
-                  <a:srgbClr val="1C2833"/>
-                </a:solidFill>
-                <a:latin typeface="Arial" pitchFamily="34" charset="0"/>
-                <a:ea typeface="Arial" pitchFamily="34" charset="-122"/>
-                <a:cs typeface="Arial" pitchFamily="34" charset="-120"/>
-              </a:rPr>
-              <a:t>constraint satisfaction</a:t>
-            </a:r>
-            <a:pPr algn="l" indent="0" marL="0">
-              <a:lnSpc>
-                <a:spcPts val="1620"/>
-              </a:lnSpc>
-              <a:spcAft>
-                <a:spcPts val="300"/>
-              </a:spcAft>
-              <a:buNone/>
-            </a:pPr>
-            <a:r>
               <a:rPr lang="en-US" sz="1200" dirty="0">
                 <a:solidFill>
                   <a:srgbClr val="1C2833"/>
@@ -3861,7 +5883,7 @@
                 <a:ea typeface="Arial" pitchFamily="34" charset="-122"/>
                 <a:cs typeface="Arial" pitchFamily="34" charset="-120"/>
               </a:rPr>
-              <a:t> — a problem type where you must place objects in a structure so that all "constraints" (rules) are satisfied. Magic squares and Sudoku are both constraint-satisfaction problems.</a:t>
+              <a:t>Project materials (graph paper, markers, etc.)</a:t>
             </a:r>
             <a:endParaRPr lang="en-US" sz="1200" dirty="0"/>
           </a:p>
@@ -4019,7 +6041,7 @@
                 <a:ea typeface="Georgia" pitchFamily="34" charset="-122"/>
                 <a:cs typeface="Georgia" pitchFamily="34" charset="-120"/>
               </a:rPr>
-              <a:t>Lesson flow</a:t>
+              <a:t>Vocabulary introduced today</a:t>
             </a:r>
             <a:endParaRPr lang="en-US" sz="1800" dirty="0"/>
           </a:p>
@@ -4028,6 +6050,116 @@
       <p:sp>
         <p:nvSpPr>
           <p:cNvPr id="4" name="Text 2"/>
+          <p:cNvSpPr/>
+          <p:nvPr/>
+        </p:nvSpPr>
+        <p:spPr>
+          <a:xfrm>
+            <a:off x="634901" y="883593"/>
+            <a:ext cx="8102798" cy="937022"/>
+          </a:xfrm>
+          <a:prstGeom prst="rect">
+            <a:avLst/>
+          </a:prstGeom>
+          <a:noFill/>
+          <a:ln/>
+        </p:spPr>
+        <p:txBody>
+          <a:bodyPr wrap="square" lIns="0" tIns="0" rIns="0" bIns="0" rtlCol="0" anchor="t"/>
+          <a:lstStyle/>
+          <a:p>
+            <a:pPr algn="l" marL="342900" indent="-342900">
+              <a:lnSpc>
+                <a:spcPts val="1620"/>
+              </a:lnSpc>
+              <a:spcAft>
+                <a:spcPts val="300"/>
+              </a:spcAft>
+              <a:buSzPct val="100000"/>
+              <a:buChar char="•"/>
+            </a:pPr>
+            <a:r>
+              <a:rPr lang="en-US" sz="1200" i="1" dirty="0">
+                <a:solidFill>
+                  <a:srgbClr val="1C2833"/>
+                </a:solidFill>
+                <a:latin typeface="Arial" pitchFamily="34" charset="0"/>
+                <a:ea typeface="Arial" pitchFamily="34" charset="-122"/>
+                <a:cs typeface="Arial" pitchFamily="34" charset="-120"/>
+              </a:rPr>
+              <a:t>Sudoku</a:t>
+            </a:r>
+            <a:pPr algn="l" indent="0" marL="0">
+              <a:lnSpc>
+                <a:spcPts val="1620"/>
+              </a:lnSpc>
+              <a:spcAft>
+                <a:spcPts val="300"/>
+              </a:spcAft>
+              <a:buNone/>
+            </a:pPr>
+            <a:r>
+              <a:rPr lang="en-US" sz="1200" dirty="0">
+                <a:solidFill>
+                  <a:srgbClr val="1C2833"/>
+                </a:solidFill>
+                <a:latin typeface="Arial" pitchFamily="34" charset="0"/>
+                <a:ea typeface="Arial" pitchFamily="34" charset="-122"/>
+                <a:cs typeface="Arial" pitchFamily="34" charset="-120"/>
+              </a:rPr>
+              <a:t> — a 9×9 number-placement puzzle (Japanese name, from Japanese 数独). Standard rules: each row, each column, and each 3×3 block contains the digits 1–9 exactly once.</a:t>
+            </a:r>
+            <a:endParaRPr lang="en-US" sz="1200" dirty="0"/>
+          </a:p>
+          <a:p>
+            <a:pPr algn="l" marL="342900" indent="-342900">
+              <a:lnSpc>
+                <a:spcPts val="1620"/>
+              </a:lnSpc>
+              <a:spcAft>
+                <a:spcPts val="300"/>
+              </a:spcAft>
+              <a:buSzPct val="100000"/>
+              <a:buChar char="•"/>
+            </a:pPr>
+            <a:r>
+              <a:rPr lang="en-US" sz="1200" i="1" dirty="0">
+                <a:solidFill>
+                  <a:srgbClr val="1C2833"/>
+                </a:solidFill>
+                <a:latin typeface="Arial" pitchFamily="34" charset="0"/>
+                <a:ea typeface="Arial" pitchFamily="34" charset="-122"/>
+                <a:cs typeface="Arial" pitchFamily="34" charset="-120"/>
+              </a:rPr>
+              <a:t>constraint satisfaction</a:t>
+            </a:r>
+            <a:pPr algn="l" indent="0" marL="0">
+              <a:lnSpc>
+                <a:spcPts val="1620"/>
+              </a:lnSpc>
+              <a:spcAft>
+                <a:spcPts val="300"/>
+              </a:spcAft>
+              <a:buNone/>
+            </a:pPr>
+            <a:r>
+              <a:rPr lang="en-US" sz="1200" dirty="0">
+                <a:solidFill>
+                  <a:srgbClr val="1C2833"/>
+                </a:solidFill>
+                <a:latin typeface="Arial" pitchFamily="34" charset="0"/>
+                <a:ea typeface="Arial" pitchFamily="34" charset="-122"/>
+                <a:cs typeface="Arial" pitchFamily="34" charset="-120"/>
+              </a:rPr>
+              <a:t> — a problem type where you must place objects in a structure so that all "constraints" (rules) are satisfied. Magic squares and Sudoku are both constraint-satisfaction problems.</a:t>
+            </a:r>
+            <a:endParaRPr lang="en-US" sz="1200" dirty="0"/>
+          </a:p>
+        </p:txBody>
+      </p:sp>
+      <p:sp>
+        <p:nvSpPr>
+          <p:cNvPr id="5" name="Text 3"/>
           <p:cNvSpPr/>
           <p:nvPr/>
         </p:nvSpPr>
@@ -4177,7 +6309,7 @@
                 <a:ea typeface="Georgia" pitchFamily="34" charset="-122"/>
                 <a:cs typeface="Georgia" pitchFamily="34" charset="-120"/>
               </a:rPr>
-              <a:t>Warm-up (5 min)</a:t>
+              <a:t>Lesson flow</a:t>
             </a:r>
             <a:endParaRPr lang="en-US" sz="1800" dirty="0"/>
           </a:p>
@@ -4186,120 +6318,6 @@
       <p:sp>
         <p:nvSpPr>
           <p:cNvPr id="4" name="Text 2"/>
-          <p:cNvSpPr/>
-          <p:nvPr/>
-        </p:nvSpPr>
-        <p:spPr>
-          <a:xfrm>
-            <a:off x="634901" y="883593"/>
-            <a:ext cx="8102798" cy="281880"/>
-          </a:xfrm>
-          <a:prstGeom prst="rect">
-            <a:avLst/>
-          </a:prstGeom>
-          <a:noFill/>
-          <a:ln/>
-        </p:spPr>
-        <p:txBody>
-          <a:bodyPr wrap="square" lIns="0" tIns="0" rIns="0" bIns="0" rtlCol="0" anchor="t"/>
-          <a:lstStyle/>
-          <a:p>
-            <a:pPr algn="l" marL="342900" indent="-342900">
-              <a:lnSpc>
-                <a:spcPts val="1620"/>
-              </a:lnSpc>
-              <a:spcAft>
-                <a:spcPts val="300"/>
-              </a:spcAft>
-              <a:buSzPct val="100000"/>
-              <a:buChar char="•"/>
-            </a:pPr>
-            <a:r>
-              <a:rPr lang="en-US" sz="1200" i="1" dirty="0">
-                <a:solidFill>
-                  <a:srgbClr val="1C2833"/>
-                </a:solidFill>
-                <a:latin typeface="Arial" pitchFamily="34" charset="0"/>
-                <a:ea typeface="Arial" pitchFamily="34" charset="-122"/>
-                <a:cs typeface="Arial" pitchFamily="34" charset="-120"/>
-              </a:rPr>
-              <a:t>"Many of you have seen Sudoku. Is it a magic square?"</a:t>
-            </a:r>
-            <a:pPr algn="l" indent="0" marL="0">
-              <a:lnSpc>
-                <a:spcPts val="1620"/>
-              </a:lnSpc>
-              <a:spcAft>
-                <a:spcPts val="300"/>
-              </a:spcAft>
-              <a:buNone/>
-            </a:pPr>
-            <a:r>
-              <a:rPr lang="en-US" sz="1200" dirty="0">
-                <a:solidFill>
-                  <a:srgbClr val="1C2833"/>
-                </a:solidFill>
-                <a:latin typeface="Arial" pitchFamily="34" charset="0"/>
-                <a:ea typeface="Arial" pitchFamily="34" charset="-122"/>
-                <a:cs typeface="Arial" pitchFamily="34" charset="-120"/>
-              </a:rPr>
-              <a:t> — take 3 student responses.</a:t>
-            </a:r>
-            <a:endParaRPr lang="en-US" sz="1200" dirty="0"/>
-          </a:p>
-        </p:txBody>
-      </p:sp>
-      <p:sp>
-        <p:nvSpPr>
-          <p:cNvPr id="5" name="Text 3"/>
-          <p:cNvSpPr/>
-          <p:nvPr/>
-        </p:nvSpPr>
-        <p:spPr>
-          <a:xfrm>
-            <a:off x="406301" y="1254323"/>
-            <a:ext cx="8498026" cy="213271"/>
-          </a:xfrm>
-          <a:prstGeom prst="rect">
-            <a:avLst/>
-          </a:prstGeom>
-          <a:noFill/>
-          <a:ln/>
-        </p:spPr>
-        <p:txBody>
-          <a:bodyPr wrap="square" lIns="0" tIns="0" rIns="0" bIns="0" rtlCol="0" anchor="t"/>
-          <a:lstStyle/>
-          <a:p>
-            <a:pPr algn="l" indent="0" marL="0">
-              <a:lnSpc>
-                <a:spcPts val="1680"/>
-              </a:lnSpc>
-              <a:spcBef>
-                <a:spcPts val="300"/>
-              </a:spcBef>
-              <a:spcAft>
-                <a:spcPts val="300"/>
-              </a:spcAft>
-              <a:buNone/>
-            </a:pPr>
-            <a:r>
-              <a:rPr lang="en-US" sz="1200" dirty="0">
-                <a:solidFill>
-                  <a:srgbClr val="1C2833"/>
-                </a:solidFill>
-                <a:latin typeface="Arial" pitchFamily="34" charset="0"/>
-                <a:ea typeface="Arial" pitchFamily="34" charset="-122"/>
-                <a:cs typeface="Arial" pitchFamily="34" charset="-120"/>
-              </a:rPr>
-              <a:t>– Hold the answer. Promise: "we'll settle this in 10 minutes."</a:t>
-            </a:r>
-            <a:endParaRPr lang="en-US" sz="1200" dirty="0"/>
-          </a:p>
-        </p:txBody>
-      </p:sp>
-      <p:sp>
-        <p:nvSpPr>
-          <p:cNvPr id="6" name="Text 4"/>
           <p:cNvSpPr/>
           <p:nvPr/>
         </p:nvSpPr>
@@ -4449,7 +6467,7 @@
                 <a:ea typeface="Georgia" pitchFamily="34" charset="-122"/>
                 <a:cs typeface="Georgia" pitchFamily="34" charset="-120"/>
               </a:rPr>
-              <a:t>Core (15 min)</a:t>
+              <a:t>Warm-up (5 min)</a:t>
             </a:r>
             <a:endParaRPr lang="en-US" sz="1800" dirty="0"/>
           </a:p>
@@ -4464,7 +6482,7 @@
         <p:spPr>
           <a:xfrm>
             <a:off x="634901" y="883593"/>
-            <a:ext cx="8102798" cy="281880"/>
+            <a:ext cx="8102798" cy="525661"/>
           </a:xfrm>
           <a:prstGeom prst="rect">
             <a:avLst/>
@@ -4487,15 +6505,15 @@
               <a:buChar char="•"/>
             </a:pPr>
             <a:r>
-              <a:rPr lang="en-US" sz="1200" b="1" dirty="0">
-                <a:solidFill>
-                  <a:srgbClr val="1C2833"/>
-                </a:solidFill>
-                <a:latin typeface="Arial" pitchFamily="34" charset="0"/>
-                <a:ea typeface="Arial" pitchFamily="34" charset="-122"/>
-                <a:cs typeface="Arial" pitchFamily="34" charset="-120"/>
-              </a:rPr>
-              <a:t>The rules side-by-side.</a:t>
+              <a:rPr lang="en-US" sz="1200" i="1" dirty="0">
+                <a:solidFill>
+                  <a:srgbClr val="1C2833"/>
+                </a:solidFill>
+                <a:latin typeface="Arial" pitchFamily="34" charset="0"/>
+                <a:ea typeface="Arial" pitchFamily="34" charset="-122"/>
+                <a:cs typeface="Arial" pitchFamily="34" charset="-120"/>
+              </a:rPr>
+              <a:t>"Many of you have seen Sudoku. Is it a magic square?"</a:t>
             </a:r>
             <a:pPr algn="l" indent="0" marL="0">
               <a:lnSpc>
@@ -4515,7 +6533,31 @@
                 <a:ea typeface="Arial" pitchFamily="34" charset="-122"/>
                 <a:cs typeface="Arial" pitchFamily="34" charset="-120"/>
               </a:rPr>
-              <a:t> Write on the board:</a:t>
+              <a:t> — take 3 student responses.</a:t>
+            </a:r>
+            <a:endParaRPr lang="en-US" sz="1200" dirty="0"/>
+          </a:p>
+          <a:p>
+            <a:pPr algn="l" marL="342900" indent="-342900">
+              <a:lnSpc>
+                <a:spcPts val="1620"/>
+              </a:lnSpc>
+              <a:spcAft>
+                <a:spcPts val="300"/>
+              </a:spcAft>
+              <a:buSzPct val="100000"/>
+              <a:buChar char="•"/>
+            </a:pPr>
+            <a:r>
+              <a:rPr lang="en-US" sz="1200" dirty="0">
+                <a:solidFill>
+                  <a:srgbClr val="1C2833"/>
+                </a:solidFill>
+                <a:latin typeface="Arial" pitchFamily="34" charset="0"/>
+                <a:ea typeface="Arial" pitchFamily="34" charset="-122"/>
+                <a:cs typeface="Arial" pitchFamily="34" charset="-120"/>
+              </a:rPr>
+              <a:t>Hold the answer. Promise: "we'll settle this in 10 minutes."</a:t>
             </a:r>
             <a:endParaRPr lang="en-US" sz="1200" dirty="0"/>
           </a:p>
@@ -4529,713 +6571,7 @@
         </p:nvSpPr>
         <p:spPr>
           <a:xfrm>
-            <a:off x="406301" y="1254323"/>
-            <a:ext cx="8498026" cy="213271"/>
-          </a:xfrm>
-          <a:prstGeom prst="rect">
-            <a:avLst/>
-          </a:prstGeom>
-          <a:noFill/>
-          <a:ln/>
-        </p:spPr>
-        <p:txBody>
-          <a:bodyPr wrap="square" lIns="0" tIns="0" rIns="0" bIns="0" rtlCol="0" anchor="t"/>
-          <a:lstStyle/>
-          <a:p>
-            <a:pPr algn="l" indent="0" marL="0">
-              <a:lnSpc>
-                <a:spcPts val="1680"/>
-              </a:lnSpc>
-              <a:spcBef>
-                <a:spcPts val="300"/>
-              </a:spcBef>
-              <a:spcAft>
-                <a:spcPts val="300"/>
-              </a:spcAft>
-              <a:buNone/>
-            </a:pPr>
-            <a:r>
-              <a:rPr lang="en-US" sz="1200" i="1" dirty="0">
-                <a:solidFill>
-                  <a:srgbClr val="1C2833"/>
-                </a:solidFill>
-                <a:latin typeface="Arial" pitchFamily="34" charset="0"/>
-                <a:ea typeface="Arial" pitchFamily="34" charset="-122"/>
-                <a:cs typeface="Arial" pitchFamily="34" charset="-120"/>
-              </a:rPr>
-              <a:t>Each row: Property · Magic Square (3×3, 1–9) · Sudoku (3×3 within 9×9).</a:t>
-            </a:r>
-            <a:endParaRPr lang="en-US" sz="1200" dirty="0"/>
-          </a:p>
-        </p:txBody>
-      </p:sp>
-      <p:sp>
-        <p:nvSpPr>
-          <p:cNvPr id="6" name="Text 4"/>
-          <p:cNvSpPr/>
-          <p:nvPr/>
-        </p:nvSpPr>
-        <p:spPr>
-          <a:xfrm>
-            <a:off x="634901" y="1556445"/>
-            <a:ext cx="8102798" cy="1500783"/>
-          </a:xfrm>
-          <a:prstGeom prst="rect">
-            <a:avLst/>
-          </a:prstGeom>
-          <a:noFill/>
-          <a:ln/>
-        </p:spPr>
-        <p:txBody>
-          <a:bodyPr wrap="square" lIns="0" tIns="0" rIns="0" bIns="0" rtlCol="0" anchor="t"/>
-          <a:lstStyle/>
-          <a:p>
-            <a:pPr algn="l" marL="342900" indent="-342900">
-              <a:lnSpc>
-                <a:spcPts val="1620"/>
-              </a:lnSpc>
-              <a:spcAft>
-                <a:spcPts val="300"/>
-              </a:spcAft>
-              <a:buSzPct val="100000"/>
-              <a:buChar char="•"/>
-            </a:pPr>
-            <a:r>
-              <a:rPr lang="en-US" sz="1200" b="1" dirty="0">
-                <a:solidFill>
-                  <a:srgbClr val="1C2833"/>
-                </a:solidFill>
-                <a:latin typeface="Arial" pitchFamily="34" charset="0"/>
-                <a:ea typeface="Arial" pitchFamily="34" charset="-122"/>
-                <a:cs typeface="Arial" pitchFamily="34" charset="-120"/>
-              </a:rPr>
-              <a:t>Uses digits 1–9?</a:t>
-            </a:r>
-            <a:pPr algn="l" indent="0" marL="0">
-              <a:lnSpc>
-                <a:spcPts val="1620"/>
-              </a:lnSpc>
-              <a:spcAft>
-                <a:spcPts val="300"/>
-              </a:spcAft>
-              <a:buNone/>
-            </a:pPr>
-            <a:r>
-              <a:rPr lang="en-US" sz="1200" dirty="0">
-                <a:solidFill>
-                  <a:srgbClr val="1C2833"/>
-                </a:solidFill>
-                <a:latin typeface="Arial" pitchFamily="34" charset="0"/>
-                <a:ea typeface="Arial" pitchFamily="34" charset="-122"/>
-                <a:cs typeface="Arial" pitchFamily="34" charset="-120"/>
-              </a:rPr>
-              <a:t> — yes — once each · yes — once each within each 3×3 block</a:t>
-            </a:r>
-            <a:endParaRPr lang="en-US" sz="1200" dirty="0"/>
-          </a:p>
-          <a:p>
-            <a:pPr algn="l" marL="342900" indent="-342900">
-              <a:lnSpc>
-                <a:spcPts val="1620"/>
-              </a:lnSpc>
-              <a:spcAft>
-                <a:spcPts val="300"/>
-              </a:spcAft>
-              <a:buSzPct val="100000"/>
-              <a:buChar char="•"/>
-            </a:pPr>
-            <a:r>
-              <a:rPr lang="en-US" sz="1200" b="1" dirty="0">
-                <a:solidFill>
-                  <a:srgbClr val="1C2833"/>
-                </a:solidFill>
-                <a:latin typeface="Arial" pitchFamily="34" charset="0"/>
-                <a:ea typeface="Arial" pitchFamily="34" charset="-122"/>
-                <a:cs typeface="Arial" pitchFamily="34" charset="-120"/>
-              </a:rPr>
-              <a:t>Each row uses each digit once?</a:t>
-            </a:r>
-            <a:pPr algn="l" indent="0" marL="0">
-              <a:lnSpc>
-                <a:spcPts val="1620"/>
-              </a:lnSpc>
-              <a:spcAft>
-                <a:spcPts val="300"/>
-              </a:spcAft>
-              <a:buNone/>
-            </a:pPr>
-            <a:r>
-              <a:rPr lang="en-US" sz="1200" dirty="0">
-                <a:solidFill>
-                  <a:srgbClr val="1C2833"/>
-                </a:solidFill>
-                <a:latin typeface="Arial" pitchFamily="34" charset="0"/>
-                <a:ea typeface="Arial" pitchFamily="34" charset="-122"/>
-                <a:cs typeface="Arial" pitchFamily="34" charset="-120"/>
-              </a:rPr>
-              <a:t> — no (a row has just 3 distinct values from 1–9) · yes (each row uses 1–9)</a:t>
-            </a:r>
-            <a:endParaRPr lang="en-US" sz="1200" dirty="0"/>
-          </a:p>
-          <a:p>
-            <a:pPr algn="l" marL="342900" indent="-342900">
-              <a:lnSpc>
-                <a:spcPts val="1620"/>
-              </a:lnSpc>
-              <a:spcAft>
-                <a:spcPts val="300"/>
-              </a:spcAft>
-              <a:buSzPct val="100000"/>
-              <a:buChar char="•"/>
-            </a:pPr>
-            <a:r>
-              <a:rPr lang="en-US" sz="1200" b="1" dirty="0">
-                <a:solidFill>
-                  <a:srgbClr val="1C2833"/>
-                </a:solidFill>
-                <a:latin typeface="Arial" pitchFamily="34" charset="0"/>
-                <a:ea typeface="Arial" pitchFamily="34" charset="-122"/>
-                <a:cs typeface="Arial" pitchFamily="34" charset="-120"/>
-              </a:rPr>
-              <a:t>Each column uses each digit once?</a:t>
-            </a:r>
-            <a:pPr algn="l" indent="0" marL="0">
-              <a:lnSpc>
-                <a:spcPts val="1620"/>
-              </a:lnSpc>
-              <a:spcAft>
-                <a:spcPts val="300"/>
-              </a:spcAft>
-              <a:buNone/>
-            </a:pPr>
-            <a:r>
-              <a:rPr lang="en-US" sz="1200" dirty="0">
-                <a:solidFill>
-                  <a:srgbClr val="1C2833"/>
-                </a:solidFill>
-                <a:latin typeface="Arial" pitchFamily="34" charset="0"/>
-                <a:ea typeface="Arial" pitchFamily="34" charset="-122"/>
-                <a:cs typeface="Arial" pitchFamily="34" charset="-120"/>
-              </a:rPr>
-              <a:t> — no · yes</a:t>
-            </a:r>
-            <a:endParaRPr lang="en-US" sz="1200" dirty="0"/>
-          </a:p>
-          <a:p>
-            <a:pPr algn="l" marL="342900" indent="-342900">
-              <a:lnSpc>
-                <a:spcPts val="1620"/>
-              </a:lnSpc>
-              <a:spcAft>
-                <a:spcPts val="300"/>
-              </a:spcAft>
-              <a:buSzPct val="100000"/>
-              <a:buChar char="•"/>
-            </a:pPr>
-            <a:r>
-              <a:rPr lang="en-US" sz="1200" b="1" dirty="0">
-                <a:solidFill>
-                  <a:srgbClr val="1C2833"/>
-                </a:solidFill>
-                <a:latin typeface="Arial" pitchFamily="34" charset="0"/>
-                <a:ea typeface="Arial" pitchFamily="34" charset="-122"/>
-                <a:cs typeface="Arial" pitchFamily="34" charset="-120"/>
-              </a:rPr>
-              <a:t>Diagonals sum to a constant?</a:t>
-            </a:r>
-            <a:pPr algn="l" indent="0" marL="0">
-              <a:lnSpc>
-                <a:spcPts val="1620"/>
-              </a:lnSpc>
-              <a:spcAft>
-                <a:spcPts val="300"/>
-              </a:spcAft>
-              <a:buNone/>
-            </a:pPr>
-            <a:r>
-              <a:rPr lang="en-US" sz="1200" dirty="0">
-                <a:solidFill>
-                  <a:srgbClr val="1C2833"/>
-                </a:solidFill>
-                <a:latin typeface="Arial" pitchFamily="34" charset="0"/>
-                <a:ea typeface="Arial" pitchFamily="34" charset="-122"/>
-                <a:cs typeface="Arial" pitchFamily="34" charset="-120"/>
-              </a:rPr>
-              <a:t> — yes · not required</a:t>
-            </a:r>
-            <a:endParaRPr lang="en-US" sz="1200" dirty="0"/>
-          </a:p>
-          <a:p>
-            <a:pPr algn="l" marL="342900" indent="-342900">
-              <a:lnSpc>
-                <a:spcPts val="1620"/>
-              </a:lnSpc>
-              <a:spcAft>
-                <a:spcPts val="300"/>
-              </a:spcAft>
-              <a:buSzPct val="100000"/>
-              <a:buChar char="•"/>
-            </a:pPr>
-            <a:r>
-              <a:rPr lang="en-US" sz="1200" b="1" dirty="0">
-                <a:solidFill>
-                  <a:srgbClr val="1C2833"/>
-                </a:solidFill>
-                <a:latin typeface="Arial" pitchFamily="34" charset="0"/>
-                <a:ea typeface="Arial" pitchFamily="34" charset="-122"/>
-                <a:cs typeface="Arial" pitchFamily="34" charset="-120"/>
-              </a:rPr>
-              <a:t>Rows sum to a constant?</a:t>
-            </a:r>
-            <a:pPr algn="l" indent="0" marL="0">
-              <a:lnSpc>
-                <a:spcPts val="1620"/>
-              </a:lnSpc>
-              <a:spcAft>
-                <a:spcPts val="300"/>
-              </a:spcAft>
-              <a:buNone/>
-            </a:pPr>
-            <a:r>
-              <a:rPr lang="en-US" sz="1200" dirty="0">
-                <a:solidFill>
-                  <a:srgbClr val="1C2833"/>
-                </a:solidFill>
-                <a:latin typeface="Arial" pitchFamily="34" charset="0"/>
-                <a:ea typeface="Arial" pitchFamily="34" charset="-122"/>
-                <a:cs typeface="Arial" pitchFamily="34" charset="-120"/>
-              </a:rPr>
-              <a:t> — yes (= 15) · not enforced</a:t>
-            </a:r>
-            <a:endParaRPr lang="en-US" sz="1200" dirty="0"/>
-          </a:p>
-          <a:p>
-            <a:pPr algn="l" marL="342900" indent="-342900">
-              <a:lnSpc>
-                <a:spcPts val="1620"/>
-              </a:lnSpc>
-              <a:spcAft>
-                <a:spcPts val="300"/>
-              </a:spcAft>
-              <a:buSzPct val="100000"/>
-              <a:buChar char="•"/>
-            </a:pPr>
-            <a:r>
-              <a:rPr lang="en-US" sz="1200" b="1" dirty="0">
-                <a:solidFill>
-                  <a:srgbClr val="1C2833"/>
-                </a:solidFill>
-                <a:latin typeface="Arial" pitchFamily="34" charset="0"/>
-                <a:ea typeface="Arial" pitchFamily="34" charset="-122"/>
-                <a:cs typeface="Arial" pitchFamily="34" charset="-120"/>
-              </a:rPr>
-              <a:t>Columns sum to a constant?</a:t>
-            </a:r>
-            <a:pPr algn="l" indent="0" marL="0">
-              <a:lnSpc>
-                <a:spcPts val="1620"/>
-              </a:lnSpc>
-              <a:spcAft>
-                <a:spcPts val="300"/>
-              </a:spcAft>
-              <a:buNone/>
-            </a:pPr>
-            <a:r>
-              <a:rPr lang="en-US" sz="1200" dirty="0">
-                <a:solidFill>
-                  <a:srgbClr val="1C2833"/>
-                </a:solidFill>
-                <a:latin typeface="Arial" pitchFamily="34" charset="0"/>
-                <a:ea typeface="Arial" pitchFamily="34" charset="-122"/>
-                <a:cs typeface="Arial" pitchFamily="34" charset="-120"/>
-              </a:rPr>
-              <a:t> — yes · not enforced</a:t>
-            </a:r>
-            <a:endParaRPr lang="en-US" sz="1200" dirty="0"/>
-          </a:p>
-        </p:txBody>
-      </p:sp>
-      <p:sp>
-        <p:nvSpPr>
-          <p:cNvPr id="7" name="Text 5"/>
-          <p:cNvSpPr/>
-          <p:nvPr/>
-        </p:nvSpPr>
-        <p:spPr>
-          <a:xfrm>
-            <a:off x="406301" y="3146078"/>
-            <a:ext cx="8498026" cy="213271"/>
-          </a:xfrm>
-          <a:prstGeom prst="rect">
-            <a:avLst/>
-          </a:prstGeom>
-          <a:noFill/>
-          <a:ln/>
-        </p:spPr>
-        <p:txBody>
-          <a:bodyPr wrap="square" lIns="0" tIns="0" rIns="0" bIns="0" rtlCol="0" anchor="t"/>
-          <a:lstStyle/>
-          <a:p>
-            <a:pPr algn="l" indent="0" marL="0">
-              <a:lnSpc>
-                <a:spcPts val="1680"/>
-              </a:lnSpc>
-              <a:spcBef>
-                <a:spcPts val="300"/>
-              </a:spcBef>
-              <a:spcAft>
-                <a:spcPts val="300"/>
-              </a:spcAft>
-              <a:buNone/>
-            </a:pPr>
-            <a:r>
-              <a:rPr lang="en-US" sz="1200" i="1" dirty="0">
-                <a:solidFill>
-                  <a:srgbClr val="1C2833"/>
-                </a:solidFill>
-                <a:latin typeface="Arial" pitchFamily="34" charset="0"/>
-                <a:ea typeface="Arial" pitchFamily="34" charset="-122"/>
-                <a:cs typeface="Arial" pitchFamily="34" charset="-120"/>
-              </a:rPr>
-              <a:t>"Magic squares constrain</a:t>
-            </a:r>
-            <a:pPr algn="l" indent="0" marL="0">
-              <a:lnSpc>
-                <a:spcPts val="1680"/>
-              </a:lnSpc>
-              <a:spcBef>
-                <a:spcPts val="300"/>
-              </a:spcBef>
-              <a:spcAft>
-                <a:spcPts val="300"/>
-              </a:spcAft>
-              <a:buNone/>
-            </a:pPr>
-            <a:r>
-              <a:rPr lang="en-US" sz="1200" dirty="0">
-                <a:solidFill>
-                  <a:srgbClr val="1C2833"/>
-                </a:solidFill>
-                <a:latin typeface="Arial" pitchFamily="34" charset="0"/>
-                <a:ea typeface="Arial" pitchFamily="34" charset="-122"/>
-                <a:cs typeface="Arial" pitchFamily="34" charset="-120"/>
-              </a:rPr>
-              <a:t> sums </a:t>
-            </a:r>
-            <a:pPr algn="l" indent="0" marL="0">
-              <a:lnSpc>
-                <a:spcPts val="1680"/>
-              </a:lnSpc>
-              <a:spcBef>
-                <a:spcPts val="300"/>
-              </a:spcBef>
-              <a:spcAft>
-                <a:spcPts val="300"/>
-              </a:spcAft>
-              <a:buNone/>
-            </a:pPr>
-            <a:r>
-              <a:rPr lang="en-US" sz="1200" i="1" dirty="0">
-                <a:solidFill>
-                  <a:srgbClr val="1C2833"/>
-                </a:solidFill>
-                <a:latin typeface="Arial" pitchFamily="34" charset="0"/>
-                <a:ea typeface="Arial" pitchFamily="34" charset="-122"/>
-                <a:cs typeface="Arial" pitchFamily="34" charset="-120"/>
-              </a:rPr>
-              <a:t>. Sudoku constrains</a:t>
-            </a:r>
-            <a:pPr algn="l" indent="0" marL="0">
-              <a:lnSpc>
-                <a:spcPts val="1680"/>
-              </a:lnSpc>
-              <a:spcBef>
-                <a:spcPts val="300"/>
-              </a:spcBef>
-              <a:spcAft>
-                <a:spcPts val="300"/>
-              </a:spcAft>
-              <a:buNone/>
-            </a:pPr>
-            <a:r>
-              <a:rPr lang="en-US" sz="1200" dirty="0">
-                <a:solidFill>
-                  <a:srgbClr val="1C2833"/>
-                </a:solidFill>
-                <a:latin typeface="Arial" pitchFamily="34" charset="0"/>
-                <a:ea typeface="Arial" pitchFamily="34" charset="-122"/>
-                <a:cs typeface="Arial" pitchFamily="34" charset="-120"/>
-              </a:rPr>
-              <a:t> placement </a:t>
-            </a:r>
-            <a:pPr algn="l" indent="0" marL="0">
-              <a:lnSpc>
-                <a:spcPts val="1680"/>
-              </a:lnSpc>
-              <a:spcBef>
-                <a:spcPts val="300"/>
-              </a:spcBef>
-              <a:spcAft>
-                <a:spcPts val="300"/>
-              </a:spcAft>
-              <a:buNone/>
-            </a:pPr>
-            <a:r>
-              <a:rPr lang="en-US" sz="1200" i="1" dirty="0">
-                <a:solidFill>
-                  <a:srgbClr val="1C2833"/>
-                </a:solidFill>
-                <a:latin typeface="Arial" pitchFamily="34" charset="0"/>
-                <a:ea typeface="Arial" pitchFamily="34" charset="-122"/>
-                <a:cs typeface="Arial" pitchFamily="34" charset="-120"/>
-              </a:rPr>
-              <a:t>. Different constraints — different puzzles."</a:t>
-            </a:r>
-            <a:endParaRPr lang="en-US" sz="1200" dirty="0"/>
-          </a:p>
-        </p:txBody>
-      </p:sp>
-      <p:sp>
-        <p:nvSpPr>
-          <p:cNvPr id="8" name="Text 6"/>
-          <p:cNvSpPr/>
-          <p:nvPr/>
-        </p:nvSpPr>
-        <p:spPr>
-          <a:xfrm>
-            <a:off x="634901" y="3448199"/>
-            <a:ext cx="8102798" cy="487561"/>
-          </a:xfrm>
-          <a:prstGeom prst="rect">
-            <a:avLst/>
-          </a:prstGeom>
-          <a:noFill/>
-          <a:ln/>
-        </p:spPr>
-        <p:txBody>
-          <a:bodyPr wrap="square" lIns="0" tIns="0" rIns="0" bIns="0" rtlCol="0" anchor="t"/>
-          <a:lstStyle/>
-          <a:p>
-            <a:pPr algn="l" marL="342900" indent="-342900">
-              <a:lnSpc>
-                <a:spcPts val="1620"/>
-              </a:lnSpc>
-              <a:spcAft>
-                <a:spcPts val="300"/>
-              </a:spcAft>
-              <a:buSzPct val="100000"/>
-              <a:buChar char="•"/>
-            </a:pPr>
-            <a:r>
-              <a:rPr lang="en-US" sz="1200" b="1" dirty="0">
-                <a:solidFill>
-                  <a:srgbClr val="1C2833"/>
-                </a:solidFill>
-                <a:latin typeface="Arial" pitchFamily="34" charset="0"/>
-                <a:ea typeface="Arial" pitchFamily="34" charset="-122"/>
-                <a:cs typeface="Arial" pitchFamily="34" charset="-120"/>
-              </a:rPr>
-              <a:t>Both are constraint-satisfaction problems.</a:t>
-            </a:r>
-            <a:pPr algn="l" indent="0" marL="0">
-              <a:lnSpc>
-                <a:spcPts val="1620"/>
-              </a:lnSpc>
-              <a:spcAft>
-                <a:spcPts val="300"/>
-              </a:spcAft>
-              <a:buNone/>
-            </a:pPr>
-            <a:r>
-              <a:rPr lang="en-US" sz="1200" dirty="0">
-                <a:solidFill>
-                  <a:srgbClr val="1C2833"/>
-                </a:solidFill>
-                <a:latin typeface="Arial" pitchFamily="34" charset="0"/>
-                <a:ea typeface="Arial" pitchFamily="34" charset="-122"/>
-                <a:cs typeface="Arial" pitchFamily="34" charset="-120"/>
-              </a:rPr>
-              <a:t> Each gives you a structure (9 cells in 3×3, or 81 cells in 9×9) and a set of rules. You search for placements that satisfy all rules. Computers solve these the same way.</a:t>
-            </a:r>
-            <a:endParaRPr lang="en-US" sz="1200" dirty="0"/>
-          </a:p>
-        </p:txBody>
-      </p:sp>
-      <p:sp>
-        <p:nvSpPr>
-          <p:cNvPr id="9" name="Text 7"/>
-          <p:cNvSpPr/>
-          <p:nvPr/>
-        </p:nvSpPr>
-        <p:spPr>
-          <a:xfrm>
-            <a:off x="634901" y="4037261"/>
-            <a:ext cx="8102798" cy="693241"/>
-          </a:xfrm>
-          <a:prstGeom prst="rect">
-            <a:avLst/>
-          </a:prstGeom>
-          <a:noFill/>
-          <a:ln/>
-        </p:spPr>
-        <p:txBody>
-          <a:bodyPr wrap="square" lIns="0" tIns="0" rIns="0" bIns="0" rtlCol="0" anchor="t"/>
-          <a:lstStyle/>
-          <a:p>
-            <a:pPr algn="l" marL="342900" indent="-342900">
-              <a:lnSpc>
-                <a:spcPts val="1620"/>
-              </a:lnSpc>
-              <a:spcAft>
-                <a:spcPts val="300"/>
-              </a:spcAft>
-              <a:buSzPct val="100000"/>
-              <a:buChar char="•"/>
-            </a:pPr>
-            <a:r>
-              <a:rPr lang="en-US" sz="1200" b="1" dirty="0">
-                <a:solidFill>
-                  <a:srgbClr val="1C2833"/>
-                </a:solidFill>
-                <a:latin typeface="Arial" pitchFamily="34" charset="0"/>
-                <a:ea typeface="Arial" pitchFamily="34" charset="-122"/>
-                <a:cs typeface="Arial" pitchFamily="34" charset="-120"/>
-              </a:rPr>
-              <a:t>A bridge example.</a:t>
-            </a:r>
-            <a:pPr algn="l" indent="0" marL="0">
-              <a:lnSpc>
-                <a:spcPts val="1620"/>
-              </a:lnSpc>
-              <a:spcAft>
-                <a:spcPts val="300"/>
-              </a:spcAft>
-              <a:buNone/>
-            </a:pPr>
-            <a:r>
-              <a:rPr lang="en-US" sz="1200" dirty="0">
-                <a:solidFill>
-                  <a:srgbClr val="1C2833"/>
-                </a:solidFill>
-                <a:latin typeface="Arial" pitchFamily="34" charset="0"/>
-                <a:ea typeface="Arial" pitchFamily="34" charset="-122"/>
-                <a:cs typeface="Arial" pitchFamily="34" charset="-120"/>
-              </a:rPr>
-              <a:t> It is possible to have a 9×9 grid that is </a:t>
-            </a:r>
-            <a:pPr algn="l" indent="0" marL="0">
-              <a:lnSpc>
-                <a:spcPts val="1620"/>
-              </a:lnSpc>
-              <a:spcAft>
-                <a:spcPts val="300"/>
-              </a:spcAft>
-              <a:buNone/>
-            </a:pPr>
-            <a:r>
-              <a:rPr lang="en-US" sz="1200" i="1" dirty="0">
-                <a:solidFill>
-                  <a:srgbClr val="1C2833"/>
-                </a:solidFill>
-                <a:latin typeface="Arial" pitchFamily="34" charset="0"/>
-                <a:ea typeface="Arial" pitchFamily="34" charset="-122"/>
-                <a:cs typeface="Arial" pitchFamily="34" charset="-120"/>
-              </a:rPr>
-              <a:t>both</a:t>
-            </a:r>
-            <a:pPr algn="l" indent="0" marL="0">
-              <a:lnSpc>
-                <a:spcPts val="1620"/>
-              </a:lnSpc>
-              <a:spcAft>
-                <a:spcPts val="300"/>
-              </a:spcAft>
-              <a:buNone/>
-            </a:pPr>
-            <a:r>
-              <a:rPr lang="en-US" sz="1200" dirty="0">
-                <a:solidFill>
-                  <a:srgbClr val="1C2833"/>
-                </a:solidFill>
-                <a:latin typeface="Arial" pitchFamily="34" charset="0"/>
-                <a:ea typeface="Arial" pitchFamily="34" charset="-122"/>
-                <a:cs typeface="Arial" pitchFamily="34" charset="-120"/>
-              </a:rPr>
-              <a:t> a Sudoku AND a magic square (every row, column, </a:t>
-            </a:r>
-            <a:pPr algn="l" indent="0" marL="0">
-              <a:lnSpc>
-                <a:spcPts val="1620"/>
-              </a:lnSpc>
-              <a:spcAft>
-                <a:spcPts val="300"/>
-              </a:spcAft>
-              <a:buNone/>
-            </a:pPr>
-            <a:r>
-              <a:rPr lang="en-US" sz="1200" i="1" dirty="0">
-                <a:solidFill>
-                  <a:srgbClr val="1C2833"/>
-                </a:solidFill>
-                <a:latin typeface="Arial" pitchFamily="34" charset="0"/>
-                <a:ea typeface="Arial" pitchFamily="34" charset="-122"/>
-                <a:cs typeface="Arial" pitchFamily="34" charset="-120"/>
-              </a:rPr>
-              <a:t>and</a:t>
-            </a:r>
-            <a:pPr algn="l" indent="0" marL="0">
-              <a:lnSpc>
-                <a:spcPts val="1620"/>
-              </a:lnSpc>
-              <a:spcAft>
-                <a:spcPts val="300"/>
-              </a:spcAft>
-              <a:buNone/>
-            </a:pPr>
-            <a:r>
-              <a:rPr lang="en-US" sz="1200" dirty="0">
-                <a:solidFill>
-                  <a:srgbClr val="1C2833"/>
-                </a:solidFill>
-                <a:latin typeface="Arial" pitchFamily="34" charset="0"/>
-                <a:ea typeface="Arial" pitchFamily="34" charset="-122"/>
-                <a:cs typeface="Arial" pitchFamily="34" charset="-120"/>
-              </a:rPr>
-              <a:t> 3×3 block sums to 45 — which works because rows/columns automatically sum to 1+2+...+9 = 45). Such squares exist; they are rare. Show one if you have time. </a:t>
-            </a:r>
-            <a:pPr algn="l" indent="0" marL="0">
-              <a:lnSpc>
-                <a:spcPts val="1620"/>
-              </a:lnSpc>
-              <a:spcAft>
-                <a:spcPts val="300"/>
-              </a:spcAft>
-              <a:buNone/>
-            </a:pPr>
-            <a:r>
-              <a:rPr lang="en-US" sz="1200" i="1" dirty="0">
-                <a:solidFill>
-                  <a:srgbClr val="1C2833"/>
-                </a:solidFill>
-                <a:latin typeface="Arial" pitchFamily="34" charset="0"/>
-                <a:ea typeface="Arial" pitchFamily="34" charset="-122"/>
-                <a:cs typeface="Arial" pitchFamily="34" charset="-120"/>
-              </a:rPr>
-              <a:t>(Not required at Middle band.)</a:t>
-            </a:r>
-            <a:endParaRPr lang="en-US" sz="1200" dirty="0"/>
-          </a:p>
-        </p:txBody>
-      </p:sp>
-      <p:sp>
-        <p:nvSpPr>
-          <p:cNvPr id="10" name="Text 8"/>
-          <p:cNvSpPr/>
-          <p:nvPr/>
-        </p:nvSpPr>
-        <p:spPr>
-          <a:xfrm>
-            <a:off x="406301" y="4895552"/>
+            <a:off x="406301" y="4434929"/>
             <a:ext cx="8498026" cy="213271"/>
           </a:xfrm>
           <a:prstGeom prst="rect">
@@ -5379,7 +6715,7 @@
                 <a:ea typeface="Georgia" pitchFamily="34" charset="-122"/>
                 <a:cs typeface="Georgia" pitchFamily="34" charset="-120"/>
               </a:rPr>
-              <a:t>Activity (20 min) — Project work</a:t>
+              <a:t>Core (15 min)</a:t>
             </a:r>
             <a:endParaRPr lang="en-US" sz="1800" dirty="0"/>
           </a:p>
@@ -5393,8 +6729,8 @@
         </p:nvSpPr>
         <p:spPr>
           <a:xfrm>
-            <a:off x="406301" y="870942"/>
-            <a:ext cx="8498026" cy="853083"/>
+            <a:off x="634901" y="883593"/>
+            <a:ext cx="8102798" cy="281880"/>
           </a:xfrm>
           <a:prstGeom prst="rect">
             <a:avLst/>
@@ -5406,13 +6742,31 @@
           <a:bodyPr wrap="square" lIns="0" tIns="0" rIns="0" bIns="0" rtlCol="0" anchor="t"/>
           <a:lstStyle/>
           <a:p>
-            <a:pPr algn="l" indent="0" marL="0">
-              <a:lnSpc>
-                <a:spcPts val="1680"/>
-              </a:lnSpc>
-              <a:spcBef>
-                <a:spcPts val="300"/>
-              </a:spcBef>
+            <a:pPr algn="l" marL="342900" indent="-342900">
+              <a:lnSpc>
+                <a:spcPts val="1620"/>
+              </a:lnSpc>
+              <a:spcAft>
+                <a:spcPts val="300"/>
+              </a:spcAft>
+              <a:buSzPct val="100000"/>
+              <a:buChar char="•"/>
+            </a:pPr>
+            <a:r>
+              <a:rPr lang="en-US" sz="1200" b="1" dirty="0">
+                <a:solidFill>
+                  <a:srgbClr val="1C2833"/>
+                </a:solidFill>
+                <a:latin typeface="Arial" pitchFamily="34" charset="0"/>
+                <a:ea typeface="Arial" pitchFamily="34" charset="-122"/>
+                <a:cs typeface="Arial" pitchFamily="34" charset="-120"/>
+              </a:rPr>
+              <a:t>The rules side-by-side.</a:t>
+            </a:r>
+            <a:pPr algn="l" indent="0" marL="0">
+              <a:lnSpc>
+                <a:spcPts val="1620"/>
+              </a:lnSpc>
               <a:spcAft>
                 <a:spcPts val="300"/>
               </a:spcAft>
@@ -5427,53 +6781,7 @@
                 <a:ea typeface="Arial" pitchFamily="34" charset="-122"/>
                 <a:cs typeface="Arial" pitchFamily="34" charset="-120"/>
               </a:rPr>
-              <a:t>– Pairs work on their project. Teacher circulates. – Required checkpoints by end of class: – The magic square is fully constructed (5×5 or larger). – Magic constant verified for at least 3 rows, 3 columns, both diagonals. – Citation is in place (Nārāyaṇa Paṇḍita, </a:t>
-            </a:r>
-            <a:pPr algn="l" indent="0" marL="0">
-              <a:lnSpc>
-                <a:spcPts val="1680"/>
-              </a:lnSpc>
-              <a:spcBef>
-                <a:spcPts val="300"/>
-              </a:spcBef>
-              <a:spcAft>
-                <a:spcPts val="300"/>
-              </a:spcAft>
-              <a:buNone/>
-            </a:pPr>
-            <a:r>
-              <a:rPr lang="en-US" sz="1200" i="1" dirty="0">
-                <a:solidFill>
-                  <a:srgbClr val="1C2833"/>
-                </a:solidFill>
-                <a:latin typeface="Arial" pitchFamily="34" charset="0"/>
-                <a:ea typeface="Arial" pitchFamily="34" charset="-122"/>
-                <a:cs typeface="Arial" pitchFamily="34" charset="-120"/>
-              </a:rPr>
-              <a:t>Gaṇita-kaumudī</a:t>
-            </a:r>
-            <a:pPr algn="l" indent="0" marL="0">
-              <a:lnSpc>
-                <a:spcPts val="1680"/>
-              </a:lnSpc>
-              <a:spcBef>
-                <a:spcPts val="300"/>
-              </a:spcBef>
-              <a:spcAft>
-                <a:spcPts val="300"/>
-              </a:spcAft>
-              <a:buNone/>
-            </a:pPr>
-            <a:r>
-              <a:rPr lang="en-US" sz="1200" dirty="0">
-                <a:solidFill>
-                  <a:srgbClr val="1C2833"/>
-                </a:solidFill>
-                <a:latin typeface="Arial" pitchFamily="34" charset="0"/>
-                <a:ea typeface="Arial" pitchFamily="34" charset="-122"/>
-                <a:cs typeface="Arial" pitchFamily="34" charset="-120"/>
-              </a:rPr>
-              <a:t>, Book 14, 1356 CE). – At least one paragraph (or one slide of a video) of explanation drafted.</a:t>
+              <a:t> Write on the board:</a:t>
             </a:r>
             <a:endParaRPr lang="en-US" sz="1200" dirty="0"/>
           </a:p>
@@ -5487,7 +6795,7 @@
         </p:nvSpPr>
         <p:spPr>
           <a:xfrm>
-            <a:off x="406301" y="1800225"/>
+            <a:off x="406301" y="1254323"/>
             <a:ext cx="8498026" cy="213271"/>
           </a:xfrm>
           <a:prstGeom prst="rect">
@@ -5513,15 +6821,15 @@
               <a:buNone/>
             </a:pPr>
             <a:r>
-              <a:rPr lang="en-US" sz="1200" dirty="0">
-                <a:solidFill>
-                  <a:srgbClr val="1C2833"/>
-                </a:solidFill>
-                <a:latin typeface="Arial" pitchFamily="34" charset="0"/>
-                <a:ea typeface="Arial" pitchFamily="34" charset="-122"/>
-                <a:cs typeface="Arial" pitchFamily="34" charset="-120"/>
-              </a:rPr>
-              <a:t>– The teacher does a 1-minute review with each pair to flag any errors before Day 10.</a:t>
+              <a:rPr lang="en-US" sz="1200" i="1" dirty="0">
+                <a:solidFill>
+                  <a:srgbClr val="1C2833"/>
+                </a:solidFill>
+                <a:latin typeface="Arial" pitchFamily="34" charset="0"/>
+                <a:ea typeface="Arial" pitchFamily="34" charset="-122"/>
+                <a:cs typeface="Arial" pitchFamily="34" charset="-120"/>
+              </a:rPr>
+              <a:t>Each row: Property · Magic Square (3×3, 1–9) · Sudoku (3×3 within 9×9).</a:t>
             </a:r>
             <a:endParaRPr lang="en-US" sz="1200" dirty="0"/>
           </a:p>
@@ -5679,7 +6987,7 @@
                 <a:ea typeface="Georgia" pitchFamily="34" charset="-122"/>
                 <a:cs typeface="Georgia" pitchFamily="34" charset="-120"/>
               </a:rPr>
-              <a:t>Wrap-up (5 min)</a:t>
+              <a:t>Core (15 min) (cont.)</a:t>
             </a:r>
             <a:endParaRPr lang="en-US" sz="1800" dirty="0"/>
           </a:p>
@@ -5693,8 +7001,8 @@
         </p:nvSpPr>
         <p:spPr>
           <a:xfrm>
-            <a:off x="406301" y="870942"/>
-            <a:ext cx="8498026" cy="426541"/>
+            <a:off x="634901" y="883593"/>
+            <a:ext cx="8102798" cy="1500783"/>
           </a:xfrm>
           <a:prstGeom prst="rect">
             <a:avLst/>
@@ -5706,13 +7014,31 @@
           <a:bodyPr wrap="square" lIns="0" tIns="0" rIns="0" bIns="0" rtlCol="0" anchor="t"/>
           <a:lstStyle/>
           <a:p>
-            <a:pPr algn="l" indent="0" marL="0">
-              <a:lnSpc>
-                <a:spcPts val="1680"/>
-              </a:lnSpc>
-              <a:spcBef>
-                <a:spcPts val="300"/>
-              </a:spcBef>
+            <a:pPr algn="l" marL="342900" indent="-342900">
+              <a:lnSpc>
+                <a:spcPts val="1620"/>
+              </a:lnSpc>
+              <a:spcAft>
+                <a:spcPts val="300"/>
+              </a:spcAft>
+              <a:buSzPct val="100000"/>
+              <a:buChar char="•"/>
+            </a:pPr>
+            <a:r>
+              <a:rPr lang="en-US" sz="1200" b="1" dirty="0">
+                <a:solidFill>
+                  <a:srgbClr val="1C2833"/>
+                </a:solidFill>
+                <a:latin typeface="Arial" pitchFamily="34" charset="0"/>
+                <a:ea typeface="Arial" pitchFamily="34" charset="-122"/>
+                <a:cs typeface="Arial" pitchFamily="34" charset="-120"/>
+              </a:rPr>
+              <a:t>Uses digits 1–9?</a:t>
+            </a:r>
+            <a:pPr algn="l" indent="0" marL="0">
+              <a:lnSpc>
+                <a:spcPts val="1620"/>
+              </a:lnSpc>
               <a:spcAft>
                 <a:spcPts val="300"/>
               </a:spcAft>
@@ -5727,7 +7053,227 @@
                 <a:ea typeface="Arial" pitchFamily="34" charset="-122"/>
                 <a:cs typeface="Arial" pitchFamily="34" charset="-120"/>
               </a:rPr>
-              <a:t>– Quick poll: "On a scale of 1–5, how ready do you feel for Day 10's share?" Show of fingers. – For 1–2 ratings: teacher schedules a 5-min meeting with that pair before Day 10.</a:t>
+              <a:t> — yes — once each · yes — once each within each 3×3 block</a:t>
+            </a:r>
+            <a:endParaRPr lang="en-US" sz="1200" dirty="0"/>
+          </a:p>
+          <a:p>
+            <a:pPr algn="l" marL="342900" indent="-342900">
+              <a:lnSpc>
+                <a:spcPts val="1620"/>
+              </a:lnSpc>
+              <a:spcAft>
+                <a:spcPts val="300"/>
+              </a:spcAft>
+              <a:buSzPct val="100000"/>
+              <a:buChar char="•"/>
+            </a:pPr>
+            <a:r>
+              <a:rPr lang="en-US" sz="1200" b="1" dirty="0">
+                <a:solidFill>
+                  <a:srgbClr val="1C2833"/>
+                </a:solidFill>
+                <a:latin typeface="Arial" pitchFamily="34" charset="0"/>
+                <a:ea typeface="Arial" pitchFamily="34" charset="-122"/>
+                <a:cs typeface="Arial" pitchFamily="34" charset="-120"/>
+              </a:rPr>
+              <a:t>Each row uses each digit once?</a:t>
+            </a:r>
+            <a:pPr algn="l" indent="0" marL="0">
+              <a:lnSpc>
+                <a:spcPts val="1620"/>
+              </a:lnSpc>
+              <a:spcAft>
+                <a:spcPts val="300"/>
+              </a:spcAft>
+              <a:buNone/>
+            </a:pPr>
+            <a:r>
+              <a:rPr lang="en-US" sz="1200" dirty="0">
+                <a:solidFill>
+                  <a:srgbClr val="1C2833"/>
+                </a:solidFill>
+                <a:latin typeface="Arial" pitchFamily="34" charset="0"/>
+                <a:ea typeface="Arial" pitchFamily="34" charset="-122"/>
+                <a:cs typeface="Arial" pitchFamily="34" charset="-120"/>
+              </a:rPr>
+              <a:t> — no (a row has just 3 distinct values from 1–9) · yes (each row uses 1–9)</a:t>
+            </a:r>
+            <a:endParaRPr lang="en-US" sz="1200" dirty="0"/>
+          </a:p>
+          <a:p>
+            <a:pPr algn="l" marL="342900" indent="-342900">
+              <a:lnSpc>
+                <a:spcPts val="1620"/>
+              </a:lnSpc>
+              <a:spcAft>
+                <a:spcPts val="300"/>
+              </a:spcAft>
+              <a:buSzPct val="100000"/>
+              <a:buChar char="•"/>
+            </a:pPr>
+            <a:r>
+              <a:rPr lang="en-US" sz="1200" b="1" dirty="0">
+                <a:solidFill>
+                  <a:srgbClr val="1C2833"/>
+                </a:solidFill>
+                <a:latin typeface="Arial" pitchFamily="34" charset="0"/>
+                <a:ea typeface="Arial" pitchFamily="34" charset="-122"/>
+                <a:cs typeface="Arial" pitchFamily="34" charset="-120"/>
+              </a:rPr>
+              <a:t>Each column uses each digit once?</a:t>
+            </a:r>
+            <a:pPr algn="l" indent="0" marL="0">
+              <a:lnSpc>
+                <a:spcPts val="1620"/>
+              </a:lnSpc>
+              <a:spcAft>
+                <a:spcPts val="300"/>
+              </a:spcAft>
+              <a:buNone/>
+            </a:pPr>
+            <a:r>
+              <a:rPr lang="en-US" sz="1200" dirty="0">
+                <a:solidFill>
+                  <a:srgbClr val="1C2833"/>
+                </a:solidFill>
+                <a:latin typeface="Arial" pitchFamily="34" charset="0"/>
+                <a:ea typeface="Arial" pitchFamily="34" charset="-122"/>
+                <a:cs typeface="Arial" pitchFamily="34" charset="-120"/>
+              </a:rPr>
+              <a:t> — no · yes</a:t>
+            </a:r>
+            <a:endParaRPr lang="en-US" sz="1200" dirty="0"/>
+          </a:p>
+          <a:p>
+            <a:pPr algn="l" marL="342900" indent="-342900">
+              <a:lnSpc>
+                <a:spcPts val="1620"/>
+              </a:lnSpc>
+              <a:spcAft>
+                <a:spcPts val="300"/>
+              </a:spcAft>
+              <a:buSzPct val="100000"/>
+              <a:buChar char="•"/>
+            </a:pPr>
+            <a:r>
+              <a:rPr lang="en-US" sz="1200" b="1" dirty="0">
+                <a:solidFill>
+                  <a:srgbClr val="1C2833"/>
+                </a:solidFill>
+                <a:latin typeface="Arial" pitchFamily="34" charset="0"/>
+                <a:ea typeface="Arial" pitchFamily="34" charset="-122"/>
+                <a:cs typeface="Arial" pitchFamily="34" charset="-120"/>
+              </a:rPr>
+              <a:t>Diagonals sum to a constant?</a:t>
+            </a:r>
+            <a:pPr algn="l" indent="0" marL="0">
+              <a:lnSpc>
+                <a:spcPts val="1620"/>
+              </a:lnSpc>
+              <a:spcAft>
+                <a:spcPts val="300"/>
+              </a:spcAft>
+              <a:buNone/>
+            </a:pPr>
+            <a:r>
+              <a:rPr lang="en-US" sz="1200" dirty="0">
+                <a:solidFill>
+                  <a:srgbClr val="1C2833"/>
+                </a:solidFill>
+                <a:latin typeface="Arial" pitchFamily="34" charset="0"/>
+                <a:ea typeface="Arial" pitchFamily="34" charset="-122"/>
+                <a:cs typeface="Arial" pitchFamily="34" charset="-120"/>
+              </a:rPr>
+              <a:t> — yes · not required</a:t>
+            </a:r>
+            <a:endParaRPr lang="en-US" sz="1200" dirty="0"/>
+          </a:p>
+          <a:p>
+            <a:pPr algn="l" marL="342900" indent="-342900">
+              <a:lnSpc>
+                <a:spcPts val="1620"/>
+              </a:lnSpc>
+              <a:spcAft>
+                <a:spcPts val="300"/>
+              </a:spcAft>
+              <a:buSzPct val="100000"/>
+              <a:buChar char="•"/>
+            </a:pPr>
+            <a:r>
+              <a:rPr lang="en-US" sz="1200" b="1" dirty="0">
+                <a:solidFill>
+                  <a:srgbClr val="1C2833"/>
+                </a:solidFill>
+                <a:latin typeface="Arial" pitchFamily="34" charset="0"/>
+                <a:ea typeface="Arial" pitchFamily="34" charset="-122"/>
+                <a:cs typeface="Arial" pitchFamily="34" charset="-120"/>
+              </a:rPr>
+              <a:t>Rows sum to a constant?</a:t>
+            </a:r>
+            <a:pPr algn="l" indent="0" marL="0">
+              <a:lnSpc>
+                <a:spcPts val="1620"/>
+              </a:lnSpc>
+              <a:spcAft>
+                <a:spcPts val="300"/>
+              </a:spcAft>
+              <a:buNone/>
+            </a:pPr>
+            <a:r>
+              <a:rPr lang="en-US" sz="1200" dirty="0">
+                <a:solidFill>
+                  <a:srgbClr val="1C2833"/>
+                </a:solidFill>
+                <a:latin typeface="Arial" pitchFamily="34" charset="0"/>
+                <a:ea typeface="Arial" pitchFamily="34" charset="-122"/>
+                <a:cs typeface="Arial" pitchFamily="34" charset="-120"/>
+              </a:rPr>
+              <a:t> — yes (= 15) · not enforced</a:t>
+            </a:r>
+            <a:endParaRPr lang="en-US" sz="1200" dirty="0"/>
+          </a:p>
+          <a:p>
+            <a:pPr algn="l" marL="342900" indent="-342900">
+              <a:lnSpc>
+                <a:spcPts val="1620"/>
+              </a:lnSpc>
+              <a:spcAft>
+                <a:spcPts val="300"/>
+              </a:spcAft>
+              <a:buSzPct val="100000"/>
+              <a:buChar char="•"/>
+            </a:pPr>
+            <a:r>
+              <a:rPr lang="en-US" sz="1200" b="1" dirty="0">
+                <a:solidFill>
+                  <a:srgbClr val="1C2833"/>
+                </a:solidFill>
+                <a:latin typeface="Arial" pitchFamily="34" charset="0"/>
+                <a:ea typeface="Arial" pitchFamily="34" charset="-122"/>
+                <a:cs typeface="Arial" pitchFamily="34" charset="-120"/>
+              </a:rPr>
+              <a:t>Columns sum to a constant?</a:t>
+            </a:r>
+            <a:pPr algn="l" indent="0" marL="0">
+              <a:lnSpc>
+                <a:spcPts val="1620"/>
+              </a:lnSpc>
+              <a:spcAft>
+                <a:spcPts val="300"/>
+              </a:spcAft>
+              <a:buNone/>
+            </a:pPr>
+            <a:r>
+              <a:rPr lang="en-US" sz="1200" dirty="0">
+                <a:solidFill>
+                  <a:srgbClr val="1C2833"/>
+                </a:solidFill>
+                <a:latin typeface="Arial" pitchFamily="34" charset="0"/>
+                <a:ea typeface="Arial" pitchFamily="34" charset="-122"/>
+                <a:cs typeface="Arial" pitchFamily="34" charset="-120"/>
+              </a:rPr>
+              <a:t> — yes · not enforced</a:t>
             </a:r>
             <a:endParaRPr lang="en-US" sz="1200" dirty="0"/>
           </a:p>
@@ -5885,7 +7431,7 @@
                 <a:ea typeface="Georgia" pitchFamily="34" charset="-122"/>
                 <a:cs typeface="Georgia" pitchFamily="34" charset="-120"/>
               </a:rPr>
-              <a:t>Student-facing content</a:t>
+              <a:t>Core (15 min) (cont.)</a:t>
             </a:r>
             <a:endParaRPr lang="en-US" sz="1800" dirty="0"/>
           </a:p>
@@ -5899,61 +7445,148 @@
         </p:nvSpPr>
         <p:spPr>
           <a:xfrm>
-            <a:off x="406301" y="883593"/>
-            <a:ext cx="8331398" cy="2074069"/>
-          </a:xfrm>
-          <a:prstGeom prst="rect">
-            <a:avLst/>
-          </a:prstGeom>
-          <a:solidFill>
-            <a:srgbClr val="F4F8F9"/>
-          </a:solidFill>
+            <a:off x="406301" y="870942"/>
+            <a:ext cx="8498026" cy="213271"/>
+          </a:xfrm>
+          <a:prstGeom prst="rect">
+            <a:avLst/>
+          </a:prstGeom>
+          <a:noFill/>
           <a:ln/>
         </p:spPr>
         <p:txBody>
-          <a:bodyPr wrap="square" rtlCol="0" anchor="ctr"/>
-          <a:lstStyle/>
-          <a:p>
-            <a:pPr indent="0" marL="0">
-              <a:buNone/>
-            </a:pPr>
-            <a:endParaRPr lang="en-US" dirty="0"/>
-          </a:p>
-        </p:txBody>
-      </p:sp>
-      <p:sp>
-        <p:nvSpPr>
-          <p:cNvPr id="5" name="Shape 3"/>
+          <a:bodyPr wrap="square" lIns="0" tIns="0" rIns="0" bIns="0" rtlCol="0" anchor="t"/>
+          <a:lstStyle/>
+          <a:p>
+            <a:pPr algn="l" indent="0" marL="0">
+              <a:lnSpc>
+                <a:spcPts val="1680"/>
+              </a:lnSpc>
+              <a:spcBef>
+                <a:spcPts val="300"/>
+              </a:spcBef>
+              <a:spcAft>
+                <a:spcPts val="300"/>
+              </a:spcAft>
+              <a:buNone/>
+            </a:pPr>
+            <a:r>
+              <a:rPr lang="en-US" sz="1200" i="1" dirty="0">
+                <a:solidFill>
+                  <a:srgbClr val="1C2833"/>
+                </a:solidFill>
+                <a:latin typeface="Arial" pitchFamily="34" charset="0"/>
+                <a:ea typeface="Arial" pitchFamily="34" charset="-122"/>
+                <a:cs typeface="Arial" pitchFamily="34" charset="-120"/>
+              </a:rPr>
+              <a:t>"Magic squares constrain</a:t>
+            </a:r>
+            <a:pPr algn="l" indent="0" marL="0">
+              <a:lnSpc>
+                <a:spcPts val="1680"/>
+              </a:lnSpc>
+              <a:spcBef>
+                <a:spcPts val="300"/>
+              </a:spcBef>
+              <a:spcAft>
+                <a:spcPts val="300"/>
+              </a:spcAft>
+              <a:buNone/>
+            </a:pPr>
+            <a:r>
+              <a:rPr lang="en-US" sz="1200" dirty="0">
+                <a:solidFill>
+                  <a:srgbClr val="1C2833"/>
+                </a:solidFill>
+                <a:latin typeface="Arial" pitchFamily="34" charset="0"/>
+                <a:ea typeface="Arial" pitchFamily="34" charset="-122"/>
+                <a:cs typeface="Arial" pitchFamily="34" charset="-120"/>
+              </a:rPr>
+              <a:t> sums </a:t>
+            </a:r>
+            <a:pPr algn="l" indent="0" marL="0">
+              <a:lnSpc>
+                <a:spcPts val="1680"/>
+              </a:lnSpc>
+              <a:spcBef>
+                <a:spcPts val="300"/>
+              </a:spcBef>
+              <a:spcAft>
+                <a:spcPts val="300"/>
+              </a:spcAft>
+              <a:buNone/>
+            </a:pPr>
+            <a:r>
+              <a:rPr lang="en-US" sz="1200" i="1" dirty="0">
+                <a:solidFill>
+                  <a:srgbClr val="1C2833"/>
+                </a:solidFill>
+                <a:latin typeface="Arial" pitchFamily="34" charset="0"/>
+                <a:ea typeface="Arial" pitchFamily="34" charset="-122"/>
+                <a:cs typeface="Arial" pitchFamily="34" charset="-120"/>
+              </a:rPr>
+              <a:t>. Sudoku constrains</a:t>
+            </a:r>
+            <a:pPr algn="l" indent="0" marL="0">
+              <a:lnSpc>
+                <a:spcPts val="1680"/>
+              </a:lnSpc>
+              <a:spcBef>
+                <a:spcPts val="300"/>
+              </a:spcBef>
+              <a:spcAft>
+                <a:spcPts val="300"/>
+              </a:spcAft>
+              <a:buNone/>
+            </a:pPr>
+            <a:r>
+              <a:rPr lang="en-US" sz="1200" dirty="0">
+                <a:solidFill>
+                  <a:srgbClr val="1C2833"/>
+                </a:solidFill>
+                <a:latin typeface="Arial" pitchFamily="34" charset="0"/>
+                <a:ea typeface="Arial" pitchFamily="34" charset="-122"/>
+                <a:cs typeface="Arial" pitchFamily="34" charset="-120"/>
+              </a:rPr>
+              <a:t> placement </a:t>
+            </a:r>
+            <a:pPr algn="l" indent="0" marL="0">
+              <a:lnSpc>
+                <a:spcPts val="1680"/>
+              </a:lnSpc>
+              <a:spcBef>
+                <a:spcPts val="300"/>
+              </a:spcBef>
+              <a:spcAft>
+                <a:spcPts val="300"/>
+              </a:spcAft>
+              <a:buNone/>
+            </a:pPr>
+            <a:r>
+              <a:rPr lang="en-US" sz="1200" i="1" dirty="0">
+                <a:solidFill>
+                  <a:srgbClr val="1C2833"/>
+                </a:solidFill>
+                <a:latin typeface="Arial" pitchFamily="34" charset="0"/>
+                <a:ea typeface="Arial" pitchFamily="34" charset="-122"/>
+                <a:cs typeface="Arial" pitchFamily="34" charset="-120"/>
+              </a:rPr>
+              <a:t>. Different constraints — different puzzles."</a:t>
+            </a:r>
+            <a:endParaRPr lang="en-US" sz="1200" dirty="0"/>
+          </a:p>
+        </p:txBody>
+      </p:sp>
+      <p:sp>
+        <p:nvSpPr>
+          <p:cNvPr id="5" name="Text 3"/>
           <p:cNvSpPr/>
           <p:nvPr/>
         </p:nvSpPr>
         <p:spPr>
           <a:xfrm>
-            <a:off x="434876" y="883593"/>
-            <a:ext cx="0" cy="2074069"/>
-          </a:xfrm>
-          <a:prstGeom prst="line">
-            <a:avLst/>
-          </a:prstGeom>
-          <a:noFill/>
-          <a:ln w="57150">
-            <a:solidFill>
-              <a:srgbClr val="FE4447"/>
-            </a:solidFill>
-            <a:prstDash val="solid"/>
-          </a:ln>
-        </p:spPr>
-      </p:sp>
-      <p:sp>
-        <p:nvSpPr>
-          <p:cNvPr id="6" name="Text 4"/>
-          <p:cNvSpPr/>
-          <p:nvPr/>
-        </p:nvSpPr>
-        <p:spPr>
-          <a:xfrm>
-            <a:off x="692051" y="1074093"/>
-            <a:ext cx="7973389" cy="230981"/>
+            <a:off x="634901" y="1173063"/>
+            <a:ext cx="8102798" cy="487561"/>
           </a:xfrm>
           <a:prstGeom prst="rect">
             <a:avLst/>
@@ -5965,316 +7598,54 @@
           <a:bodyPr wrap="square" lIns="0" tIns="0" rIns="0" bIns="0" rtlCol="0" anchor="t"/>
           <a:lstStyle/>
           <a:p>
-            <a:pPr algn="l" indent="0" marL="0">
-              <a:lnSpc>
-                <a:spcPts val="1820"/>
-              </a:lnSpc>
-              <a:spcBef>
-                <a:spcPts val="300"/>
-              </a:spcBef>
-              <a:spcAft>
-                <a:spcPts val="300"/>
-              </a:spcAft>
-              <a:buNone/>
-            </a:pPr>
-            <a:r>
-              <a:rPr lang="en-US" sz="1300" b="1" i="1" dirty="0">
-                <a:solidFill>
-                  <a:srgbClr val="1C2833"/>
-                </a:solidFill>
-                <a:latin typeface="Georgia" pitchFamily="34" charset="0"/>
-                <a:ea typeface="Georgia" pitchFamily="34" charset="-122"/>
-                <a:cs typeface="Georgia" pitchFamily="34" charset="-120"/>
-              </a:rPr>
-              <a:t>Sudoku ≠ magic square.</a:t>
-            </a:r>
-            <a:endParaRPr lang="en-US" sz="1300" dirty="0"/>
-          </a:p>
-        </p:txBody>
-      </p:sp>
-      <p:sp>
-        <p:nvSpPr>
-          <p:cNvPr id="7" name="Text 5"/>
-          <p:cNvSpPr/>
-          <p:nvPr/>
-        </p:nvSpPr>
-        <p:spPr>
-          <a:xfrm>
-            <a:off x="692051" y="1343174"/>
-            <a:ext cx="7973389" cy="692944"/>
-          </a:xfrm>
-          <a:prstGeom prst="rect">
-            <a:avLst/>
-          </a:prstGeom>
-          <a:noFill/>
-          <a:ln/>
-        </p:spPr>
-        <p:txBody>
-          <a:bodyPr wrap="square" lIns="0" tIns="0" rIns="0" bIns="0" rtlCol="0" anchor="t"/>
-          <a:lstStyle/>
-          <a:p>
-            <a:pPr algn="l" indent="0" marL="0">
-              <a:lnSpc>
-                <a:spcPts val="1820"/>
-              </a:lnSpc>
-              <a:spcBef>
-                <a:spcPts val="300"/>
-              </a:spcBef>
-              <a:spcAft>
-                <a:spcPts val="300"/>
-              </a:spcAft>
-              <a:buNone/>
-            </a:pPr>
-            <a:r>
-              <a:rPr lang="en-US" sz="1300" dirty="0">
-                <a:solidFill>
-                  <a:srgbClr val="1C2833"/>
-                </a:solidFill>
-                <a:latin typeface="Georgia" pitchFamily="34" charset="0"/>
-                <a:ea typeface="Georgia" pitchFamily="34" charset="-122"/>
-                <a:cs typeface="Georgia" pitchFamily="34" charset="-120"/>
-              </a:rPr>
-              <a:t>| | Magic square (3×3, 1–9) | Sudoku 3×3 block | |---|---|---| | Cells | 9 distinct values from 1–9 | 9 distinct values from 1–9 | | Rows sum to a constant? | </a:t>
-            </a:r>
-            <a:pPr algn="l" indent="0" marL="0">
-              <a:lnSpc>
-                <a:spcPts val="1820"/>
-              </a:lnSpc>
-              <a:spcBef>
-                <a:spcPts val="300"/>
-              </a:spcBef>
-              <a:spcAft>
-                <a:spcPts val="300"/>
-              </a:spcAft>
-              <a:buNone/>
-            </a:pPr>
-            <a:r>
-              <a:rPr lang="en-US" sz="1300" b="1" i="1" dirty="0">
-                <a:solidFill>
-                  <a:srgbClr val="1C2833"/>
-                </a:solidFill>
-                <a:latin typeface="Georgia" pitchFamily="34" charset="0"/>
-                <a:ea typeface="Georgia" pitchFamily="34" charset="-122"/>
-                <a:cs typeface="Georgia" pitchFamily="34" charset="-120"/>
-              </a:rPr>
-              <a:t>Yes (15)</a:t>
-            </a:r>
-            <a:pPr algn="l" indent="0" marL="0">
-              <a:lnSpc>
-                <a:spcPts val="1820"/>
-              </a:lnSpc>
-              <a:spcBef>
-                <a:spcPts val="300"/>
-              </a:spcBef>
-              <a:spcAft>
-                <a:spcPts val="300"/>
-              </a:spcAft>
-              <a:buNone/>
-            </a:pPr>
-            <a:r>
-              <a:rPr lang="en-US" sz="1300" dirty="0">
-                <a:solidFill>
-                  <a:srgbClr val="1C2833"/>
-                </a:solidFill>
-                <a:latin typeface="Georgia" pitchFamily="34" charset="0"/>
-                <a:ea typeface="Georgia" pitchFamily="34" charset="-122"/>
-                <a:cs typeface="Georgia" pitchFamily="34" charset="-120"/>
-              </a:rPr>
-              <a:t> | No requirement | | Each row has all 9 digits? | No (only 3 cells) | </a:t>
-            </a:r>
-            <a:pPr algn="l" indent="0" marL="0">
-              <a:lnSpc>
-                <a:spcPts val="1820"/>
-              </a:lnSpc>
-              <a:spcBef>
-                <a:spcPts val="300"/>
-              </a:spcBef>
-              <a:spcAft>
-                <a:spcPts val="300"/>
-              </a:spcAft>
-              <a:buNone/>
-            </a:pPr>
-            <a:r>
-              <a:rPr lang="en-US" sz="1300" b="1" i="1" dirty="0">
-                <a:solidFill>
-                  <a:srgbClr val="1C2833"/>
-                </a:solidFill>
-                <a:latin typeface="Georgia" pitchFamily="34" charset="0"/>
-                <a:ea typeface="Georgia" pitchFamily="34" charset="-122"/>
-                <a:cs typeface="Georgia" pitchFamily="34" charset="-120"/>
-              </a:rPr>
-              <a:t>Yes</a:t>
-            </a:r>
-            <a:pPr algn="l" indent="0" marL="0">
-              <a:lnSpc>
-                <a:spcPts val="1820"/>
-              </a:lnSpc>
-              <a:spcBef>
-                <a:spcPts val="300"/>
-              </a:spcBef>
-              <a:spcAft>
-                <a:spcPts val="300"/>
-              </a:spcAft>
-              <a:buNone/>
-            </a:pPr>
-            <a:r>
-              <a:rPr lang="en-US" sz="1300" dirty="0">
-                <a:solidFill>
-                  <a:srgbClr val="1C2833"/>
-                </a:solidFill>
-                <a:latin typeface="Georgia" pitchFamily="34" charset="0"/>
-                <a:ea typeface="Georgia" pitchFamily="34" charset="-122"/>
-                <a:cs typeface="Georgia" pitchFamily="34" charset="-120"/>
-              </a:rPr>
-              <a:t> (in 9×9 Sudoku) | | Diagonals constrained? | </a:t>
-            </a:r>
-            <a:pPr algn="l" indent="0" marL="0">
-              <a:lnSpc>
-                <a:spcPts val="1820"/>
-              </a:lnSpc>
-              <a:spcBef>
-                <a:spcPts val="300"/>
-              </a:spcBef>
-              <a:spcAft>
-                <a:spcPts val="300"/>
-              </a:spcAft>
-              <a:buNone/>
-            </a:pPr>
-            <a:r>
-              <a:rPr lang="en-US" sz="1300" b="1" i="1" dirty="0">
-                <a:solidFill>
-                  <a:srgbClr val="1C2833"/>
-                </a:solidFill>
-                <a:latin typeface="Georgia" pitchFamily="34" charset="0"/>
-                <a:ea typeface="Georgia" pitchFamily="34" charset="-122"/>
-                <a:cs typeface="Georgia" pitchFamily="34" charset="-120"/>
-              </a:rPr>
-              <a:t>Sums</a:t>
-            </a:r>
-            <a:pPr algn="l" indent="0" marL="0">
-              <a:lnSpc>
-                <a:spcPts val="1820"/>
-              </a:lnSpc>
-              <a:spcBef>
-                <a:spcPts val="300"/>
-              </a:spcBef>
-              <a:spcAft>
-                <a:spcPts val="300"/>
-              </a:spcAft>
-              <a:buNone/>
-            </a:pPr>
-            <a:r>
-              <a:rPr lang="en-US" sz="1300" dirty="0">
-                <a:solidFill>
-                  <a:srgbClr val="1C2833"/>
-                </a:solidFill>
-                <a:latin typeface="Georgia" pitchFamily="34" charset="0"/>
-                <a:ea typeface="Georgia" pitchFamily="34" charset="-122"/>
-                <a:cs typeface="Georgia" pitchFamily="34" charset="-120"/>
-              </a:rPr>
-              <a:t> | Not required |</a:t>
-            </a:r>
-            <a:endParaRPr lang="en-US" sz="1300" dirty="0"/>
-          </a:p>
-        </p:txBody>
-      </p:sp>
-      <p:sp>
-        <p:nvSpPr>
-          <p:cNvPr id="8" name="Text 6"/>
-          <p:cNvSpPr/>
-          <p:nvPr/>
-        </p:nvSpPr>
-        <p:spPr>
-          <a:xfrm>
-            <a:off x="692051" y="2074218"/>
-            <a:ext cx="7973389" cy="692944"/>
-          </a:xfrm>
-          <a:prstGeom prst="rect">
-            <a:avLst/>
-          </a:prstGeom>
-          <a:noFill/>
-          <a:ln/>
-        </p:spPr>
-        <p:txBody>
-          <a:bodyPr wrap="square" lIns="0" tIns="0" rIns="0" bIns="0" rtlCol="0" anchor="t"/>
-          <a:lstStyle/>
-          <a:p>
-            <a:pPr algn="l" indent="0" marL="0">
-              <a:lnSpc>
-                <a:spcPts val="1820"/>
-              </a:lnSpc>
-              <a:spcBef>
-                <a:spcPts val="300"/>
-              </a:spcBef>
-              <a:spcAft>
-                <a:spcPts val="300"/>
-              </a:spcAft>
-              <a:buNone/>
-            </a:pPr>
-            <a:r>
-              <a:rPr lang="en-US" sz="1300" dirty="0">
-                <a:solidFill>
-                  <a:srgbClr val="1C2833"/>
-                </a:solidFill>
-                <a:latin typeface="Georgia" pitchFamily="34" charset="0"/>
-                <a:ea typeface="Georgia" pitchFamily="34" charset="-122"/>
-                <a:cs typeface="Georgia" pitchFamily="34" charset="-120"/>
-              </a:rPr>
-              <a:t>Both are </a:t>
-            </a:r>
-            <a:pPr algn="l" indent="0" marL="0">
-              <a:lnSpc>
-                <a:spcPts val="1820"/>
-              </a:lnSpc>
-              <a:spcBef>
-                <a:spcPts val="300"/>
-              </a:spcBef>
-              <a:spcAft>
-                <a:spcPts val="300"/>
-              </a:spcAft>
-              <a:buNone/>
-            </a:pPr>
-            <a:r>
-              <a:rPr lang="en-US" sz="1300" i="1" dirty="0">
-                <a:solidFill>
-                  <a:srgbClr val="1C2833"/>
-                </a:solidFill>
-                <a:latin typeface="Georgia" pitchFamily="34" charset="0"/>
-                <a:ea typeface="Georgia" pitchFamily="34" charset="-122"/>
-                <a:cs typeface="Georgia" pitchFamily="34" charset="-120"/>
-              </a:rPr>
-              <a:t>constraint-satisfaction</a:t>
-            </a:r>
-            <a:pPr algn="l" indent="0" marL="0">
-              <a:lnSpc>
-                <a:spcPts val="1820"/>
-              </a:lnSpc>
-              <a:spcBef>
-                <a:spcPts val="300"/>
-              </a:spcBef>
-              <a:spcAft>
-                <a:spcPts val="300"/>
-              </a:spcAft>
-              <a:buNone/>
-            </a:pPr>
-            <a:r>
-              <a:rPr lang="en-US" sz="1300" dirty="0">
-                <a:solidFill>
-                  <a:srgbClr val="1C2833"/>
-                </a:solidFill>
-                <a:latin typeface="Georgia" pitchFamily="34" charset="0"/>
-                <a:ea typeface="Georgia" pitchFamily="34" charset="-122"/>
-                <a:cs typeface="Georgia" pitchFamily="34" charset="-120"/>
-              </a:rPr>
-              <a:t> problems. Different constraints — different puzzles. Sudoku appeared in modern form in the 1970s–80s (popularised in Japan from 1986). Magic squares are at least 2500 years old (Lo Shu).</a:t>
-            </a:r>
-            <a:endParaRPr lang="en-US" sz="1300" dirty="0"/>
-          </a:p>
-        </p:txBody>
-      </p:sp>
-      <p:sp>
-        <p:nvSpPr>
-          <p:cNvPr id="9" name="Text 7"/>
+            <a:pPr algn="l" marL="342900" indent="-342900">
+              <a:lnSpc>
+                <a:spcPts val="1620"/>
+              </a:lnSpc>
+              <a:spcAft>
+                <a:spcPts val="300"/>
+              </a:spcAft>
+              <a:buSzPct val="100000"/>
+              <a:buChar char="•"/>
+            </a:pPr>
+            <a:r>
+              <a:rPr lang="en-US" sz="1200" b="1" dirty="0">
+                <a:solidFill>
+                  <a:srgbClr val="1C2833"/>
+                </a:solidFill>
+                <a:latin typeface="Arial" pitchFamily="34" charset="0"/>
+                <a:ea typeface="Arial" pitchFamily="34" charset="-122"/>
+                <a:cs typeface="Arial" pitchFamily="34" charset="-120"/>
+              </a:rPr>
+              <a:t>Both are constraint-satisfaction problems.</a:t>
+            </a:r>
+            <a:pPr algn="l" indent="0" marL="0">
+              <a:lnSpc>
+                <a:spcPts val="1620"/>
+              </a:lnSpc>
+              <a:spcAft>
+                <a:spcPts val="300"/>
+              </a:spcAft>
+              <a:buNone/>
+            </a:pPr>
+            <a:r>
+              <a:rPr lang="en-US" sz="1200" dirty="0">
+                <a:solidFill>
+                  <a:srgbClr val="1C2833"/>
+                </a:solidFill>
+                <a:latin typeface="Arial" pitchFamily="34" charset="0"/>
+                <a:ea typeface="Arial" pitchFamily="34" charset="-122"/>
+                <a:cs typeface="Arial" pitchFamily="34" charset="-120"/>
+              </a:rPr>
+              <a:t> Each gives you a structure (9 cells in 3×3, or 81 cells in 9×9) and a set of rules. You search for placements that satisfy all rules. Computers solve these the same way.</a:t>
+            </a:r>
+            <a:endParaRPr lang="en-US" sz="1200" dirty="0"/>
+          </a:p>
+        </p:txBody>
+      </p:sp>
+      <p:sp>
+        <p:nvSpPr>
+          <p:cNvPr id="6" name="Text 4"/>
           <p:cNvSpPr/>
           <p:nvPr/>
         </p:nvSpPr>
